--- a/seminar_04/presentation.pptx
+++ b/seminar_04/presentation.pptx
@@ -310,7 +310,7 @@
           <a:p>
             <a:fld id="{144F1436-6906-4D93-B7A2-786C327BFA14}" type="datetimeFigureOut">
               <a:rPr lang="nl-BE" smtClean="0"/>
-              <a:t>25/04/2026</a:t>
+              <a:t>4/05/2026</a:t>
             </a:fld>
             <a:endParaRPr lang="nl-BE"/>
           </a:p>
@@ -475,7 +475,7 @@
           <a:p>
             <a:fld id="{AA8CD09E-2914-4F47-B6C1-51B2C31814C9}" type="datetimeFigureOut">
               <a:rPr lang="pt-BR" smtClean="0"/>
-              <a:t>25/04/2026</a:t>
+              <a:t>04/05/2026</a:t>
             </a:fld>
             <a:endParaRPr lang="pt-BR"/>
           </a:p>
@@ -838,6 +838,1331 @@
   <p:cSld>
     <p:spTree>
       <p:nvGrpSpPr>
+        <p:cNvPr id="1" name=""/>
+        <p:cNvGrpSpPr/>
+        <p:nvPr/>
+      </p:nvGrpSpPr>
+      <p:grpSpPr>
+        <a:xfrm>
+          <a:off x="0" y="0"/>
+          <a:ext cx="0" cy="0"/>
+          <a:chOff x="0" y="0"/>
+          <a:chExt cx="0" cy="0"/>
+        </a:xfrm>
+      </p:grpSpPr>
+      <p:sp>
+        <p:nvSpPr>
+          <p:cNvPr id="2" name="Slide Image Placeholder 1"/>
+          <p:cNvSpPr>
+            <a:spLocks noGrp="1" noRot="1" noChangeAspect="1"/>
+          </p:cNvSpPr>
+          <p:nvPr>
+            <p:ph type="sldImg"/>
+          </p:nvPr>
+        </p:nvSpPr>
+        <p:spPr/>
+        <p:txBody>
+          <a:bodyPr/>
+          <a:lstStyle/>
+          <a:p>
+            <a:endParaRPr lang="pt-BR"/>
+          </a:p>
+        </p:txBody>
+      </p:sp>
+      <mc:AlternateContent xmlns:mc="http://schemas.openxmlformats.org/markup-compatibility/2006" xmlns:a14="http://schemas.microsoft.com/office/drawing/2010/main">
+        <mc:Choice Requires="a14">
+          <p:sp>
+            <p:nvSpPr>
+              <p:cNvPr id="3" name="Notes Placeholder 2"/>
+              <p:cNvSpPr>
+                <a:spLocks noGrp="1"/>
+              </p:cNvSpPr>
+              <p:nvPr>
+                <p:ph type="body" idx="1"/>
+              </p:nvPr>
+            </p:nvSpPr>
+            <p:spPr/>
+            <p:txBody>
+              <a:bodyPr/>
+              <a:lstStyle/>
+              <a:p>
+                <a:r>
+                  <a:rPr lang="pt-BR" dirty="0"/>
+                  <a:t>O sistema proposto parte de um </a:t>
+                </a:r>
+                <a:r>
+                  <a:rPr lang="pt-BR" b="1" dirty="0" err="1"/>
+                  <a:t>search</a:t>
+                </a:r>
+                <a:r>
+                  <a:rPr lang="pt-BR" b="1" dirty="0"/>
+                  <a:t> </a:t>
+                </a:r>
+                <a:r>
+                  <a:rPr lang="pt-BR" b="1" dirty="0" err="1"/>
+                  <a:t>space</a:t>
+                </a:r>
+                <a:r>
+                  <a:rPr lang="pt-BR" b="1" dirty="0"/>
+                  <a:t> definido pelo usuário</a:t>
+                </a:r>
+                <a:r>
+                  <a:rPr lang="pt-BR" dirty="0"/>
+                  <a:t>. Esse </a:t>
+                </a:r>
+                <a:r>
+                  <a:rPr lang="pt-BR" dirty="0" err="1"/>
+                  <a:t>search</a:t>
+                </a:r>
+                <a:r>
+                  <a:rPr lang="pt-BR" dirty="0"/>
+                  <a:t> </a:t>
+                </a:r>
+                <a:r>
+                  <a:rPr lang="pt-BR" dirty="0" err="1"/>
+                  <a:t>space</a:t>
+                </a:r>
+                <a:r>
+                  <a:rPr lang="pt-BR" dirty="0"/>
+                  <a:t> especifica: </a:t>
+                </a:r>
+                <a:r>
+                  <a:rPr lang="pt-BR" b="1" dirty="0"/>
+                  <a:t>quais entradas podem alimentar cada bloco</a:t>
+                </a:r>
+                <a:r>
+                  <a:rPr lang="pt-BR" dirty="0"/>
+                  <a:t>, </a:t>
+                </a:r>
+              </a:p>
+              <a:p>
+                <a:r>
+                  <a:rPr lang="pt-BR" b="1" dirty="0"/>
+                  <a:t>quais operações são candidatas</a:t>
+                </a:r>
+                <a:r>
+                  <a:rPr lang="pt-BR" dirty="0"/>
+                  <a:t>, </a:t>
+                </a:r>
+              </a:p>
+              <a:p>
+                <a:r>
+                  <a:rPr lang="pt-BR" b="1" dirty="0"/>
+                  <a:t>quais taxas de redução de canais podem ser escolhidas</a:t>
+                </a:r>
+                <a:r>
+                  <a:rPr lang="pt-BR" dirty="0"/>
+                  <a:t>. </a:t>
+                </a:r>
+              </a:p>
+              <a:p>
+                <a:r>
+                  <a:rPr lang="pt-BR" dirty="0"/>
+                  <a:t>A partir dessa definição, o </a:t>
+                </a:r>
+                <a:r>
+                  <a:rPr lang="pt-BR" dirty="0" err="1"/>
+                  <a:t>EasyNAS</a:t>
+                </a:r>
+                <a:r>
+                  <a:rPr lang="pt-BR" dirty="0"/>
+                  <a:t> constrói automaticamente um </a:t>
+                </a:r>
+                <a:r>
+                  <a:rPr lang="pt-BR" b="1" dirty="0" err="1"/>
+                  <a:t>supernet</a:t>
+                </a:r>
+                <a:r>
+                  <a:rPr lang="pt-BR" dirty="0"/>
+                  <a:t>. Esse </a:t>
+                </a:r>
+                <a:r>
+                  <a:rPr lang="pt-BR" dirty="0" err="1"/>
+                  <a:t>supernet</a:t>
+                </a:r>
+                <a:r>
+                  <a:rPr lang="pt-BR" dirty="0"/>
+                  <a:t> é formado pelo empilhamento de </a:t>
+                </a:r>
+                <a:r>
+                  <a:rPr lang="pt-BR" b="1" dirty="0" err="1"/>
+                  <a:t>atomic</a:t>
+                </a:r>
+                <a:r>
+                  <a:rPr lang="pt-BR" b="1" dirty="0"/>
+                  <a:t> </a:t>
+                </a:r>
+                <a:r>
+                  <a:rPr lang="pt-BR" b="1" dirty="0" err="1"/>
+                  <a:t>search</a:t>
+                </a:r>
+                <a:r>
+                  <a:rPr lang="pt-BR" b="1" dirty="0"/>
+                  <a:t> </a:t>
+                </a:r>
+                <a:r>
+                  <a:rPr lang="pt-BR" b="1" dirty="0" err="1"/>
+                  <a:t>components</a:t>
+                </a:r>
+                <a:r>
+                  <a:rPr lang="pt-BR" dirty="0"/>
+                  <a:t>. </a:t>
+                </a:r>
+              </a:p>
+              <a:p>
+                <a:r>
+                  <a:rPr lang="pt-BR" dirty="0"/>
+                  <a:t>A ideia é usar a mesma lógica de construção para diferentes tarefas de visão, alterando apenas o </a:t>
+                </a:r>
+                <a:r>
+                  <a:rPr lang="pt-BR" dirty="0" err="1"/>
+                  <a:t>search</a:t>
+                </a:r>
+                <a:r>
+                  <a:rPr lang="pt-BR" dirty="0"/>
+                  <a:t> </a:t>
+                </a:r>
+                <a:r>
+                  <a:rPr lang="pt-BR" dirty="0" err="1"/>
+                  <a:t>space</a:t>
+                </a:r>
+                <a:r>
+                  <a:rPr lang="pt-BR" dirty="0"/>
+                  <a:t> e a forma como os blocos são organizados. Em resumo: </a:t>
+                </a:r>
+                <a:r>
+                  <a:rPr lang="pt-BR" b="1" dirty="0"/>
+                  <a:t>entrada do sistema:</a:t>
+                </a:r>
+                <a:r>
+                  <a:rPr lang="pt-BR" dirty="0"/>
+                  <a:t> </a:t>
+                </a:r>
+                <a:r>
+                  <a:rPr lang="pt-BR" dirty="0" err="1"/>
+                  <a:t>search</a:t>
+                </a:r>
+                <a:r>
+                  <a:rPr lang="pt-BR" dirty="0"/>
+                  <a:t> </a:t>
+                </a:r>
+                <a:r>
+                  <a:rPr lang="pt-BR" dirty="0" err="1"/>
+                  <a:t>space</a:t>
+                </a:r>
+                <a:r>
+                  <a:rPr lang="pt-BR" dirty="0"/>
+                  <a:t> + pesos compartilhados iniciais + máscaras das operações, </a:t>
+                </a:r>
+              </a:p>
+              <a:p>
+                <a:r>
+                  <a:rPr lang="pt-BR" b="1" dirty="0"/>
+                  <a:t>processamento:</a:t>
+                </a:r>
+                <a:r>
+                  <a:rPr lang="pt-BR" dirty="0"/>
+                  <a:t> treinamento do </a:t>
+                </a:r>
+                <a:r>
+                  <a:rPr lang="pt-BR" dirty="0" err="1"/>
+                  <a:t>supernet</a:t>
+                </a:r>
+                <a:r>
+                  <a:rPr lang="pt-BR" dirty="0"/>
+                  <a:t> com busca por operações, conexões e redução de canais, </a:t>
+                </a:r>
+              </a:p>
+              <a:p>
+                <a:r>
+                  <a:rPr lang="pt-BR" b="1" dirty="0"/>
+                  <a:t>saída do sistema:</a:t>
+                </a:r>
+                <a:r>
+                  <a:rPr lang="pt-BR" dirty="0"/>
+                  <a:t> arquitetura final discreta, derivada dos parâmetros aprendidos.</a:t>
+                </a:r>
+              </a:p>
+              <a:p>
+                <a:endParaRPr lang="pt-BR" dirty="0"/>
+              </a:p>
+              <a:p>
+                <a:endParaRPr lang="pt-BR" dirty="0"/>
+              </a:p>
+              <a:p>
+                <a:r>
+                  <a:rPr lang="pt-BR" b="1" dirty="0"/>
+                  <a:t>1. </a:t>
+                </a:r>
+                <a:r>
+                  <a:rPr lang="pt-BR" b="1" dirty="0" err="1"/>
+                  <a:t>Convolution</a:t>
+                </a:r>
+                <a:r>
+                  <a:rPr lang="pt-BR" b="1" dirty="0"/>
+                  <a:t> </a:t>
+                </a:r>
+                <a:r>
+                  <a:rPr lang="pt-BR" b="1" dirty="0" err="1"/>
+                  <a:t>operator</a:t>
+                </a:r>
+                <a:r>
+                  <a:rPr lang="pt-BR" b="1" dirty="0"/>
+                  <a:t> </a:t>
+                </a:r>
+                <a:r>
+                  <a:rPr lang="pt-BR" b="1" dirty="0" err="1"/>
+                  <a:t>merging</a:t>
+                </a:r>
+                <a:endParaRPr lang="pt-BR" b="1" dirty="0"/>
+              </a:p>
+              <a:p>
+                <a:r>
+                  <a:rPr lang="pt-BR" b="1" dirty="0"/>
+                  <a:t>Ideia simples</a:t>
+                </a:r>
+              </a:p>
+              <a:p>
+                <a:r>
+                  <a:rPr lang="pt-BR" dirty="0"/>
+                  <a:t>No DARTS comum, se uma aresta tem quatro convoluções candidatas, ele calcula as quatro:</a:t>
+                </a:r>
+              </a:p>
+              <a:p>
+                <a:pPr rtl="0"/>
+                <a:r>
+                  <a:rPr lang="pt-BR" sz="1200" kern="1200" dirty="0">
+                    <a:solidFill>
+                      <a:schemeClr val="tx1"/>
+                    </a:solidFill>
+                    <a:latin typeface="+mn-lt"/>
+                    <a:ea typeface="+mn-ea"/>
+                    <a:cs typeface="+mn-cs"/>
+                  </a:rPr>
+                  <a:t>saída = α1 conv3x3(x) + α2 conv5x5(x) + α3 conv3x3_dilatada(x) + α4 conv5x5_dilatada(x)</a:t>
+                </a:r>
+              </a:p>
+              <a:p>
+                <a:r>
+                  <a:rPr lang="pt-BR" dirty="0"/>
+                  <a:t>Isso custa muito porque todas as convoluções precisam ser executadas e seus mapas intermediários precisam ficar na memória para o </a:t>
+                </a:r>
+                <a:r>
+                  <a:rPr lang="pt-BR" dirty="0" err="1"/>
+                  <a:t>backpropagation</a:t>
+                </a:r>
+                <a:r>
+                  <a:rPr lang="pt-BR" dirty="0"/>
+                  <a:t>.</a:t>
+                </a:r>
+              </a:p>
+              <a:p>
+                <a:r>
+                  <a:rPr lang="pt-BR" dirty="0"/>
+                  <a:t>O </a:t>
+                </a:r>
+                <a:r>
+                  <a:rPr lang="pt-BR" b="1" dirty="0" err="1"/>
+                  <a:t>convolution</a:t>
+                </a:r>
+                <a:r>
+                  <a:rPr lang="pt-BR" b="1" dirty="0"/>
+                  <a:t> </a:t>
+                </a:r>
+                <a:r>
+                  <a:rPr lang="pt-BR" b="1" dirty="0" err="1"/>
+                  <a:t>operator</a:t>
+                </a:r>
+                <a:r>
+                  <a:rPr lang="pt-BR" b="1" dirty="0"/>
+                  <a:t> </a:t>
+                </a:r>
+                <a:r>
+                  <a:rPr lang="pt-BR" b="1" dirty="0" err="1"/>
+                  <a:t>merging</a:t>
+                </a:r>
+                <a:r>
+                  <a:rPr lang="pt-BR" dirty="0"/>
+                  <a:t> troca isso por uma ideia: em vez de executar várias convoluções e somar os resultados, ele constrói </a:t>
+                </a:r>
+                <a:r>
+                  <a:rPr lang="pt-BR" b="1" dirty="0"/>
+                  <a:t>uma única convolução equivalente</a:t>
+                </a:r>
+                <a:r>
+                  <a:rPr lang="pt-BR" dirty="0"/>
+                  <a:t>.</a:t>
+                </a:r>
+              </a:p>
+              <a:p>
+                <a:endParaRPr lang="pt-BR" dirty="0"/>
+              </a:p>
+              <a:p>
+                <a:r>
+                  <a:rPr lang="pt-BR" dirty="0"/>
+                  <a:t>O problema é que uma </a:t>
+                </a:r>
+                <a:r>
+                  <a:rPr lang="pt-BR" dirty="0" err="1"/>
+                  <a:t>conv</a:t>
+                </a:r>
+                <a:r>
+                  <a:rPr lang="pt-BR" dirty="0"/>
+                  <a:t> 3×3 e uma </a:t>
+                </a:r>
+                <a:r>
+                  <a:rPr lang="pt-BR" dirty="0" err="1"/>
+                  <a:t>conv</a:t>
+                </a:r>
+                <a:r>
+                  <a:rPr lang="pt-BR" dirty="0"/>
+                  <a:t> 5×5 não têm o mesmo tamanho. O </a:t>
+                </a:r>
+                <a:r>
+                  <a:rPr lang="pt-BR" dirty="0" err="1"/>
+                  <a:t>paper</a:t>
+                </a:r>
+                <a:r>
+                  <a:rPr lang="pt-BR" dirty="0"/>
+                  <a:t> resolve isso usando </a:t>
+                </a:r>
+                <a:r>
+                  <a:rPr lang="pt-BR" b="1" dirty="0"/>
+                  <a:t>máscaras</a:t>
+                </a:r>
+                <a:r>
+                  <a:rPr lang="pt-BR" dirty="0"/>
+                  <a:t>.</a:t>
+                </a:r>
+              </a:p>
+              <a:p>
+                <a:r>
+                  <a:rPr lang="pt-BR" dirty="0"/>
+                  <a:t>Exemplo:</a:t>
+                </a:r>
+              </a:p>
+              <a:p>
+                <a:r>
+                  <a:rPr lang="pt-BR" dirty="0"/>
+                  <a:t>Uma </a:t>
+                </a:r>
+                <a:r>
+                  <a:rPr lang="pt-BR" dirty="0" err="1"/>
+                  <a:t>conv</a:t>
+                </a:r>
+                <a:r>
+                  <a:rPr lang="pt-BR" dirty="0"/>
+                  <a:t> 3×3 pode ser vista como uma </a:t>
+                </a:r>
+                <a:r>
+                  <a:rPr lang="pt-BR" dirty="0" err="1"/>
+                  <a:t>conv</a:t>
+                </a:r>
+                <a:r>
+                  <a:rPr lang="pt-BR" dirty="0"/>
+                  <a:t> 5×5 onde a borda é zero.</a:t>
+                </a:r>
+              </a:p>
+              <a:p>
+                <a:endParaRPr lang="pt-BR" dirty="0"/>
+              </a:p>
+              <a:p>
+                <a:r>
+                  <a:rPr lang="pt-BR" dirty="0"/>
+                  <a:t>Uma convolução dilatada também pode ser vista como uma convolução normal maior, mas com zeros entre os pesos.</a:t>
+                </a:r>
+              </a:p>
+              <a:p>
+                <a:r>
+                  <a:rPr lang="pt-BR" dirty="0"/>
+                  <a:t>Então o método cria um kernel grande compartilhado, por exemplo 5×5 ou maior, e usa máscaras para representar cada operação candidata. A arquitetura aprende pesos α para dizer qual máscara, ou seja, qual operação, é mais importante.</a:t>
+                </a:r>
+              </a:p>
+              <a:p>
+                <a:endParaRPr lang="pt-BR" dirty="0"/>
+              </a:p>
+              <a:p>
+                <a:endParaRPr lang="pt-BR" dirty="0"/>
+              </a:p>
+              <a:p>
+                <a:r>
+                  <a:rPr lang="pt-BR" b="1" dirty="0"/>
+                  <a:t>2. Dynamic </a:t>
+                </a:r>
+                <a:r>
+                  <a:rPr lang="pt-BR" b="1" dirty="0" err="1"/>
+                  <a:t>channel</a:t>
+                </a:r>
+                <a:r>
+                  <a:rPr lang="pt-BR" b="1" dirty="0"/>
+                  <a:t> </a:t>
+                </a:r>
+                <a:r>
+                  <a:rPr lang="pt-BR" b="1" dirty="0" err="1"/>
+                  <a:t>refinement</a:t>
+                </a:r>
+                <a:endParaRPr lang="pt-BR" b="1" dirty="0"/>
+              </a:p>
+              <a:p>
+                <a:r>
+                  <a:rPr lang="pt-BR" b="1" dirty="0"/>
+                  <a:t>Ideia simples</a:t>
+                </a:r>
+              </a:p>
+              <a:p>
+                <a:r>
+                  <a:rPr lang="pt-BR" dirty="0"/>
+                  <a:t>Além de escolher </a:t>
+                </a:r>
+                <a:r>
+                  <a:rPr lang="pt-BR" b="1" dirty="0"/>
+                  <a:t>qual operação</a:t>
+                </a:r>
+                <a:r>
+                  <a:rPr lang="pt-BR" dirty="0"/>
+                  <a:t> usar, o </a:t>
+                </a:r>
+                <a:r>
+                  <a:rPr lang="pt-BR" dirty="0" err="1"/>
+                  <a:t>EasyNAS</a:t>
+                </a:r>
+                <a:r>
+                  <a:rPr lang="pt-BR" dirty="0"/>
+                  <a:t> também tenta escolher </a:t>
+                </a:r>
+                <a:r>
+                  <a:rPr lang="pt-BR" b="1" dirty="0"/>
+                  <a:t>quantos canais</a:t>
+                </a:r>
+                <a:r>
+                  <a:rPr lang="pt-BR" dirty="0"/>
+                  <a:t> cada bloco deve usar.</a:t>
+                </a:r>
+              </a:p>
+              <a:p>
+                <a:r>
+                  <a:rPr lang="pt-BR" dirty="0"/>
+                  <a:t>Por exemplo, uma camada poderia ter:</a:t>
+                </a:r>
+              </a:p>
+              <a:p>
+                <a:pPr rtl="0"/>
+                <a:r>
+                  <a:rPr lang="pt-BR" sz="1200" kern="1200" dirty="0">
+                    <a:solidFill>
+                      <a:schemeClr val="tx1"/>
+                    </a:solidFill>
+                    <a:latin typeface="+mn-lt"/>
+                    <a:ea typeface="+mn-ea"/>
+                    <a:cs typeface="+mn-cs"/>
+                  </a:rPr>
+                  <a:t>100% dos canais</a:t>
+                </a:r>
+                <a:br>
+                  <a:rPr lang="pt-BR" sz="1200" kern="1200" dirty="0">
+                    <a:solidFill>
+                      <a:schemeClr val="tx1"/>
+                    </a:solidFill>
+                    <a:latin typeface="+mn-lt"/>
+                    <a:ea typeface="+mn-ea"/>
+                    <a:cs typeface="+mn-cs"/>
+                  </a:rPr>
+                </a:br>
+                <a:r>
+                  <a:rPr lang="pt-BR" sz="1200" kern="1200" dirty="0">
+                    <a:solidFill>
+                      <a:schemeClr val="tx1"/>
+                    </a:solidFill>
+                    <a:latin typeface="+mn-lt"/>
+                    <a:ea typeface="+mn-ea"/>
+                    <a:cs typeface="+mn-cs"/>
+                  </a:rPr>
+                  <a:t>75% dos canais</a:t>
+                </a:r>
+                <a:br>
+                  <a:rPr lang="pt-BR" sz="1200" kern="1200" dirty="0">
+                    <a:solidFill>
+                      <a:schemeClr val="tx1"/>
+                    </a:solidFill>
+                    <a:latin typeface="+mn-lt"/>
+                    <a:ea typeface="+mn-ea"/>
+                    <a:cs typeface="+mn-cs"/>
+                  </a:rPr>
+                </a:br>
+                <a:r>
+                  <a:rPr lang="pt-BR" sz="1200" kern="1200" dirty="0">
+                    <a:solidFill>
+                      <a:schemeClr val="tx1"/>
+                    </a:solidFill>
+                    <a:latin typeface="+mn-lt"/>
+                    <a:ea typeface="+mn-ea"/>
+                    <a:cs typeface="+mn-cs"/>
+                  </a:rPr>
+                  <a:t>50% dos canais</a:t>
+                </a:r>
+              </a:p>
+              <a:p>
+                <a:r>
+                  <a:rPr lang="pt-BR" dirty="0"/>
+                  <a:t>Isso é importante porque número de canais controla diretamente:</a:t>
+                </a:r>
+              </a:p>
+              <a:p>
+                <a:pPr rtl="0"/>
+                <a:r>
+                  <a:rPr lang="pt-BR" sz="1200" kern="1200" dirty="0">
+                    <a:solidFill>
+                      <a:schemeClr val="tx1"/>
+                    </a:solidFill>
+                    <a:latin typeface="+mn-lt"/>
+                    <a:ea typeface="+mn-ea"/>
+                    <a:cs typeface="+mn-cs"/>
+                  </a:rPr>
+                  <a:t>parâmetros</a:t>
+                </a:r>
+                <a:br>
+                  <a:rPr lang="pt-BR" sz="1200" kern="1200" dirty="0">
+                    <a:solidFill>
+                      <a:schemeClr val="tx1"/>
+                    </a:solidFill>
+                    <a:latin typeface="+mn-lt"/>
+                    <a:ea typeface="+mn-ea"/>
+                    <a:cs typeface="+mn-cs"/>
+                  </a:rPr>
+                </a:br>
+                <a:r>
+                  <a:rPr lang="pt-BR" sz="1200" kern="1200" dirty="0" err="1">
+                    <a:solidFill>
+                      <a:schemeClr val="tx1"/>
+                    </a:solidFill>
+                    <a:latin typeface="+mn-lt"/>
+                    <a:ea typeface="+mn-ea"/>
+                    <a:cs typeface="+mn-cs"/>
+                  </a:rPr>
+                  <a:t>FLOPs</a:t>
+                </a:r>
+                <a:br>
+                  <a:rPr lang="pt-BR" sz="1200" kern="1200" dirty="0">
+                    <a:solidFill>
+                      <a:schemeClr val="tx1"/>
+                    </a:solidFill>
+                    <a:latin typeface="+mn-lt"/>
+                    <a:ea typeface="+mn-ea"/>
+                    <a:cs typeface="+mn-cs"/>
+                  </a:rPr>
+                </a:br>
+                <a:r>
+                  <a:rPr lang="pt-BR" sz="1200" kern="1200" dirty="0">
+                    <a:solidFill>
+                      <a:schemeClr val="tx1"/>
+                    </a:solidFill>
+                    <a:latin typeface="+mn-lt"/>
+                    <a:ea typeface="+mn-ea"/>
+                    <a:cs typeface="+mn-cs"/>
+                  </a:rPr>
+                  <a:t>memória</a:t>
+                </a:r>
+                <a:br>
+                  <a:rPr lang="pt-BR" sz="1200" kern="1200" dirty="0">
+                    <a:solidFill>
+                      <a:schemeClr val="tx1"/>
+                    </a:solidFill>
+                    <a:latin typeface="+mn-lt"/>
+                    <a:ea typeface="+mn-ea"/>
+                    <a:cs typeface="+mn-cs"/>
+                  </a:rPr>
+                </a:br>
+                <a:r>
+                  <a:rPr lang="pt-BR" sz="1200" kern="1200" dirty="0">
+                    <a:solidFill>
+                      <a:schemeClr val="tx1"/>
+                    </a:solidFill>
+                    <a:latin typeface="+mn-lt"/>
+                    <a:ea typeface="+mn-ea"/>
+                    <a:cs typeface="+mn-cs"/>
+                  </a:rPr>
+                  <a:t>latência</a:t>
+                </a:r>
+              </a:p>
+              <a:p>
+                <a:r>
+                  <a:rPr lang="pt-BR" dirty="0"/>
+                  <a:t>Em visão computacional, especialmente detecção e segmentação, muitos canais podem ser redundantes.</a:t>
+                </a:r>
+              </a:p>
+              <a:p>
+                <a:r>
+                  <a:rPr lang="pt-BR" b="1" dirty="0"/>
+                  <a:t>Qual é a dificuldade?</a:t>
+                </a:r>
+              </a:p>
+              <a:p>
+                <a:endParaRPr lang="pt-BR" b="1" dirty="0"/>
+              </a:p>
+              <a:p>
+                <a:r>
+                  <a:rPr lang="pt-BR" dirty="0"/>
+                  <a:t>Escolher número de canais parece uma decisão discreta:</a:t>
+                </a:r>
+              </a:p>
+              <a:p>
+                <a:pPr rtl="0"/>
+                <a:r>
+                  <a:rPr lang="pt-BR" sz="1200" kern="1200" dirty="0">
+                    <a:solidFill>
+                      <a:schemeClr val="tx1"/>
+                    </a:solidFill>
+                    <a:latin typeface="+mn-lt"/>
+                    <a:ea typeface="+mn-ea"/>
+                    <a:cs typeface="+mn-cs"/>
+                  </a:rPr>
+                  <a:t>usar 32, 48 ou 64 canais</a:t>
+                </a:r>
+              </a:p>
+              <a:p>
+                <a:r>
+                  <a:rPr lang="pt-BR" dirty="0"/>
+                  <a:t>Decisões discretas não são naturalmente diferenciáveis. O DARTS precisa que as escolhas sejam treináveis por gradiente.</a:t>
+                </a:r>
+              </a:p>
+              <a:p>
+                <a:r>
+                  <a:rPr lang="pt-BR" dirty="0"/>
+                  <a:t>O </a:t>
+                </a:r>
+                <a:r>
+                  <a:rPr lang="pt-BR" dirty="0" err="1"/>
+                  <a:t>paper</a:t>
+                </a:r>
+                <a:r>
+                  <a:rPr lang="pt-BR" dirty="0"/>
+                  <a:t> usa </a:t>
+                </a:r>
+                <a:r>
+                  <a:rPr lang="pt-BR" b="1" dirty="0" err="1"/>
+                  <a:t>Gumbel-Softmax</a:t>
+                </a:r>
+                <a:r>
+                  <a:rPr lang="pt-BR" b="1" dirty="0"/>
+                  <a:t>/</a:t>
+                </a:r>
+                <a:r>
+                  <a:rPr lang="pt-BR" b="1" dirty="0" err="1"/>
+                  <a:t>Gumbel-Argmax</a:t>
+                </a:r>
+                <a:r>
+                  <a:rPr lang="pt-BR" dirty="0"/>
+                  <a:t> para transformar essa escolha discreta em algo treinável. Durante o </a:t>
+                </a:r>
+                <a:r>
+                  <a:rPr lang="pt-BR" dirty="0" err="1"/>
+                  <a:t>forward</a:t>
+                </a:r>
+                <a:r>
+                  <a:rPr lang="pt-BR" dirty="0"/>
+                  <a:t>, ele escolhe uma opção concreta, por exemplo 50% dos canais. Durante o </a:t>
+                </a:r>
+                <a:r>
+                  <a:rPr lang="pt-BR" dirty="0" err="1"/>
+                  <a:t>backward</a:t>
+                </a:r>
+                <a:r>
+                  <a:rPr lang="pt-BR" dirty="0"/>
+                  <a:t>, ele usa uma aproximação relaxada para permitir gradiente nos parâmetros de arquitetura.</a:t>
+                </a:r>
+              </a:p>
+              <a:p>
+                <a:endParaRPr lang="pt-BR" b="1" dirty="0"/>
+              </a:p>
+              <a:p>
+                <a:endParaRPr lang="pt-BR" dirty="0"/>
+              </a:p>
+              <a:p>
+                <a:r>
+                  <a:rPr lang="en-US" dirty="0"/>
+                  <a:t>3. Search space to </a:t>
+                </a:r>
+                <a:r>
+                  <a:rPr lang="en-US" dirty="0" err="1"/>
+                  <a:t>supernet</a:t>
+                </a:r>
+                <a:r>
+                  <a:rPr lang="en-US" dirty="0"/>
+                  <a:t> conversion tooling</a:t>
+                </a:r>
+                <a:br>
+                  <a:rPr lang="en-US" dirty="0"/>
+                </a:br>
+                <a:r>
+                  <a:rPr lang="pt-BR" dirty="0"/>
+                  <a:t>O </a:t>
+                </a:r>
+                <a:r>
+                  <a:rPr lang="pt-BR" dirty="0" err="1"/>
+                  <a:t>paper</a:t>
+                </a:r>
+                <a:r>
+                  <a:rPr lang="pt-BR" dirty="0"/>
+                  <a:t> propõe uma ferramenta configurável que transforma um </a:t>
+                </a:r>
+                <a:r>
+                  <a:rPr lang="pt-BR" dirty="0" err="1"/>
+                  <a:t>search</a:t>
+                </a:r>
+                <a:r>
+                  <a:rPr lang="pt-BR" dirty="0"/>
+                  <a:t> </a:t>
+                </a:r>
+                <a:r>
+                  <a:rPr lang="pt-BR" dirty="0" err="1"/>
+                  <a:t>space</a:t>
+                </a:r>
+                <a:r>
+                  <a:rPr lang="pt-BR" dirty="0"/>
+                  <a:t> descrito em YAML em uma </a:t>
+                </a:r>
+                <a:r>
+                  <a:rPr lang="pt-BR" dirty="0" err="1"/>
+                  <a:t>supernet</a:t>
+                </a:r>
+                <a:r>
+                  <a:rPr lang="pt-BR" dirty="0"/>
+                  <a:t> automaticamente.</a:t>
+                </a:r>
+                <a:br>
+                  <a:rPr lang="pt-BR" dirty="0"/>
+                </a:br>
+                <a:r>
+                  <a:rPr lang="pt-BR" dirty="0"/>
+                  <a:t>O conceito central: </a:t>
+                </a:r>
+                <a:r>
+                  <a:rPr lang="pt-BR" dirty="0" err="1"/>
+                  <a:t>atomic</a:t>
+                </a:r>
+                <a:r>
+                  <a:rPr lang="pt-BR" dirty="0"/>
+                  <a:t> </a:t>
+                </a:r>
+                <a:r>
+                  <a:rPr lang="pt-BR" dirty="0" err="1"/>
+                  <a:t>search</a:t>
+                </a:r>
+                <a:r>
+                  <a:rPr lang="pt-BR" dirty="0"/>
+                  <a:t> </a:t>
+                </a:r>
+                <a:r>
+                  <a:rPr lang="pt-BR" dirty="0" err="1"/>
+                  <a:t>component</a:t>
+                </a:r>
+                <a:endParaRPr lang="pt-BR" dirty="0"/>
+              </a:p>
+            </p:txBody>
+          </p:sp>
+        </mc:Choice>
+        <mc:Fallback xmlns="">
+          <p:sp>
+            <p:nvSpPr>
+              <p:cNvPr id="3" name="Notes Placeholder 2"/>
+              <p:cNvSpPr>
+                <a:spLocks noGrp="1"/>
+              </p:cNvSpPr>
+              <p:nvPr>
+                <p:ph type="body" idx="1"/>
+              </p:nvPr>
+            </p:nvSpPr>
+            <p:spPr/>
+            <p:txBody>
+              <a:bodyPr/>
+              <a:lstStyle/>
+              <a:p>
+                <a:pPr marL="171450" indent="-171450">
+                  <a:buFont typeface="Arial" panose="020B0604020202020204" pitchFamily="34" charset="0"/>
+                  <a:buChar char="•"/>
+                </a:pPr>
+                <a:r>
+                  <a:rPr lang="pt-BR" dirty="0"/>
+                  <a:t>A posição das antenas é variável importante porque, neste </a:t>
+                </a:r>
+                <a:r>
+                  <a:rPr lang="pt-BR" dirty="0" err="1"/>
+                  <a:t>paper</a:t>
+                </a:r>
+                <a:r>
+                  <a:rPr lang="pt-BR" dirty="0"/>
+                  <a:t>, a BS não é um arranjo fixo tradicional. As </a:t>
+                </a:r>
+                <a:r>
+                  <a:rPr lang="pt-BR" dirty="0" err="1"/>
+                  <a:t>fluid</a:t>
+                </a:r>
+                <a:r>
+                  <a:rPr lang="pt-BR" dirty="0"/>
+                  <a:t> </a:t>
+                </a:r>
+                <a:r>
+                  <a:rPr lang="pt-BR" dirty="0" err="1"/>
+                  <a:t>antennas</a:t>
+                </a:r>
+                <a:r>
+                  <a:rPr lang="pt-BR" dirty="0"/>
+                  <a:t> podem se mover dentro de um painel. Isso altera o canal sem fio. Então, diferente de um sistema MIMO convencional em que a geometria é fixa, aqui a geometria da BS é parte do problema de otimização.</a:t>
+                </a:r>
+              </a:p>
+              <a:p>
+                <a:pPr marL="171450" indent="-171450">
+                  <a:buFont typeface="Arial" panose="020B0604020202020204" pitchFamily="34" charset="0"/>
+                  <a:buChar char="•"/>
+                </a:pPr>
+                <a:r>
+                  <a:rPr lang="pt-BR" dirty="0"/>
+                  <a:t>Aqui no lado esquerdo do slide estão as definições matemáticas das posições dessas antenas. O vetor </a:t>
+                </a:r>
+                <a:r>
+                  <a:rPr lang="ar-AE" sz="1200" b="1" i="0" kern="1200">
+                    <a:solidFill>
+                      <a:schemeClr val="tx1"/>
+                    </a:solidFill>
+                    <a:latin typeface="+mn-lt"/>
+                    <a:ea typeface="+mn-ea"/>
+                    <a:cs typeface="+mn-cs"/>
+                  </a:rPr>
+                  <a:t>𝐭_(</a:t>
+                </a:r>
+                <a:r>
+                  <a:rPr lang="ar-AE" sz="1200" b="0" i="0" kern="1200">
+                    <a:solidFill>
+                      <a:schemeClr val="tx1"/>
+                    </a:solidFill>
+                    <a:latin typeface="+mn-lt"/>
+                    <a:ea typeface="+mn-ea"/>
+                    <a:cs typeface="+mn-cs"/>
+                  </a:rPr>
+                  <a:t>𝑢,𝑎</a:t>
+                </a:r>
+                <a:r>
+                  <a:rPr lang="ar-AE" sz="1200" b="1" i="0" kern="1200">
+                    <a:solidFill>
+                      <a:schemeClr val="tx1"/>
+                    </a:solidFill>
+                    <a:latin typeface="+mn-lt"/>
+                    <a:ea typeface="+mn-ea"/>
+                    <a:cs typeface="+mn-cs"/>
+                  </a:rPr>
+                  <a:t>)</a:t>
+                </a:r>
+                <a:r>
+                  <a:rPr lang="pt-BR" dirty="0"/>
+                  <a:t>representa a posição da antena </a:t>
+                </a:r>
+                <a:r>
+                  <a:rPr lang="pt-BR" sz="1200" i="0" kern="1200">
+                    <a:solidFill>
+                      <a:schemeClr val="tx1"/>
+                    </a:solidFill>
+                    <a:latin typeface="+mn-lt"/>
+                    <a:ea typeface="+mn-ea"/>
+                    <a:cs typeface="+mn-cs"/>
+                  </a:rPr>
+                  <a:t>𝑎</a:t>
+                </a:r>
+                <a:r>
+                  <a:rPr lang="pt-BR" dirty="0"/>
+                  <a:t>do usuário </a:t>
+                </a:r>
+                <a:r>
+                  <a:rPr lang="pt-BR" sz="1200" i="0" kern="1200">
+                    <a:solidFill>
+                      <a:schemeClr val="tx1"/>
+                    </a:solidFill>
+                    <a:latin typeface="+mn-lt"/>
+                    <a:ea typeface="+mn-ea"/>
+                    <a:cs typeface="+mn-cs"/>
+                  </a:rPr>
+                  <a:t>𝑢</a:t>
+                </a:r>
+                <a:r>
+                  <a:rPr lang="pt-BR" dirty="0"/>
+                  <a:t>, com coordenadas </a:t>
+                </a:r>
+                <a:r>
+                  <a:rPr lang="pt-BR" sz="1200" i="0" kern="1200">
+                    <a:solidFill>
+                      <a:schemeClr val="tx1"/>
+                    </a:solidFill>
+                    <a:latin typeface="+mn-lt"/>
+                    <a:ea typeface="+mn-ea"/>
+                    <a:cs typeface="+mn-cs"/>
+                  </a:rPr>
+                  <a:t>𝑥</a:t>
+                </a:r>
+                <a:r>
+                  <a:rPr lang="pt-BR" dirty="0"/>
+                  <a:t>e </a:t>
+                </a:r>
+                <a:r>
+                  <a:rPr lang="pt-BR" sz="1200" i="0" kern="1200">
+                    <a:solidFill>
+                      <a:schemeClr val="tx1"/>
+                    </a:solidFill>
+                    <a:latin typeface="+mn-lt"/>
+                    <a:ea typeface="+mn-ea"/>
+                    <a:cs typeface="+mn-cs"/>
+                  </a:rPr>
+                  <a:t>𝑦</a:t>
+                </a:r>
+                <a:r>
+                  <a:rPr lang="pt-BR" dirty="0"/>
+                  <a:t>. O </a:t>
+                </a:r>
+                <a:r>
+                  <a:rPr lang="pt-BR" dirty="0" err="1"/>
+                  <a:t>paper</a:t>
+                </a:r>
+                <a:r>
+                  <a:rPr lang="pt-BR" dirty="0"/>
+                  <a:t> agrupa todas essas posições na matriz </a:t>
+                </a:r>
+                <a:r>
+                  <a:rPr lang="pt-BR" sz="1200" b="1" i="0" kern="1200">
+                    <a:solidFill>
+                      <a:schemeClr val="tx1"/>
+                    </a:solidFill>
+                    <a:latin typeface="+mn-lt"/>
+                    <a:ea typeface="+mn-ea"/>
+                    <a:cs typeface="+mn-cs"/>
+                  </a:rPr>
+                  <a:t>𝐓</a:t>
+                </a:r>
+                <a:r>
+                  <a:rPr lang="pt-BR" dirty="0"/>
+                  <a:t>. Já a posição da </a:t>
+                </a:r>
+                <a:r>
+                  <a:rPr lang="pt-BR" dirty="0" err="1"/>
+                  <a:t>fluid</a:t>
+                </a:r>
+                <a:r>
+                  <a:rPr lang="pt-BR" dirty="0"/>
+                  <a:t> </a:t>
+                </a:r>
+                <a:r>
+                  <a:rPr lang="pt-BR" dirty="0" err="1"/>
+                  <a:t>antenna</a:t>
+                </a:r>
+                <a:r>
+                  <a:rPr lang="pt-BR" dirty="0"/>
+                  <a:t> </a:t>
+                </a:r>
+                <a:r>
+                  <a:rPr lang="pt-BR" sz="1200" i="0" kern="1200">
+                    <a:solidFill>
+                      <a:schemeClr val="tx1"/>
+                    </a:solidFill>
+                    <a:latin typeface="+mn-lt"/>
+                    <a:ea typeface="+mn-ea"/>
+                    <a:cs typeface="+mn-cs"/>
+                  </a:rPr>
+                  <a:t>𝑚</a:t>
+                </a:r>
+                <a:r>
+                  <a:rPr lang="pt-BR" dirty="0"/>
+                  <a:t>da BS é representada por </a:t>
+                </a:r>
+                <a:r>
+                  <a:rPr lang="ar-AE" sz="1200" b="1" i="0" kern="1200">
+                    <a:solidFill>
+                      <a:schemeClr val="tx1"/>
+                    </a:solidFill>
+                    <a:latin typeface="+mn-lt"/>
+                    <a:ea typeface="+mn-ea"/>
+                    <a:cs typeface="+mn-cs"/>
+                  </a:rPr>
+                  <a:t>𝐫_</a:t>
+                </a:r>
+                <a:r>
+                  <a:rPr lang="ar-AE" sz="1200" b="0" i="0" kern="1200">
+                    <a:solidFill>
+                      <a:schemeClr val="tx1"/>
+                    </a:solidFill>
+                    <a:latin typeface="+mn-lt"/>
+                    <a:ea typeface="+mn-ea"/>
+                    <a:cs typeface="+mn-cs"/>
+                  </a:rPr>
+                  <a:t>𝑚</a:t>
+                </a:r>
+                <a:r>
+                  <a:rPr lang="ar-AE" dirty="0"/>
+                  <a:t>, </a:t>
+                </a:r>
+                <a:r>
+                  <a:rPr lang="pt-BR" dirty="0"/>
+                  <a:t>e todas as posições da BS são agrupadas na matriz </a:t>
+                </a:r>
+                <a:r>
+                  <a:rPr lang="pt-BR" sz="1200" b="1" i="0" kern="1200">
+                    <a:solidFill>
+                      <a:schemeClr val="tx1"/>
+                    </a:solidFill>
+                    <a:latin typeface="+mn-lt"/>
+                    <a:ea typeface="+mn-ea"/>
+                    <a:cs typeface="+mn-cs"/>
+                  </a:rPr>
+                  <a:t>𝐑</a:t>
+                </a:r>
+                <a:r>
+                  <a:rPr lang="pt-BR" dirty="0"/>
+                  <a:t>.</a:t>
+                </a:r>
+              </a:p>
+              <a:p>
+                <a:pPr marL="171450" indent="-171450">
+                  <a:buFont typeface="Arial" panose="020B0604020202020204" pitchFamily="34" charset="0"/>
+                  <a:buChar char="•"/>
+                </a:pPr>
+                <a:endParaRPr lang="pt-BR" dirty="0"/>
+              </a:p>
+              <a:p>
+                <a:pPr marL="171450" indent="-171450">
+                  <a:buFont typeface="Arial" panose="020B0604020202020204" pitchFamily="34" charset="0"/>
+                  <a:buChar char="•"/>
+                </a:pPr>
+                <a:r>
+                  <a:rPr lang="pt-BR" dirty="0"/>
+                  <a:t>Outro ponto importante é que o sistema usa </a:t>
+                </a:r>
+                <a:r>
+                  <a:rPr lang="pt-BR" dirty="0" err="1"/>
+                  <a:t>space-division</a:t>
+                </a:r>
+                <a:r>
+                  <a:rPr lang="pt-BR" dirty="0"/>
+                  <a:t> </a:t>
+                </a:r>
+                <a:r>
+                  <a:rPr lang="pt-BR" dirty="0" err="1"/>
+                  <a:t>multiple</a:t>
+                </a:r>
+                <a:r>
+                  <a:rPr lang="pt-BR" dirty="0"/>
+                  <a:t> </a:t>
+                </a:r>
+                <a:r>
+                  <a:rPr lang="pt-BR" dirty="0" err="1"/>
+                  <a:t>access</a:t>
+                </a:r>
+                <a:r>
+                  <a:rPr lang="pt-BR" dirty="0"/>
+                  <a:t>. Isso significa que vários usuários podem se comunicar com a base </a:t>
+                </a:r>
+                <a:r>
+                  <a:rPr lang="pt-BR" dirty="0" err="1"/>
+                  <a:t>station</a:t>
+                </a:r>
+                <a:r>
+                  <a:rPr lang="pt-BR" dirty="0"/>
+                  <a:t> ao mesmo tempo, explorando separação espacial.</a:t>
+                </a:r>
+              </a:p>
+              <a:p>
+                <a:pPr marL="171450" indent="-171450">
+                  <a:buFont typeface="Arial" panose="020B0604020202020204" pitchFamily="34" charset="0"/>
+                  <a:buChar char="•"/>
+                </a:pPr>
+                <a:r>
+                  <a:rPr lang="pt-BR" dirty="0"/>
+                  <a:t>Além disso, existe um servidor no sistema, e esse servidor é quem executa a parte pesada da inferência do </a:t>
+                </a:r>
+                <a:r>
+                  <a:rPr lang="pt-BR" dirty="0" err="1"/>
+                  <a:t>large</a:t>
+                </a:r>
+                <a:r>
+                  <a:rPr lang="pt-BR" dirty="0"/>
+                  <a:t> model. A outra parte é executada no cliente.</a:t>
+                </a:r>
+              </a:p>
+              <a:p>
+                <a:pPr marL="171450" indent="-171450">
+                  <a:buFont typeface="Arial" panose="020B0604020202020204" pitchFamily="34" charset="0"/>
+                  <a:buChar char="•"/>
+                </a:pPr>
+                <a:endParaRPr lang="pt-BR" dirty="0"/>
+              </a:p>
+              <a:p>
+                <a:pPr marL="171450" indent="-171450">
+                  <a:buFont typeface="Arial" panose="020B0604020202020204" pitchFamily="34" charset="0"/>
+                  <a:buChar char="•"/>
+                </a:pPr>
+                <a:r>
+                  <a:rPr lang="pt-BR" dirty="0"/>
+                  <a:t>Por fim, o </a:t>
+                </a:r>
+                <a:r>
+                  <a:rPr lang="pt-BR" dirty="0" err="1"/>
+                  <a:t>paper</a:t>
+                </a:r>
+                <a:r>
+                  <a:rPr lang="pt-BR" dirty="0"/>
+                  <a:t> assume que o tempo necessário para ajustar a posição das </a:t>
+                </a:r>
+                <a:r>
+                  <a:rPr lang="pt-BR" dirty="0" err="1"/>
+                  <a:t>fluid</a:t>
+                </a:r>
+                <a:r>
+                  <a:rPr lang="pt-BR" dirty="0"/>
+                  <a:t> </a:t>
+                </a:r>
+                <a:r>
+                  <a:rPr lang="pt-BR" dirty="0" err="1"/>
+                  <a:t>antennas</a:t>
+                </a:r>
+                <a:r>
+                  <a:rPr lang="pt-BR" dirty="0"/>
+                  <a:t> é desprezível. Em outras palavras, eles ignoram esse custo mecânico ou físico e consideram apenas o ganho que o reposicionamento traz para o canal e para a taxa de transmissão.</a:t>
+                </a:r>
+              </a:p>
+              <a:p>
+                <a:pPr marL="171450" indent="-171450">
+                  <a:buFont typeface="Arial" panose="020B0604020202020204" pitchFamily="34" charset="0"/>
+                  <a:buChar char="•"/>
+                </a:pPr>
+                <a:endParaRPr lang="pt-BR" dirty="0"/>
+              </a:p>
+              <a:p>
+                <a:pPr marL="171450" indent="-171450">
+                  <a:buFont typeface="Arial" panose="020B0604020202020204" pitchFamily="34" charset="0"/>
+                  <a:buChar char="•"/>
+                </a:pPr>
+                <a:r>
+                  <a:rPr lang="pt-BR" dirty="0"/>
+                  <a:t>Pense em um painel retangular na BS, e cada </a:t>
+                </a:r>
+                <a:r>
+                  <a:rPr lang="pt-BR" dirty="0" err="1"/>
+                  <a:t>fluid</a:t>
+                </a:r>
+                <a:r>
+                  <a:rPr lang="pt-BR" dirty="0"/>
+                  <a:t> </a:t>
+                </a:r>
+                <a:r>
+                  <a:rPr lang="pt-BR" dirty="0" err="1"/>
+                  <a:t>antenna</a:t>
+                </a:r>
+                <a:r>
+                  <a:rPr lang="pt-BR" dirty="0"/>
+                  <a:t> pode “andar” nesse painel em duas direções, </a:t>
+                </a:r>
+                <a:r>
+                  <a:rPr lang="pt-BR" sz="1200" i="0" kern="1200">
+                    <a:solidFill>
+                      <a:schemeClr val="tx1"/>
+                    </a:solidFill>
+                    <a:latin typeface="+mn-lt"/>
+                    <a:ea typeface="+mn-ea"/>
+                    <a:cs typeface="+mn-cs"/>
+                  </a:rPr>
+                  <a:t>𝑥</a:t>
+                </a:r>
+                <a:r>
+                  <a:rPr lang="pt-BR" dirty="0"/>
+                  <a:t>e </a:t>
+                </a:r>
+                <a:r>
+                  <a:rPr lang="pt-BR" sz="1200" i="0" kern="1200">
+                    <a:solidFill>
+                      <a:schemeClr val="tx1"/>
+                    </a:solidFill>
+                    <a:latin typeface="+mn-lt"/>
+                    <a:ea typeface="+mn-ea"/>
+                    <a:cs typeface="+mn-cs"/>
+                  </a:rPr>
+                  <a:t>𝑦</a:t>
+                </a:r>
+                <a:r>
+                  <a:rPr lang="pt-BR" dirty="0"/>
+                  <a:t>.</a:t>
+                </a:r>
+                <a:br>
+                  <a:rPr lang="pt-BR" dirty="0"/>
+                </a:br>
+                <a:r>
+                  <a:rPr lang="pt-BR" dirty="0"/>
+                  <a:t>a modelagem não está nesse nível discreto de “</a:t>
+                </a:r>
+                <a:r>
+                  <a:rPr lang="pt-BR" dirty="0" err="1"/>
+                  <a:t>port</a:t>
+                </a:r>
+                <a:r>
+                  <a:rPr lang="pt-BR" dirty="0"/>
+                  <a:t> 1, </a:t>
+                </a:r>
+                <a:r>
+                  <a:rPr lang="pt-BR" dirty="0" err="1"/>
+                  <a:t>port</a:t>
+                </a:r>
+                <a:r>
+                  <a:rPr lang="pt-BR" dirty="0"/>
+                  <a:t> 2, </a:t>
+                </a:r>
+                <a:r>
+                  <a:rPr lang="pt-BR" dirty="0" err="1"/>
+                  <a:t>port</a:t>
+                </a:r>
+                <a:r>
+                  <a:rPr lang="pt-BR" dirty="0"/>
+                  <a:t> 3...”, é como uma antena 2d, porém em termos de x e y</a:t>
+                </a:r>
+              </a:p>
+            </p:txBody>
+          </p:sp>
+        </mc:Fallback>
+      </mc:AlternateContent>
+      <p:sp>
+        <p:nvSpPr>
+          <p:cNvPr id="4" name="Slide Number Placeholder 3"/>
+          <p:cNvSpPr>
+            <a:spLocks noGrp="1"/>
+          </p:cNvSpPr>
+          <p:nvPr>
+            <p:ph type="sldNum" sz="quarter" idx="5"/>
+          </p:nvPr>
+        </p:nvSpPr>
+        <p:spPr/>
+        <p:txBody>
+          <a:bodyPr/>
+          <a:lstStyle/>
+          <a:p>
+            <a:fld id="{6FC8D850-966F-45A6-8DE7-15B891E7D40D}" type="slidenum">
+              <a:rPr lang="pt-BR" smtClean="0"/>
+              <a:t>10</a:t>
+            </a:fld>
+            <a:endParaRPr lang="pt-BR"/>
+          </a:p>
+        </p:txBody>
+      </p:sp>
+    </p:spTree>
+    <p:extLst>
+      <p:ext uri="{BB962C8B-B14F-4D97-AF65-F5344CB8AC3E}">
+        <p14:creationId xmlns:p14="http://schemas.microsoft.com/office/powerpoint/2010/main" val="816809714"/>
+      </p:ext>
+    </p:extLst>
+  </p:cSld>
+  <p:clrMapOvr>
+    <a:masterClrMapping/>
+  </p:clrMapOvr>
+</p:notes>
+</file>
+
+<file path=ppt/notesSlides/notesSlide11.xml><?xml version="1.0" encoding="utf-8"?>
+<p:notes xmlns:a="http://schemas.openxmlformats.org/drawingml/2006/main" xmlns:r="http://schemas.openxmlformats.org/officeDocument/2006/relationships" xmlns:p="http://schemas.openxmlformats.org/presentationml/2006/main">
+  <p:cSld>
+    <p:spTree>
+      <p:nvGrpSpPr>
         <p:cNvPr id="1" name="">
           <a:extLst>
             <a:ext uri="{FF2B5EF4-FFF2-40B4-BE49-F238E27FC236}">
@@ -905,32 +2230,42 @@
               <a:lstStyle/>
               <a:p>
                 <a:r>
-                  <a:rPr lang="pt-BR" dirty="0"/>
-                  <a:t>Esse slide apresenta o </a:t>
-                </a:r>
-                <a:r>
-                  <a:rPr lang="pt-BR" dirty="0" err="1"/>
-                  <a:t>atomic</a:t>
-                </a:r>
-                <a:r>
-                  <a:rPr lang="pt-BR" dirty="0"/>
+                  <a:rPr lang="pt-BR" b="1" dirty="0"/>
+                  <a:t>Atomic </a:t>
+                </a:r>
+                <a:r>
+                  <a:rPr lang="pt-BR" b="1" dirty="0" err="1"/>
+                  <a:t>search</a:t>
+                </a:r>
+                <a:r>
+                  <a:rPr lang="pt-BR" b="1" dirty="0"/>
                   <a:t> </a:t>
                 </a:r>
                 <a:r>
-                  <a:rPr lang="pt-BR" dirty="0" err="1"/>
-                  <a:t>search</a:t>
-                </a:r>
-                <a:r>
-                  <a:rPr lang="pt-BR" dirty="0"/>
-                  <a:t> </a:t>
-                </a:r>
-                <a:r>
-                  <a:rPr lang="pt-BR" dirty="0" err="1"/>
+                  <a:rPr lang="pt-BR" b="1" dirty="0" err="1"/>
                   <a:t>component</a:t>
                 </a:r>
                 <a:r>
-                  <a:rPr lang="pt-BR" dirty="0"/>
-                  <a:t>, que é o bloco básico de busca do </a:t>
+                  <a:rPr lang="pt-BR" b="1" dirty="0"/>
+                  <a:t>, ideia central</a:t>
+                </a:r>
+              </a:p>
+              <a:p>
+                <a:r>
+                  <a:rPr lang="pt-BR" dirty="0"/>
+                  <a:t>O </a:t>
+                </a:r>
+                <a:r>
+                  <a:rPr lang="pt-BR" b="1" dirty="0"/>
+                  <a:t>Atomic Search </a:t>
+                </a:r>
+                <a:r>
+                  <a:rPr lang="pt-BR" b="1" dirty="0" err="1"/>
+                  <a:t>Component</a:t>
+                </a:r>
+                <a:r>
+                  <a:rPr lang="pt-BR" dirty="0"/>
+                  <a:t> é o “bloco mínimo pesquisável” do </a:t>
                 </a:r>
                 <a:r>
                   <a:rPr lang="pt-BR" dirty="0" err="1"/>
@@ -938,32 +2273,72 @@
                 </a:r>
                 <a:r>
                   <a:rPr lang="pt-BR" dirty="0"/>
-                  <a:t>. A ideia aqui é que, em vez de fixar previamente a estrutura de cada bloco da rede, o método transforma esse bloco em uma unidade pesquisável. Em outras palavras, cada </a:t>
-                </a:r>
-                <a:r>
-                  <a:rPr lang="pt-BR" dirty="0" err="1"/>
-                  <a:t>atomic</a:t>
-                </a:r>
-                <a:r>
-                  <a:rPr lang="pt-BR" dirty="0"/>
-                  <a:t> </a:t>
-                </a:r>
-                <a:r>
-                  <a:rPr lang="pt-BR" dirty="0" err="1"/>
-                  <a:t>search</a:t>
-                </a:r>
-                <a:r>
-                  <a:rPr lang="pt-BR" dirty="0"/>
-                  <a:t> </a:t>
-                </a:r>
-                <a:r>
-                  <a:rPr lang="pt-BR" dirty="0" err="1"/>
-                  <a:t>component</a:t>
-                </a:r>
-                <a:r>
-                  <a:rPr lang="pt-BR" dirty="0"/>
-                  <a:t> decide três coisas ao mesmo tempo: qual entrada usar, qual operação aplicar e com quantos canais a saída será gerada.</a:t>
-                </a:r>
+                  <a:t>. Ele é uma peça genérica que pode representar uma camada, parte de uma célula, um bloco do </a:t>
+                </a:r>
+                <a:r>
+                  <a:rPr lang="pt-BR" dirty="0" err="1"/>
+                  <a:t>backbone</a:t>
+                </a:r>
+                <a:r>
+                  <a:rPr lang="pt-BR" dirty="0"/>
+                  <a:t>, um bloco da FPN, ou um bloco de segmentação.</a:t>
+                </a:r>
+              </a:p>
+              <a:p>
+                <a:r>
+                  <a:rPr lang="pt-BR" dirty="0"/>
+                  <a:t>Em vez de escrever manualmente uma </a:t>
+                </a:r>
+                <a:r>
+                  <a:rPr lang="pt-BR" dirty="0" err="1"/>
+                  <a:t>supernet</a:t>
+                </a:r>
+                <a:r>
+                  <a:rPr lang="pt-BR" dirty="0"/>
+                  <a:t> diferente para classificação, detecção e segmentação, o </a:t>
+                </a:r>
+                <a:r>
+                  <a:rPr lang="pt-BR" dirty="0" err="1"/>
+                  <a:t>paper</a:t>
+                </a:r>
+                <a:r>
+                  <a:rPr lang="pt-BR" dirty="0"/>
+                  <a:t> define um bloco básico reutilizável. Depois, a </a:t>
+                </a:r>
+                <a:r>
+                  <a:rPr lang="pt-BR" dirty="0" err="1"/>
+                  <a:t>supernet</a:t>
+                </a:r>
+                <a:r>
+                  <a:rPr lang="pt-BR" dirty="0"/>
+                  <a:t> inteira é construída empilhando vários desses blocos.</a:t>
+                </a:r>
+              </a:p>
+              <a:p>
+                <a:endParaRPr lang="pt-BR" dirty="0"/>
+              </a:p>
+              <a:p>
+                <a:r>
+                  <a:rPr lang="pt-BR" dirty="0"/>
+                  <a:t>1. De quais camadas anteriores ele pode receber entrada?</a:t>
+                </a:r>
+                <a:br>
+                  <a:rPr lang="pt-BR" dirty="0"/>
+                </a:br>
+                <a:r>
+                  <a:rPr lang="pt-BR" dirty="0"/>
+                  <a:t>2. Qual operação ele pode aplicar?</a:t>
+                </a:r>
+                <a:br>
+                  <a:rPr lang="pt-BR" dirty="0"/>
+                </a:br>
+                <a:r>
+                  <a:rPr lang="pt-BR" dirty="0"/>
+                  <a:t>3. Quantos canais ele deve usar?</a:t>
+                </a:r>
+              </a:p>
+              <a:p>
+                <a:endParaRPr lang="pt-BR" dirty="0"/>
               </a:p>
               <a:p>
                 <a:r>
@@ -1672,7 +3047,7 @@
 </p:notes>
 </file>
 
-<file path=ppt/notesSlides/notesSlide11.xml><?xml version="1.0" encoding="utf-8"?>
+<file path=ppt/notesSlides/notesSlide12.xml><?xml version="1.0" encoding="utf-8"?>
 <p:notes xmlns:a="http://schemas.openxmlformats.org/drawingml/2006/main" xmlns:r="http://schemas.openxmlformats.org/officeDocument/2006/relationships" xmlns:p="http://schemas.openxmlformats.org/presentationml/2006/main">
   <p:cSld>
     <p:spTree>
@@ -2781,7 +4156,7 @@
 </p:notes>
 </file>
 
-<file path=ppt/notesSlides/notesSlide12.xml><?xml version="1.0" encoding="utf-8"?>
+<file path=ppt/notesSlides/notesSlide13.xml><?xml version="1.0" encoding="utf-8"?>
 <p:notes xmlns:a="http://schemas.openxmlformats.org/drawingml/2006/main" xmlns:r="http://schemas.openxmlformats.org/officeDocument/2006/relationships" xmlns:p="http://schemas.openxmlformats.org/presentationml/2006/main">
   <p:cSld>
     <p:spTree>
@@ -3579,7 +4954,7 @@
 </p:notes>
 </file>
 
-<file path=ppt/notesSlides/notesSlide13.xml><?xml version="1.0" encoding="utf-8"?>
+<file path=ppt/notesSlides/notesSlide14.xml><?xml version="1.0" encoding="utf-8"?>
 <p:notes xmlns:a="http://schemas.openxmlformats.org/drawingml/2006/main" xmlns:r="http://schemas.openxmlformats.org/officeDocument/2006/relationships" xmlns:p="http://schemas.openxmlformats.org/presentationml/2006/main">
   <p:cSld>
     <p:spTree>
@@ -4781,7 +6156,7 @@
 </p:notes>
 </file>
 
-<file path=ppt/notesSlides/notesSlide14.xml><?xml version="1.0" encoding="utf-8"?>
+<file path=ppt/notesSlides/notesSlide15.xml><?xml version="1.0" encoding="utf-8"?>
 <p:notes xmlns:a="http://schemas.openxmlformats.org/drawingml/2006/main" xmlns:r="http://schemas.openxmlformats.org/officeDocument/2006/relationships" xmlns:p="http://schemas.openxmlformats.org/presentationml/2006/main">
   <p:cSld>
     <p:spTree>
@@ -5685,7 +7060,7 @@
 </p:notes>
 </file>
 
-<file path=ppt/notesSlides/notesSlide15.xml><?xml version="1.0" encoding="utf-8"?>
+<file path=ppt/notesSlides/notesSlide16.xml><?xml version="1.0" encoding="utf-8"?>
 <p:notes xmlns:a="http://schemas.openxmlformats.org/drawingml/2006/main" xmlns:r="http://schemas.openxmlformats.org/officeDocument/2006/relationships" xmlns:p="http://schemas.openxmlformats.org/presentationml/2006/main">
   <p:cSld>
     <p:spTree>
@@ -6264,7 +7639,7 @@
 </p:notes>
 </file>
 
-<file path=ppt/notesSlides/notesSlide16.xml><?xml version="1.0" encoding="utf-8"?>
+<file path=ppt/notesSlides/notesSlide17.xml><?xml version="1.0" encoding="utf-8"?>
 <p:notes xmlns:a="http://schemas.openxmlformats.org/drawingml/2006/main" xmlns:r="http://schemas.openxmlformats.org/officeDocument/2006/relationships" xmlns:p="http://schemas.openxmlformats.org/presentationml/2006/main">
   <p:cSld>
     <p:spTree>
@@ -6988,7 +8363,7 @@
 </p:notes>
 </file>
 
-<file path=ppt/notesSlides/notesSlide17.xml><?xml version="1.0" encoding="utf-8"?>
+<file path=ppt/notesSlides/notesSlide18.xml><?xml version="1.0" encoding="utf-8"?>
 <p:notes xmlns:a="http://schemas.openxmlformats.org/drawingml/2006/main" xmlns:r="http://schemas.openxmlformats.org/officeDocument/2006/relationships" xmlns:p="http://schemas.openxmlformats.org/presentationml/2006/main">
   <p:cSld>
     <p:spTree>
@@ -7658,7 +9033,7 @@
 </p:notes>
 </file>
 
-<file path=ppt/notesSlides/notesSlide18.xml><?xml version="1.0" encoding="utf-8"?>
+<file path=ppt/notesSlides/notesSlide19.xml><?xml version="1.0" encoding="utf-8"?>
 <p:notes xmlns:a="http://schemas.openxmlformats.org/drawingml/2006/main" xmlns:r="http://schemas.openxmlformats.org/officeDocument/2006/relationships" xmlns:p="http://schemas.openxmlformats.org/presentationml/2006/main">
   <p:cSld>
     <p:spTree>
@@ -8132,564 +9507,6 @@
     <p:extLst>
       <p:ext uri="{BB962C8B-B14F-4D97-AF65-F5344CB8AC3E}">
         <p14:creationId xmlns:p14="http://schemas.microsoft.com/office/powerpoint/2010/main" val="2166437117"/>
-      </p:ext>
-    </p:extLst>
-  </p:cSld>
-  <p:clrMapOvr>
-    <a:masterClrMapping/>
-  </p:clrMapOvr>
-</p:notes>
-</file>
-
-<file path=ppt/notesSlides/notesSlide19.xml><?xml version="1.0" encoding="utf-8"?>
-<p:notes xmlns:a="http://schemas.openxmlformats.org/drawingml/2006/main" xmlns:r="http://schemas.openxmlformats.org/officeDocument/2006/relationships" xmlns:p="http://schemas.openxmlformats.org/presentationml/2006/main">
-  <p:cSld>
-    <p:spTree>
-      <p:nvGrpSpPr>
-        <p:cNvPr id="1" name="">
-          <a:extLst>
-            <a:ext uri="{FF2B5EF4-FFF2-40B4-BE49-F238E27FC236}">
-              <a16:creationId xmlns:a16="http://schemas.microsoft.com/office/drawing/2014/main" id="{6D420289-DD16-66DA-221D-B397A7C574A2}"/>
-            </a:ext>
-          </a:extLst>
-        </p:cNvPr>
-        <p:cNvGrpSpPr/>
-        <p:nvPr/>
-      </p:nvGrpSpPr>
-      <p:grpSpPr>
-        <a:xfrm>
-          <a:off x="0" y="0"/>
-          <a:ext cx="0" cy="0"/>
-          <a:chOff x="0" y="0"/>
-          <a:chExt cx="0" cy="0"/>
-        </a:xfrm>
-      </p:grpSpPr>
-      <p:sp>
-        <p:nvSpPr>
-          <p:cNvPr id="2" name="Slide Image Placeholder 1">
-            <a:extLst>
-              <a:ext uri="{FF2B5EF4-FFF2-40B4-BE49-F238E27FC236}">
-                <a16:creationId xmlns:a16="http://schemas.microsoft.com/office/drawing/2014/main" id="{968416E4-27B4-4136-F9BF-44FDF3BACDC3}"/>
-              </a:ext>
-            </a:extLst>
-          </p:cNvPr>
-          <p:cNvSpPr>
-            <a:spLocks noGrp="1" noRot="1" noChangeAspect="1"/>
-          </p:cNvSpPr>
-          <p:nvPr>
-            <p:ph type="sldImg"/>
-          </p:nvPr>
-        </p:nvSpPr>
-        <p:spPr/>
-        <p:txBody>
-          <a:bodyPr/>
-          <a:lstStyle/>
-          <a:p>
-            <a:endParaRPr lang="pt-BR"/>
-          </a:p>
-        </p:txBody>
-      </p:sp>
-      <mc:AlternateContent xmlns:mc="http://schemas.openxmlformats.org/markup-compatibility/2006" xmlns:a14="http://schemas.microsoft.com/office/drawing/2010/main">
-        <mc:Choice Requires="a14">
-          <p:sp>
-            <p:nvSpPr>
-              <p:cNvPr id="3" name="Notes Placeholder 2">
-                <a:extLst>
-                  <a:ext uri="{FF2B5EF4-FFF2-40B4-BE49-F238E27FC236}">
-                    <a16:creationId xmlns:a16="http://schemas.microsoft.com/office/drawing/2014/main" id="{2E490C18-8D85-0BC6-B0D8-9E11B7DD36B9}"/>
-                  </a:ext>
-                </a:extLst>
-              </p:cNvPr>
-              <p:cNvSpPr>
-                <a:spLocks noGrp="1"/>
-              </p:cNvSpPr>
-              <p:nvPr>
-                <p:ph type="body" idx="1"/>
-              </p:nvPr>
-            </p:nvSpPr>
-            <p:spPr/>
-            <p:txBody>
-              <a:bodyPr/>
-              <a:lstStyle/>
-              <a:p>
-                <a:r>
-                  <a:rPr lang="pt-BR" dirty="0"/>
-                  <a:t>Os autores avaliam o sistema em um cenário </a:t>
-                </a:r>
-                <a:r>
-                  <a:rPr lang="pt-BR" dirty="0" err="1"/>
-                  <a:t>downlink</a:t>
-                </a:r>
-                <a:r>
-                  <a:rPr lang="pt-BR" dirty="0"/>
-                  <a:t> multiusuário, com frequência de portadora de 3.4 GHz. O número base de usuários é 6, o número total de posições no receptor expandido é 10, e cada usuário vê 10 </a:t>
-                </a:r>
-                <a:r>
-                  <a:rPr lang="pt-BR" dirty="0" err="1"/>
-                  <a:t>scatterers</a:t>
-                </a:r>
-                <a:r>
-                  <a:rPr lang="pt-BR" dirty="0"/>
-                  <a:t> no modelo geométrico de canal. O espaço disponível para as antenas do usuário é igual a 2 comprimentos de onda.</a:t>
-                </a:r>
-              </a:p>
-              <a:p>
-                <a:r>
-                  <a:rPr lang="pt-BR" dirty="0"/>
-                  <a:t>A SNR é definida como a razão entre a potência do sinal e a potência do ruído. Para a detecção, os autores usam RZF, e o fator de regularização é escolhido por busca exaustiva para minimizar a BER.</a:t>
-                </a:r>
-              </a:p>
-              <a:p>
-                <a:r>
-                  <a:rPr lang="pt-BR" dirty="0"/>
-                  <a:t>A comparação principal é entre o sistema proposto, o Virtual FAS, e um sistema MIMO convencional com antenas fixas.</a:t>
-                </a:r>
-              </a:p>
-              <a:p>
-                <a:r>
-                  <a:rPr lang="pt-BR" dirty="0"/>
-                  <a:t>Em relação ao treinamento da rede, eles usam </a:t>
-                </a:r>
-                <a:r>
-                  <a:rPr lang="pt-BR" dirty="0" err="1"/>
-                  <a:t>AdamW</a:t>
-                </a:r>
-                <a:r>
-                  <a:rPr lang="pt-BR" dirty="0"/>
-                  <a:t> em duas etapas. Primeiro, um pré-treinamento com batch </a:t>
-                </a:r>
-                <a:r>
-                  <a:rPr lang="pt-BR" dirty="0" err="1"/>
-                  <a:t>size</a:t>
-                </a:r>
-                <a:r>
-                  <a:rPr lang="pt-BR" dirty="0"/>
-                  <a:t> 32, learning rate de 0.001, SNR de 3 dB e M igual a 6. Depois, fazem fine-</a:t>
-                </a:r>
-                <a:r>
-                  <a:rPr lang="pt-BR" dirty="0" err="1"/>
-                  <a:t>tuning</a:t>
-                </a:r>
-                <a:r>
-                  <a:rPr lang="pt-BR" dirty="0"/>
-                  <a:t> com learning rate 0.0001 e valor dinâmico de M.</a:t>
-                </a:r>
-              </a:p>
-              <a:p>
-                <a:r>
-                  <a:rPr lang="pt-BR" dirty="0"/>
-                  <a:t>Um ponto importante é que o número total de posições N é mantido fixo em 10. Isso significa que o número de posições imaginárias varia conforme M, de acordo com a relação Np igual a N menos M.</a:t>
-                </a:r>
-              </a:p>
-              <a:p>
-                <a:r>
-                  <a:rPr lang="pt-BR" dirty="0"/>
-                  <a:t>As posições reais e imaginárias são geradas aleatoriamente em mais de 10 mil simulações independentes de canal.</a:t>
-                </a:r>
-              </a:p>
-              <a:p>
-                <a:r>
-                  <a:rPr lang="pt-BR" dirty="0"/>
-                  <a:t>Também vale observar que o </a:t>
-                </a:r>
-                <a:r>
-                  <a:rPr lang="pt-BR" dirty="0" err="1"/>
-                  <a:t>paper</a:t>
-                </a:r>
-                <a:r>
-                  <a:rPr lang="pt-BR" dirty="0"/>
-                  <a:t> não detalha tudo. Ele não informa, por exemplo, o número exato de épocas, o split entre treino, validação e teste, nem o número total explícito de amostras de treinamento.</a:t>
-                </a:r>
-              </a:p>
-              <a:p>
-                <a:pPr marL="171450" indent="-171450">
-                  <a:buFont typeface="Arial" panose="020B0604020202020204" pitchFamily="34" charset="0"/>
-                  <a:buChar char="•"/>
-                </a:pPr>
-                <a:endParaRPr lang="pt-BR" dirty="0"/>
-              </a:p>
-            </p:txBody>
-          </p:sp>
-        </mc:Choice>
-        <mc:Fallback xmlns="">
-          <p:sp>
-            <p:nvSpPr>
-              <p:cNvPr id="3" name="Notes Placeholder 2">
-                <a:extLst>
-                  <a:ext uri="{FF2B5EF4-FFF2-40B4-BE49-F238E27FC236}">
-                    <a16:creationId xmlns:a16="http://schemas.microsoft.com/office/drawing/2014/main" id="{BC4A4DA6-AAD5-7B9F-C6CD-1BF515A984C5}"/>
-                  </a:ext>
-                </a:extLst>
-              </p:cNvPr>
-              <p:cNvSpPr>
-                <a:spLocks noGrp="1"/>
-              </p:cNvSpPr>
-              <p:nvPr>
-                <p:ph type="body" idx="1"/>
-              </p:nvPr>
-            </p:nvSpPr>
-            <p:spPr/>
-            <p:txBody>
-              <a:bodyPr/>
-              <a:lstStyle/>
-              <a:p>
-                <a:r>
-                  <a:rPr lang="pt-BR" dirty="0"/>
-                  <a:t>Este slide resume os quatro subproblemas usados na solução. A Seção III do </a:t>
-                </a:r>
-                <a:r>
-                  <a:rPr lang="pt-BR" dirty="0" err="1"/>
-                  <a:t>paper</a:t>
-                </a:r>
-                <a:r>
-                  <a:rPr lang="pt-BR" dirty="0"/>
-                  <a:t> é bem carregada de matemática, com vários lemas, reformulações e atualizações iterativas. Então, em vez de entrar em todas as equações, eu preferi traduzir a lógica prática do que cada bloco faz.</a:t>
-                </a:r>
-              </a:p>
-              <a:p>
-                <a:endParaRPr lang="pt-BR" dirty="0"/>
-              </a:p>
-              <a:p>
-                <a:r>
-                  <a:rPr lang="pt-BR" dirty="0"/>
-                  <a:t>No primeiro subproblema, da frequência do servidor, a solução é relativamente simples. Como o problema é convexo, os autores conseguem obter uma solução fechada usando as condições </a:t>
-                </a:r>
-                <a:r>
-                  <a:rPr lang="pt-BR" b="1" dirty="0"/>
-                  <a:t>KKT</a:t>
-                </a:r>
-                <a:r>
-                  <a:rPr lang="pt-BR" dirty="0"/>
-                  <a:t>, que No primeiro subproblema, da frequência do servidor, a solução é relativamente simples. Como o problema é convexo, os autores conseguem obter uma solução fechada usando as condições KKT. Em termos práticos, isso quer dizer que eles não precisam iterar muito nem testar várias divisões possíveis de recurso. Eles já têm uma expressão direta que calcula quanto de processamento cada usuário deve receber com base na carga computacional associada a ele. Um exemplo simples seria este: imagine que o servidor tem 100 unidades de processamento para distribuir entre 3 usuários. O método não divide isso igualmente. Ele calcula uma divisão mais inteligente, dando mais recurso para quem tem tarefa mais pesada. Por isso, esse bloco é barato e tem complexidade linear no número de usuários</a:t>
-                </a:r>
-              </a:p>
-              <a:p>
-                <a:endParaRPr lang="pt-BR" dirty="0"/>
-              </a:p>
-              <a:p>
-                <a:endParaRPr lang="pt-BR" dirty="0"/>
-              </a:p>
-              <a:p>
-                <a:r>
-                  <a:rPr lang="pt-BR" dirty="0"/>
-                  <a:t>No segundo subproblema, da quantização, a lógica é a seguinte. O problema original é discreto, porque os bits permitidos são só 4, 8, 16 ou 32. Resolver isso diretamente seria mais difícil. Então eles fazem primeiro uma </a:t>
-                </a:r>
-                <a:r>
-                  <a:rPr lang="pt-BR" b="1" dirty="0"/>
-                  <a:t>relaxação contínua</a:t>
-                </a:r>
-                <a:r>
-                  <a:rPr lang="pt-BR" dirty="0"/>
-                  <a:t>, isto é, fingem temporariamente que o número de bits pode assumir qualquer valor real positivo. Depois disso, analisam a função do subproblema e mostram que ela é estritamente convexa. Isso é importante porque significa que existe um único ponto ótimo contínuo. A partir daí, eles derivam a condição de ótimo desse problema relaxado e obtêm diretamente o valor contínuo ótimo de </a:t>
-                </a:r>
-                <a:r>
-                  <a:rPr lang="ar-AE" sz="1200" i="0" kern="1200">
-                    <a:solidFill>
-                      <a:schemeClr val="tx1"/>
-                    </a:solidFill>
-                    <a:latin typeface="+mn-lt"/>
-                    <a:ea typeface="+mn-ea"/>
-                    <a:cs typeface="+mn-cs"/>
-                  </a:rPr>
-                  <a:t>𝑞_𝑢</a:t>
-                </a:r>
-                <a:r>
-                  <a:rPr lang="pt-BR" dirty="0"/>
-                  <a:t>para cada usuário. Em seguida, como esse valor contínuo não é necessariamente permitido na prática, eles fazem uma </a:t>
-                </a:r>
-                <a:r>
-                  <a:rPr lang="pt-BR" b="1" dirty="0"/>
-                  <a:t>projeção para o conjunto discreto viável</a:t>
-                </a:r>
-                <a:r>
-                  <a:rPr lang="pt-BR" dirty="0"/>
-                  <a:t>, escolhendo o valor mais próximo entre 4, 8, 16 e 32. Um exemplo simples seria este: suponha que o valor ótimo contínuo calculado fosse 15.5 bits. Como esse valor não é permitido, eles projetam para o conjunto viável e escolhem o mais próximo: 16.</a:t>
-                </a:r>
-              </a:p>
-              <a:p>
-                <a:endParaRPr lang="pt-BR" dirty="0"/>
-              </a:p>
-              <a:p>
-                <a:r>
-                  <a:rPr lang="pt-BR" dirty="0"/>
-                  <a:t>No terceiro subproblema, do </a:t>
-                </a:r>
-                <a:r>
-                  <a:rPr lang="pt-BR" dirty="0" err="1"/>
-                  <a:t>beamforming</a:t>
-                </a:r>
-                <a:r>
-                  <a:rPr lang="pt-BR" dirty="0"/>
-                  <a:t>, a dificuldade aumenta bastante. Aqui eles usam RADMM, que é uma forma de resolver o problema separando a variável em partes auxiliares e atualizando essas partes de maneira alternada. Em termos simples, o algoritmo faz o seguinte: primeiro ele atualiza uma versão do </a:t>
-                </a:r>
-                <a:r>
-                  <a:rPr lang="pt-BR" dirty="0" err="1"/>
-                  <a:t>beamforming</a:t>
-                </a:r>
-                <a:r>
-                  <a:rPr lang="pt-BR" dirty="0"/>
-                  <a:t> tentando melhorar a taxa </a:t>
-                </a:r>
-                <a:r>
-                  <a:rPr lang="pt-BR" dirty="0" err="1"/>
-                  <a:t>uplink</a:t>
-                </a:r>
-                <a:r>
-                  <a:rPr lang="pt-BR" dirty="0"/>
-                  <a:t>. Depois ele corrige essa solução para que ela continue respeitando a restrição geométrica de norma unitária. Em seguida, ele atualiza um termo auxiliar que força consistência entre essas duas representações. Então, na prática, esse subproblema roda como um pequeno laço interno com três etapas repetidas: melhorar a solução, projetar ou ajustar para o conjunto válido, e corrigir o acoplamento entre as variáveis auxiliares. Um exemplo intuitivo seria: imagine que a BS tenta ajustar o filtro de recepção para separar melhor dois usuários, mas toda vez que faz isso precisa garantir que esse filtro continue dentro da estrutura geométrica exigida. Então o algoritmo alterna entre melhorar o desempenho e reimpor a validade da solução. É por isso que esse é um dos blocos mais caros do algoritmo.</a:t>
-                </a:r>
-              </a:p>
-              <a:p>
-                <a:endParaRPr lang="pt-BR" dirty="0"/>
-              </a:p>
-              <a:p>
-                <a:r>
-                  <a:rPr lang="pt-BR" dirty="0"/>
-                  <a:t>No quarto subproblema, das </a:t>
-                </a:r>
-                <a:r>
-                  <a:rPr lang="pt-BR" dirty="0" err="1"/>
-                  <a:t>fluid</a:t>
-                </a:r>
-                <a:r>
-                  <a:rPr lang="pt-BR" dirty="0"/>
-                  <a:t> </a:t>
-                </a:r>
-                <a:r>
-                  <a:rPr lang="pt-BR" dirty="0" err="1"/>
-                  <a:t>antennas</a:t>
-                </a:r>
-                <a:r>
-                  <a:rPr lang="pt-BR" dirty="0"/>
-                  <a:t>, eles também evitam uma solução conjunta completa. Em vez de tentar mover todas as antenas ao mesmo tempo, o algoritmo faz uma atualização </a:t>
-                </a:r>
-                <a:r>
-                  <a:rPr lang="pt-BR" b="1" dirty="0"/>
-                  <a:t>sequencial</a:t>
-                </a:r>
-                <a:r>
-                  <a:rPr lang="pt-BR" dirty="0"/>
-                  <a:t>. Ele escolhe uma antena, otimiza a posição dela mantendo as demais fixas, depois passa para a próxima, e assim por diante. Cada atualização leva em conta duas restrições físicas: a antena precisa permanecer dentro da área do painel e não pode ficar perto demais das outras. Então, em termos práticos, esse bloco funciona como uma varredura antena por antena. </a:t>
-                </a:r>
-              </a:p>
-              <a:p>
-                <a:endParaRPr lang="pt-BR" dirty="0"/>
-              </a:p>
-              <a:p>
-                <a:r>
-                  <a:rPr lang="pt-BR" dirty="0"/>
-                  <a:t>Então, resumindo a complexidade, P1 e P2 são leves, porque têm solução direta ou quase direta. Já P3 e P4 concentram o custo real do algoritmo, porque envolvem iterações internas e restrições geométricas mais difíceis. E, como tudo roda em sequência dentro do BCD, o resultado atualizado de um bloco influencia o comportamento do próximo.</a:t>
-                </a:r>
-              </a:p>
-              <a:p>
-                <a:endParaRPr lang="pt-BR" dirty="0"/>
-              </a:p>
-              <a:p>
-                <a:endParaRPr lang="pt-BR" dirty="0"/>
-              </a:p>
-              <a:p>
-                <a:r>
-                  <a:rPr lang="pt-BR" dirty="0"/>
-                  <a:t>Os autores só dão explicitamente a complexidade de </a:t>
-                </a:r>
-                <a:r>
-                  <a:rPr lang="pt-BR" b="1" dirty="0"/>
-                  <a:t>dois</a:t>
-                </a:r>
-                <a:r>
-                  <a:rPr lang="pt-BR" dirty="0"/>
-                  <a:t> subproblemas. Eles afirmam que a complexidade de </a:t>
-                </a:r>
-                <a:r>
-                  <a:rPr lang="pt-BR" sz="1200" i="0" kern="1200">
-                    <a:solidFill>
-                      <a:schemeClr val="tx1"/>
-                    </a:solidFill>
-                    <a:latin typeface="+mn-lt"/>
-                    <a:ea typeface="+mn-ea"/>
-                    <a:cs typeface="+mn-cs"/>
-                  </a:rPr>
-                  <a:t>𝑃1</a:t>
-                </a:r>
-                <a:r>
-                  <a:rPr lang="pt-BR" dirty="0"/>
-                  <a:t>e </a:t>
-                </a:r>
-                <a:r>
-                  <a:rPr lang="pt-BR" sz="1200" i="0" kern="1200">
-                    <a:solidFill>
-                      <a:schemeClr val="tx1"/>
-                    </a:solidFill>
-                    <a:latin typeface="+mn-lt"/>
-                    <a:ea typeface="+mn-ea"/>
-                    <a:cs typeface="+mn-cs"/>
-                  </a:rPr>
-                  <a:t>𝑃2</a:t>
-                </a:r>
-                <a:r>
-                  <a:rPr lang="pt-BR" dirty="0"/>
-                  <a:t>é </a:t>
-                </a:r>
-                <a:r>
-                  <a:rPr lang="pt-BR" sz="1200" i="0" kern="1200">
-                    <a:solidFill>
-                      <a:schemeClr val="tx1"/>
-                    </a:solidFill>
-                    <a:latin typeface="+mn-lt"/>
-                    <a:ea typeface="+mn-ea"/>
-                    <a:cs typeface="+mn-cs"/>
-                  </a:rPr>
-                  <a:t>𝑂</a:t>
-                </a:r>
-                <a:r>
-                  <a:rPr lang="ar-AE" sz="1200" i="0" kern="1200">
-                    <a:solidFill>
-                      <a:schemeClr val="tx1"/>
-                    </a:solidFill>
-                    <a:latin typeface="+mn-lt"/>
-                    <a:ea typeface="+mn-ea"/>
-                    <a:cs typeface="+mn-cs"/>
-                  </a:rPr>
-                  <a:t>(𝑈)</a:t>
-                </a:r>
-                <a:r>
-                  <a:rPr lang="ar-AE" dirty="0"/>
-                  <a:t>, </a:t>
-                </a:r>
-                <a:r>
-                  <a:rPr lang="pt-BR" dirty="0"/>
-                  <a:t>isto é, linear no número de usuários. Depois disso, eles </a:t>
-                </a:r>
-                <a:r>
-                  <a:rPr lang="pt-BR" b="1" dirty="0"/>
-                  <a:t>não expandem</a:t>
-                </a:r>
-                <a:r>
-                  <a:rPr lang="pt-BR" dirty="0"/>
-                  <a:t> a complexidade de </a:t>
-                </a:r>
-                <a:r>
-                  <a:rPr lang="pt-BR" sz="1200" i="0" kern="1200">
-                    <a:solidFill>
-                      <a:schemeClr val="tx1"/>
-                    </a:solidFill>
-                    <a:latin typeface="+mn-lt"/>
-                    <a:ea typeface="+mn-ea"/>
-                    <a:cs typeface="+mn-cs"/>
-                  </a:rPr>
-                  <a:t>𝑃3</a:t>
-                </a:r>
-                <a:r>
-                  <a:rPr lang="pt-BR" dirty="0"/>
-                  <a:t>e </a:t>
-                </a:r>
-                <a:r>
-                  <a:rPr lang="pt-BR" sz="1200" i="0" kern="1200">
-                    <a:solidFill>
-                      <a:schemeClr val="tx1"/>
-                    </a:solidFill>
-                    <a:latin typeface="+mn-lt"/>
-                    <a:ea typeface="+mn-ea"/>
-                    <a:cs typeface="+mn-cs"/>
-                  </a:rPr>
-                  <a:t>𝑃4</a:t>
-                </a:r>
-                <a:r>
-                  <a:rPr lang="pt-BR" dirty="0"/>
-                  <a:t>dentro deste </a:t>
-                </a:r>
-                <a:r>
-                  <a:rPr lang="pt-BR" dirty="0" err="1"/>
-                  <a:t>paper</a:t>
-                </a:r>
-                <a:r>
-                  <a:rPr lang="pt-BR" dirty="0"/>
-                  <a:t>. Em vez disso, dizem que as complexidades de </a:t>
-                </a:r>
-                <a:r>
-                  <a:rPr lang="pt-BR" sz="1200" i="0" kern="1200">
-                    <a:solidFill>
-                      <a:schemeClr val="tx1"/>
-                    </a:solidFill>
-                    <a:latin typeface="+mn-lt"/>
-                    <a:ea typeface="+mn-ea"/>
-                    <a:cs typeface="+mn-cs"/>
-                  </a:rPr>
-                  <a:t>𝑃3</a:t>
-                </a:r>
-                <a:r>
-                  <a:rPr lang="pt-BR" dirty="0"/>
-                  <a:t>e </a:t>
-                </a:r>
-                <a:r>
-                  <a:rPr lang="pt-BR" sz="1200" i="0" kern="1200">
-                    <a:solidFill>
-                      <a:schemeClr val="tx1"/>
-                    </a:solidFill>
-                    <a:latin typeface="+mn-lt"/>
-                    <a:ea typeface="+mn-ea"/>
-                    <a:cs typeface="+mn-cs"/>
-                  </a:rPr>
-                  <a:t>𝑃4</a:t>
-                </a:r>
-                <a:r>
-                  <a:rPr lang="pt-BR" dirty="0"/>
-                  <a:t>são dadas nas referências </a:t>
-                </a:r>
-                <a:r>
-                  <a:rPr lang="pt-BR" b="1" dirty="0"/>
-                  <a:t>[7]</a:t>
-                </a:r>
-                <a:r>
-                  <a:rPr lang="pt-BR" dirty="0"/>
-                  <a:t> e </a:t>
-                </a:r>
-                <a:r>
-                  <a:rPr lang="pt-BR" b="1" dirty="0"/>
-                  <a:t>[4]</a:t>
-                </a:r>
-                <a:r>
-                  <a:rPr lang="pt-BR" dirty="0"/>
-                  <a:t>, respectivamente.</a:t>
-                </a:r>
-              </a:p>
-            </p:txBody>
-          </p:sp>
-        </mc:Fallback>
-      </mc:AlternateContent>
-      <p:sp>
-        <p:nvSpPr>
-          <p:cNvPr id="4" name="Slide Number Placeholder 3">
-            <a:extLst>
-              <a:ext uri="{FF2B5EF4-FFF2-40B4-BE49-F238E27FC236}">
-                <a16:creationId xmlns:a16="http://schemas.microsoft.com/office/drawing/2014/main" id="{B6CEB322-13D6-8344-887D-5163BF817778}"/>
-              </a:ext>
-            </a:extLst>
-          </p:cNvPr>
-          <p:cNvSpPr>
-            <a:spLocks noGrp="1"/>
-          </p:cNvSpPr>
-          <p:nvPr>
-            <p:ph type="sldNum" sz="quarter" idx="5"/>
-          </p:nvPr>
-        </p:nvSpPr>
-        <p:spPr/>
-        <p:txBody>
-          <a:bodyPr/>
-          <a:lstStyle/>
-          <a:p>
-            <a:fld id="{6FC8D850-966F-45A6-8DE7-15B891E7D40D}" type="slidenum">
-              <a:rPr lang="pt-BR" smtClean="0"/>
-              <a:t>20</a:t>
-            </a:fld>
-            <a:endParaRPr lang="pt-BR"/>
-          </a:p>
-        </p:txBody>
-      </p:sp>
-    </p:spTree>
-    <p:extLst>
-      <p:ext uri="{BB962C8B-B14F-4D97-AF65-F5344CB8AC3E}">
-        <p14:creationId xmlns:p14="http://schemas.microsoft.com/office/powerpoint/2010/main" val="1514711056"/>
       </p:ext>
     </p:extLst>
   </p:cSld>
@@ -8743,10 +9560,90 @@
           <a:bodyPr/>
           <a:lstStyle/>
           <a:p>
-            <a:pPr marL="171450" indent="-171450">
-              <a:buFont typeface="Arial" panose="020B0604020202020204" pitchFamily="34" charset="0"/>
-              <a:buChar char="•"/>
-            </a:pPr>
+            <a:r>
+              <a:rPr lang="pt-BR" sz="1200" b="1" i="0" kern="1200" dirty="0">
+                <a:solidFill>
+                  <a:schemeClr val="tx1"/>
+                </a:solidFill>
+                <a:effectLst/>
+                <a:latin typeface="+mn-lt"/>
+                <a:ea typeface="+mn-ea"/>
+                <a:cs typeface="+mn-cs"/>
+              </a:rPr>
+              <a:t>TPE (</a:t>
+            </a:r>
+            <a:r>
+              <a:rPr lang="pt-BR" sz="1200" b="1" i="0" kern="1200" dirty="0" err="1">
+                <a:solidFill>
+                  <a:schemeClr val="tx1"/>
+                </a:solidFill>
+                <a:effectLst/>
+                <a:latin typeface="+mn-lt"/>
+                <a:ea typeface="+mn-ea"/>
+                <a:cs typeface="+mn-cs"/>
+              </a:rPr>
+              <a:t>Tree-structured</a:t>
+            </a:r>
+            <a:r>
+              <a:rPr lang="pt-BR" sz="1200" b="1" i="0" kern="1200" dirty="0">
+                <a:solidFill>
+                  <a:schemeClr val="tx1"/>
+                </a:solidFill>
+                <a:effectLst/>
+                <a:latin typeface="+mn-lt"/>
+                <a:ea typeface="+mn-ea"/>
+                <a:cs typeface="+mn-cs"/>
+              </a:rPr>
+              <a:t> </a:t>
+            </a:r>
+            <a:r>
+              <a:rPr lang="pt-BR" sz="1200" b="1" i="0" kern="1200" dirty="0" err="1">
+                <a:solidFill>
+                  <a:schemeClr val="tx1"/>
+                </a:solidFill>
+                <a:effectLst/>
+                <a:latin typeface="+mn-lt"/>
+                <a:ea typeface="+mn-ea"/>
+                <a:cs typeface="+mn-cs"/>
+              </a:rPr>
+              <a:t>Parzen</a:t>
+            </a:r>
+            <a:r>
+              <a:rPr lang="pt-BR" sz="1200" b="1" i="0" kern="1200" dirty="0">
+                <a:solidFill>
+                  <a:schemeClr val="tx1"/>
+                </a:solidFill>
+                <a:effectLst/>
+                <a:latin typeface="+mn-lt"/>
+                <a:ea typeface="+mn-ea"/>
+                <a:cs typeface="+mn-cs"/>
+              </a:rPr>
+              <a:t> </a:t>
+            </a:r>
+            <a:r>
+              <a:rPr lang="pt-BR" sz="1200" b="1" i="0" kern="1200" dirty="0" err="1">
+                <a:solidFill>
+                  <a:schemeClr val="tx1"/>
+                </a:solidFill>
+                <a:effectLst/>
+                <a:latin typeface="+mn-lt"/>
+                <a:ea typeface="+mn-ea"/>
+                <a:cs typeface="+mn-cs"/>
+              </a:rPr>
+              <a:t>Estimator</a:t>
+            </a:r>
+            <a:r>
+              <a:rPr lang="pt-BR" sz="1200" b="1" i="0" kern="1200" dirty="0">
+                <a:solidFill>
+                  <a:schemeClr val="tx1"/>
+                </a:solidFill>
+                <a:effectLst/>
+                <a:latin typeface="+mn-lt"/>
+                <a:ea typeface="+mn-ea"/>
+                <a:cs typeface="+mn-cs"/>
+              </a:rPr>
+              <a:t>)</a:t>
+            </a:r>
             <a:endParaRPr lang="pt-BR" dirty="0"/>
           </a:p>
         </p:txBody>
@@ -8768,7 +9665,7 @@
           <a:p>
             <a:fld id="{6FC8D850-966F-45A6-8DE7-15B891E7D40D}" type="slidenum">
               <a:rPr lang="pt-BR" smtClean="0"/>
-              <a:t>3</a:t>
+              <a:t>2</a:t>
             </a:fld>
             <a:endParaRPr lang="pt-BR"/>
           </a:p>
@@ -8777,7 +9674,7 @@
     </p:spTree>
     <p:extLst>
       <p:ext uri="{BB962C8B-B14F-4D97-AF65-F5344CB8AC3E}">
-        <p14:creationId xmlns:p14="http://schemas.microsoft.com/office/powerpoint/2010/main" val="4009731068"/>
+        <p14:creationId xmlns:p14="http://schemas.microsoft.com/office/powerpoint/2010/main" val="2221727441"/>
       </p:ext>
     </p:extLst>
   </p:cSld>
@@ -8788,6 +9685,565 @@
 </file>
 
 <file path=ppt/notesSlides/notesSlide20.xml><?xml version="1.0" encoding="utf-8"?>
+<p:notes xmlns:a="http://schemas.openxmlformats.org/drawingml/2006/main" xmlns:r="http://schemas.openxmlformats.org/officeDocument/2006/relationships" xmlns:p="http://schemas.openxmlformats.org/presentationml/2006/main">
+  <p:cSld>
+    <p:spTree>
+      <p:nvGrpSpPr>
+        <p:cNvPr id="1" name="">
+          <a:extLst>
+            <a:ext uri="{FF2B5EF4-FFF2-40B4-BE49-F238E27FC236}">
+              <a16:creationId xmlns:a16="http://schemas.microsoft.com/office/drawing/2014/main" id="{6D420289-DD16-66DA-221D-B397A7C574A2}"/>
+            </a:ext>
+          </a:extLst>
+        </p:cNvPr>
+        <p:cNvGrpSpPr/>
+        <p:nvPr/>
+      </p:nvGrpSpPr>
+      <p:grpSpPr>
+        <a:xfrm>
+          <a:off x="0" y="0"/>
+          <a:ext cx="0" cy="0"/>
+          <a:chOff x="0" y="0"/>
+          <a:chExt cx="0" cy="0"/>
+        </a:xfrm>
+      </p:grpSpPr>
+      <p:sp>
+        <p:nvSpPr>
+          <p:cNvPr id="2" name="Slide Image Placeholder 1">
+            <a:extLst>
+              <a:ext uri="{FF2B5EF4-FFF2-40B4-BE49-F238E27FC236}">
+                <a16:creationId xmlns:a16="http://schemas.microsoft.com/office/drawing/2014/main" id="{968416E4-27B4-4136-F9BF-44FDF3BACDC3}"/>
+              </a:ext>
+            </a:extLst>
+          </p:cNvPr>
+          <p:cNvSpPr>
+            <a:spLocks noGrp="1" noRot="1" noChangeAspect="1"/>
+          </p:cNvSpPr>
+          <p:nvPr>
+            <p:ph type="sldImg"/>
+          </p:nvPr>
+        </p:nvSpPr>
+        <p:spPr/>
+        <p:txBody>
+          <a:bodyPr/>
+          <a:lstStyle/>
+          <a:p>
+            <a:endParaRPr lang="pt-BR"/>
+          </a:p>
+        </p:txBody>
+      </p:sp>
+      <mc:AlternateContent xmlns:mc="http://schemas.openxmlformats.org/markup-compatibility/2006" xmlns:a14="http://schemas.microsoft.com/office/drawing/2010/main">
+        <mc:Choice Requires="a14">
+          <p:sp>
+            <p:nvSpPr>
+              <p:cNvPr id="3" name="Notes Placeholder 2">
+                <a:extLst>
+                  <a:ext uri="{FF2B5EF4-FFF2-40B4-BE49-F238E27FC236}">
+                    <a16:creationId xmlns:a16="http://schemas.microsoft.com/office/drawing/2014/main" id="{2E490C18-8D85-0BC6-B0D8-9E11B7DD36B9}"/>
+                  </a:ext>
+                </a:extLst>
+              </p:cNvPr>
+              <p:cNvSpPr>
+                <a:spLocks noGrp="1"/>
+              </p:cNvSpPr>
+              <p:nvPr>
+                <p:ph type="body" idx="1"/>
+              </p:nvPr>
+            </p:nvSpPr>
+            <p:spPr/>
+            <p:txBody>
+              <a:bodyPr/>
+              <a:lstStyle/>
+              <a:p>
+                <a:r>
+                  <a:rPr lang="pt-BR" dirty="0"/>
+                  <a:t>Eles fizeram uma distinção entre </a:t>
+                </a:r>
+                <a:r>
+                  <a:rPr lang="pt-BR" b="1" dirty="0"/>
+                  <a:t>fase de busca</a:t>
+                </a:r>
+                <a:r>
+                  <a:rPr lang="pt-BR" dirty="0"/>
+                  <a:t> e </a:t>
+                </a:r>
+                <a:r>
+                  <a:rPr lang="pt-BR" b="1" dirty="0"/>
+                  <a:t>fase de avaliação final</a:t>
+                </a:r>
+                <a:r>
+                  <a:rPr lang="pt-BR" dirty="0"/>
+                  <a:t>.</a:t>
+                </a:r>
+              </a:p>
+              <a:p>
+                <a:r>
+                  <a:rPr lang="pt-BR" dirty="0"/>
+                  <a:t>Na </a:t>
+                </a:r>
+                <a:r>
+                  <a:rPr lang="pt-BR" b="1" dirty="0"/>
+                  <a:t>fase de busca</a:t>
+                </a:r>
+                <a:r>
+                  <a:rPr lang="pt-BR" dirty="0"/>
+                  <a:t>, eles usam uma rede menor, com </a:t>
+                </a:r>
+                <a:r>
+                  <a:rPr lang="pt-BR" b="1" dirty="0"/>
+                  <a:t>8 células</a:t>
+                </a:r>
+                <a:r>
+                  <a:rPr lang="pt-BR" dirty="0"/>
+                  <a:t>, porque o objetivo não é treinar o melhor modelo final. O objetivo é descobrir </a:t>
+                </a:r>
+                <a:r>
+                  <a:rPr lang="pt-BR" b="1" dirty="0"/>
+                  <a:t>qual desenho de célula</a:t>
+                </a:r>
+                <a:r>
+                  <a:rPr lang="pt-BR" dirty="0"/>
+                  <a:t> é melhor, isto é, quais operações e conexões devem compor a arquitetura.</a:t>
+                </a:r>
+              </a:p>
+              <a:p>
+                <a:r>
+                  <a:rPr lang="pt-BR" dirty="0"/>
+                  <a:t>Depois disso, na </a:t>
+                </a:r>
+                <a:r>
+                  <a:rPr lang="pt-BR" b="1" dirty="0"/>
+                  <a:t>fase de avaliação</a:t>
+                </a:r>
+                <a:r>
+                  <a:rPr lang="pt-BR" dirty="0"/>
+                  <a:t>, eles pegam a célula descoberta e montam uma rede maior, com </a:t>
+                </a:r>
+                <a:r>
+                  <a:rPr lang="pt-BR" b="1" dirty="0"/>
+                  <a:t>20 células</a:t>
+                </a:r>
+                <a:r>
+                  <a:rPr lang="pt-BR" dirty="0"/>
+                  <a:t>, treinando tudo do zero por </a:t>
+                </a:r>
+                <a:r>
+                  <a:rPr lang="pt-BR" b="1" dirty="0"/>
+                  <a:t>600 épocas</a:t>
+                </a:r>
+                <a:r>
+                  <a:rPr lang="pt-BR" dirty="0"/>
+                  <a:t>. O </a:t>
+                </a:r>
+                <a:r>
+                  <a:rPr lang="pt-BR" dirty="0" err="1"/>
+                  <a:t>paper</a:t>
+                </a:r>
+                <a:r>
+                  <a:rPr lang="pt-BR" dirty="0"/>
+                  <a:t> descreve exatamente essa estratégia para classificação: a </a:t>
+                </a:r>
+                <a:r>
+                  <a:rPr lang="pt-BR" dirty="0" err="1"/>
+                  <a:t>supernet</a:t>
+                </a:r>
+                <a:r>
+                  <a:rPr lang="pt-BR" dirty="0"/>
+                  <a:t> de busca tem 8 células, depois a arquitetura descoberta é treinada em uma rede maior de 20 células. </a:t>
+                </a:r>
+              </a:p>
+            </p:txBody>
+          </p:sp>
+        </mc:Choice>
+        <mc:Fallback xmlns="">
+          <p:sp>
+            <p:nvSpPr>
+              <p:cNvPr id="3" name="Notes Placeholder 2">
+                <a:extLst>
+                  <a:ext uri="{FF2B5EF4-FFF2-40B4-BE49-F238E27FC236}">
+                    <a16:creationId xmlns:a16="http://schemas.microsoft.com/office/drawing/2014/main" id="{BC4A4DA6-AAD5-7B9F-C6CD-1BF515A984C5}"/>
+                  </a:ext>
+                </a:extLst>
+              </p:cNvPr>
+              <p:cNvSpPr>
+                <a:spLocks noGrp="1"/>
+              </p:cNvSpPr>
+              <p:nvPr>
+                <p:ph type="body" idx="1"/>
+              </p:nvPr>
+            </p:nvSpPr>
+            <p:spPr/>
+            <p:txBody>
+              <a:bodyPr/>
+              <a:lstStyle/>
+              <a:p>
+                <a:r>
+                  <a:rPr lang="pt-BR" dirty="0"/>
+                  <a:t>Este slide resume os quatro subproblemas usados na solução. A Seção III do </a:t>
+                </a:r>
+                <a:r>
+                  <a:rPr lang="pt-BR" dirty="0" err="1"/>
+                  <a:t>paper</a:t>
+                </a:r>
+                <a:r>
+                  <a:rPr lang="pt-BR" dirty="0"/>
+                  <a:t> é bem carregada de matemática, com vários lemas, reformulações e atualizações iterativas. Então, em vez de entrar em todas as equações, eu preferi traduzir a lógica prática do que cada bloco faz.</a:t>
+                </a:r>
+              </a:p>
+              <a:p>
+                <a:endParaRPr lang="pt-BR" dirty="0"/>
+              </a:p>
+              <a:p>
+                <a:r>
+                  <a:rPr lang="pt-BR" dirty="0"/>
+                  <a:t>No primeiro subproblema, da frequência do servidor, a solução é relativamente simples. Como o problema é convexo, os autores conseguem obter uma solução fechada usando as condições </a:t>
+                </a:r>
+                <a:r>
+                  <a:rPr lang="pt-BR" b="1" dirty="0"/>
+                  <a:t>KKT</a:t>
+                </a:r>
+                <a:r>
+                  <a:rPr lang="pt-BR" dirty="0"/>
+                  <a:t>, que No primeiro subproblema, da frequência do servidor, a solução é relativamente simples. Como o problema é convexo, os autores conseguem obter uma solução fechada usando as condições KKT. Em termos práticos, isso quer dizer que eles não precisam iterar muito nem testar várias divisões possíveis de recurso. Eles já têm uma expressão direta que calcula quanto de processamento cada usuário deve receber com base na carga computacional associada a ele. Um exemplo simples seria este: imagine que o servidor tem 100 unidades de processamento para distribuir entre 3 usuários. O método não divide isso igualmente. Ele calcula uma divisão mais inteligente, dando mais recurso para quem tem tarefa mais pesada. Por isso, esse bloco é barato e tem complexidade linear no número de usuários</a:t>
+                </a:r>
+              </a:p>
+              <a:p>
+                <a:endParaRPr lang="pt-BR" dirty="0"/>
+              </a:p>
+              <a:p>
+                <a:endParaRPr lang="pt-BR" dirty="0"/>
+              </a:p>
+              <a:p>
+                <a:r>
+                  <a:rPr lang="pt-BR" dirty="0"/>
+                  <a:t>No segundo subproblema, da quantização, a lógica é a seguinte. O problema original é discreto, porque os bits permitidos são só 4, 8, 16 ou 32. Resolver isso diretamente seria mais difícil. Então eles fazem primeiro uma </a:t>
+                </a:r>
+                <a:r>
+                  <a:rPr lang="pt-BR" b="1" dirty="0"/>
+                  <a:t>relaxação contínua</a:t>
+                </a:r>
+                <a:r>
+                  <a:rPr lang="pt-BR" dirty="0"/>
+                  <a:t>, isto é, fingem temporariamente que o número de bits pode assumir qualquer valor real positivo. Depois disso, analisam a função do subproblema e mostram que ela é estritamente convexa. Isso é importante porque significa que existe um único ponto ótimo contínuo. A partir daí, eles derivam a condição de ótimo desse problema relaxado e obtêm diretamente o valor contínuo ótimo de </a:t>
+                </a:r>
+                <a:r>
+                  <a:rPr lang="ar-AE" sz="1200" i="0" kern="1200">
+                    <a:solidFill>
+                      <a:schemeClr val="tx1"/>
+                    </a:solidFill>
+                    <a:latin typeface="+mn-lt"/>
+                    <a:ea typeface="+mn-ea"/>
+                    <a:cs typeface="+mn-cs"/>
+                  </a:rPr>
+                  <a:t>𝑞_𝑢</a:t>
+                </a:r>
+                <a:r>
+                  <a:rPr lang="pt-BR" dirty="0"/>
+                  <a:t>para cada usuário. Em seguida, como esse valor contínuo não é necessariamente permitido na prática, eles fazem uma </a:t>
+                </a:r>
+                <a:r>
+                  <a:rPr lang="pt-BR" b="1" dirty="0"/>
+                  <a:t>projeção para o conjunto discreto viável</a:t>
+                </a:r>
+                <a:r>
+                  <a:rPr lang="pt-BR" dirty="0"/>
+                  <a:t>, escolhendo o valor mais próximo entre 4, 8, 16 e 32. Um exemplo simples seria este: suponha que o valor ótimo contínuo calculado fosse 15.5 bits. Como esse valor não é permitido, eles projetam para o conjunto viável e escolhem o mais próximo: 16.</a:t>
+                </a:r>
+              </a:p>
+              <a:p>
+                <a:endParaRPr lang="pt-BR" dirty="0"/>
+              </a:p>
+              <a:p>
+                <a:r>
+                  <a:rPr lang="pt-BR" dirty="0"/>
+                  <a:t>No terceiro subproblema, do </a:t>
+                </a:r>
+                <a:r>
+                  <a:rPr lang="pt-BR" dirty="0" err="1"/>
+                  <a:t>beamforming</a:t>
+                </a:r>
+                <a:r>
+                  <a:rPr lang="pt-BR" dirty="0"/>
+                  <a:t>, a dificuldade aumenta bastante. Aqui eles usam RADMM, que é uma forma de resolver o problema separando a variável em partes auxiliares e atualizando essas partes de maneira alternada. Em termos simples, o algoritmo faz o seguinte: primeiro ele atualiza uma versão do </a:t>
+                </a:r>
+                <a:r>
+                  <a:rPr lang="pt-BR" dirty="0" err="1"/>
+                  <a:t>beamforming</a:t>
+                </a:r>
+                <a:r>
+                  <a:rPr lang="pt-BR" dirty="0"/>
+                  <a:t> tentando melhorar a taxa </a:t>
+                </a:r>
+                <a:r>
+                  <a:rPr lang="pt-BR" dirty="0" err="1"/>
+                  <a:t>uplink</a:t>
+                </a:r>
+                <a:r>
+                  <a:rPr lang="pt-BR" dirty="0"/>
+                  <a:t>. Depois ele corrige essa solução para que ela continue respeitando a restrição geométrica de norma unitária. Em seguida, ele atualiza um termo auxiliar que força consistência entre essas duas representações. Então, na prática, esse subproblema roda como um pequeno laço interno com três etapas repetidas: melhorar a solução, projetar ou ajustar para o conjunto válido, e corrigir o acoplamento entre as variáveis auxiliares. Um exemplo intuitivo seria: imagine que a BS tenta ajustar o filtro de recepção para separar melhor dois usuários, mas toda vez que faz isso precisa garantir que esse filtro continue dentro da estrutura geométrica exigida. Então o algoritmo alterna entre melhorar o desempenho e reimpor a validade da solução. É por isso que esse é um dos blocos mais caros do algoritmo.</a:t>
+                </a:r>
+              </a:p>
+              <a:p>
+                <a:endParaRPr lang="pt-BR" dirty="0"/>
+              </a:p>
+              <a:p>
+                <a:r>
+                  <a:rPr lang="pt-BR" dirty="0"/>
+                  <a:t>No quarto subproblema, das </a:t>
+                </a:r>
+                <a:r>
+                  <a:rPr lang="pt-BR" dirty="0" err="1"/>
+                  <a:t>fluid</a:t>
+                </a:r>
+                <a:r>
+                  <a:rPr lang="pt-BR" dirty="0"/>
+                  <a:t> </a:t>
+                </a:r>
+                <a:r>
+                  <a:rPr lang="pt-BR" dirty="0" err="1"/>
+                  <a:t>antennas</a:t>
+                </a:r>
+                <a:r>
+                  <a:rPr lang="pt-BR" dirty="0"/>
+                  <a:t>, eles também evitam uma solução conjunta completa. Em vez de tentar mover todas as antenas ao mesmo tempo, o algoritmo faz uma atualização </a:t>
+                </a:r>
+                <a:r>
+                  <a:rPr lang="pt-BR" b="1" dirty="0"/>
+                  <a:t>sequencial</a:t>
+                </a:r>
+                <a:r>
+                  <a:rPr lang="pt-BR" dirty="0"/>
+                  <a:t>. Ele escolhe uma antena, otimiza a posição dela mantendo as demais fixas, depois passa para a próxima, e assim por diante. Cada atualização leva em conta duas restrições físicas: a antena precisa permanecer dentro da área do painel e não pode ficar perto demais das outras. Então, em termos práticos, esse bloco funciona como uma varredura antena por antena. </a:t>
+                </a:r>
+              </a:p>
+              <a:p>
+                <a:endParaRPr lang="pt-BR" dirty="0"/>
+              </a:p>
+              <a:p>
+                <a:r>
+                  <a:rPr lang="pt-BR" dirty="0"/>
+                  <a:t>Então, resumindo a complexidade, P1 e P2 são leves, porque têm solução direta ou quase direta. Já P3 e P4 concentram o custo real do algoritmo, porque envolvem iterações internas e restrições geométricas mais difíceis. E, como tudo roda em sequência dentro do BCD, o resultado atualizado de um bloco influencia o comportamento do próximo.</a:t>
+                </a:r>
+              </a:p>
+              <a:p>
+                <a:endParaRPr lang="pt-BR" dirty="0"/>
+              </a:p>
+              <a:p>
+                <a:endParaRPr lang="pt-BR" dirty="0"/>
+              </a:p>
+              <a:p>
+                <a:r>
+                  <a:rPr lang="pt-BR" dirty="0"/>
+                  <a:t>Os autores só dão explicitamente a complexidade de </a:t>
+                </a:r>
+                <a:r>
+                  <a:rPr lang="pt-BR" b="1" dirty="0"/>
+                  <a:t>dois</a:t>
+                </a:r>
+                <a:r>
+                  <a:rPr lang="pt-BR" dirty="0"/>
+                  <a:t> subproblemas. Eles afirmam que a complexidade de </a:t>
+                </a:r>
+                <a:r>
+                  <a:rPr lang="pt-BR" sz="1200" i="0" kern="1200">
+                    <a:solidFill>
+                      <a:schemeClr val="tx1"/>
+                    </a:solidFill>
+                    <a:latin typeface="+mn-lt"/>
+                    <a:ea typeface="+mn-ea"/>
+                    <a:cs typeface="+mn-cs"/>
+                  </a:rPr>
+                  <a:t>𝑃1</a:t>
+                </a:r>
+                <a:r>
+                  <a:rPr lang="pt-BR" dirty="0"/>
+                  <a:t>e </a:t>
+                </a:r>
+                <a:r>
+                  <a:rPr lang="pt-BR" sz="1200" i="0" kern="1200">
+                    <a:solidFill>
+                      <a:schemeClr val="tx1"/>
+                    </a:solidFill>
+                    <a:latin typeface="+mn-lt"/>
+                    <a:ea typeface="+mn-ea"/>
+                    <a:cs typeface="+mn-cs"/>
+                  </a:rPr>
+                  <a:t>𝑃2</a:t>
+                </a:r>
+                <a:r>
+                  <a:rPr lang="pt-BR" dirty="0"/>
+                  <a:t>é </a:t>
+                </a:r>
+                <a:r>
+                  <a:rPr lang="pt-BR" sz="1200" i="0" kern="1200">
+                    <a:solidFill>
+                      <a:schemeClr val="tx1"/>
+                    </a:solidFill>
+                    <a:latin typeface="+mn-lt"/>
+                    <a:ea typeface="+mn-ea"/>
+                    <a:cs typeface="+mn-cs"/>
+                  </a:rPr>
+                  <a:t>𝑂</a:t>
+                </a:r>
+                <a:r>
+                  <a:rPr lang="ar-AE" sz="1200" i="0" kern="1200">
+                    <a:solidFill>
+                      <a:schemeClr val="tx1"/>
+                    </a:solidFill>
+                    <a:latin typeface="+mn-lt"/>
+                    <a:ea typeface="+mn-ea"/>
+                    <a:cs typeface="+mn-cs"/>
+                  </a:rPr>
+                  <a:t>(𝑈)</a:t>
+                </a:r>
+                <a:r>
+                  <a:rPr lang="ar-AE" dirty="0"/>
+                  <a:t>, </a:t>
+                </a:r>
+                <a:r>
+                  <a:rPr lang="pt-BR" dirty="0"/>
+                  <a:t>isto é, linear no número de usuários. Depois disso, eles </a:t>
+                </a:r>
+                <a:r>
+                  <a:rPr lang="pt-BR" b="1" dirty="0"/>
+                  <a:t>não expandem</a:t>
+                </a:r>
+                <a:r>
+                  <a:rPr lang="pt-BR" dirty="0"/>
+                  <a:t> a complexidade de </a:t>
+                </a:r>
+                <a:r>
+                  <a:rPr lang="pt-BR" sz="1200" i="0" kern="1200">
+                    <a:solidFill>
+                      <a:schemeClr val="tx1"/>
+                    </a:solidFill>
+                    <a:latin typeface="+mn-lt"/>
+                    <a:ea typeface="+mn-ea"/>
+                    <a:cs typeface="+mn-cs"/>
+                  </a:rPr>
+                  <a:t>𝑃3</a:t>
+                </a:r>
+                <a:r>
+                  <a:rPr lang="pt-BR" dirty="0"/>
+                  <a:t>e </a:t>
+                </a:r>
+                <a:r>
+                  <a:rPr lang="pt-BR" sz="1200" i="0" kern="1200">
+                    <a:solidFill>
+                      <a:schemeClr val="tx1"/>
+                    </a:solidFill>
+                    <a:latin typeface="+mn-lt"/>
+                    <a:ea typeface="+mn-ea"/>
+                    <a:cs typeface="+mn-cs"/>
+                  </a:rPr>
+                  <a:t>𝑃4</a:t>
+                </a:r>
+                <a:r>
+                  <a:rPr lang="pt-BR" dirty="0"/>
+                  <a:t>dentro deste </a:t>
+                </a:r>
+                <a:r>
+                  <a:rPr lang="pt-BR" dirty="0" err="1"/>
+                  <a:t>paper</a:t>
+                </a:r>
+                <a:r>
+                  <a:rPr lang="pt-BR" dirty="0"/>
+                  <a:t>. Em vez disso, dizem que as complexidades de </a:t>
+                </a:r>
+                <a:r>
+                  <a:rPr lang="pt-BR" sz="1200" i="0" kern="1200">
+                    <a:solidFill>
+                      <a:schemeClr val="tx1"/>
+                    </a:solidFill>
+                    <a:latin typeface="+mn-lt"/>
+                    <a:ea typeface="+mn-ea"/>
+                    <a:cs typeface="+mn-cs"/>
+                  </a:rPr>
+                  <a:t>𝑃3</a:t>
+                </a:r>
+                <a:r>
+                  <a:rPr lang="pt-BR" dirty="0"/>
+                  <a:t>e </a:t>
+                </a:r>
+                <a:r>
+                  <a:rPr lang="pt-BR" sz="1200" i="0" kern="1200">
+                    <a:solidFill>
+                      <a:schemeClr val="tx1"/>
+                    </a:solidFill>
+                    <a:latin typeface="+mn-lt"/>
+                    <a:ea typeface="+mn-ea"/>
+                    <a:cs typeface="+mn-cs"/>
+                  </a:rPr>
+                  <a:t>𝑃4</a:t>
+                </a:r>
+                <a:r>
+                  <a:rPr lang="pt-BR" dirty="0"/>
+                  <a:t>são dadas nas referências </a:t>
+                </a:r>
+                <a:r>
+                  <a:rPr lang="pt-BR" b="1" dirty="0"/>
+                  <a:t>[7]</a:t>
+                </a:r>
+                <a:r>
+                  <a:rPr lang="pt-BR" dirty="0"/>
+                  <a:t> e </a:t>
+                </a:r>
+                <a:r>
+                  <a:rPr lang="pt-BR" b="1" dirty="0"/>
+                  <a:t>[4]</a:t>
+                </a:r>
+                <a:r>
+                  <a:rPr lang="pt-BR" dirty="0"/>
+                  <a:t>, respectivamente.</a:t>
+                </a:r>
+              </a:p>
+            </p:txBody>
+          </p:sp>
+        </mc:Fallback>
+      </mc:AlternateContent>
+      <p:sp>
+        <p:nvSpPr>
+          <p:cNvPr id="4" name="Slide Number Placeholder 3">
+            <a:extLst>
+              <a:ext uri="{FF2B5EF4-FFF2-40B4-BE49-F238E27FC236}">
+                <a16:creationId xmlns:a16="http://schemas.microsoft.com/office/drawing/2014/main" id="{B6CEB322-13D6-8344-887D-5163BF817778}"/>
+              </a:ext>
+            </a:extLst>
+          </p:cNvPr>
+          <p:cNvSpPr>
+            <a:spLocks noGrp="1"/>
+          </p:cNvSpPr>
+          <p:nvPr>
+            <p:ph type="sldNum" sz="quarter" idx="5"/>
+          </p:nvPr>
+        </p:nvSpPr>
+        <p:spPr/>
+        <p:txBody>
+          <a:bodyPr/>
+          <a:lstStyle/>
+          <a:p>
+            <a:fld id="{6FC8D850-966F-45A6-8DE7-15B891E7D40D}" type="slidenum">
+              <a:rPr lang="pt-BR" smtClean="0"/>
+              <a:t>20</a:t>
+            </a:fld>
+            <a:endParaRPr lang="pt-BR"/>
+          </a:p>
+        </p:txBody>
+      </p:sp>
+    </p:spTree>
+    <p:extLst>
+      <p:ext uri="{BB962C8B-B14F-4D97-AF65-F5344CB8AC3E}">
+        <p14:creationId xmlns:p14="http://schemas.microsoft.com/office/powerpoint/2010/main" val="1514711056"/>
+      </p:ext>
+    </p:extLst>
+  </p:cSld>
+  <p:clrMapOvr>
+    <a:masterClrMapping/>
+  </p:clrMapOvr>
+</p:notes>
+</file>
+
+<file path=ppt/notesSlides/notesSlide21.xml><?xml version="1.0" encoding="utf-8"?>
 <p:notes xmlns:a="http://schemas.openxmlformats.org/drawingml/2006/main" xmlns:r="http://schemas.openxmlformats.org/officeDocument/2006/relationships" xmlns:p="http://schemas.openxmlformats.org/presentationml/2006/main">
   <p:cSld>
     <p:spTree>
@@ -9310,7 +10766,7 @@
 </p:notes>
 </file>
 
-<file path=ppt/notesSlides/notesSlide21.xml><?xml version="1.0" encoding="utf-8"?>
+<file path=ppt/notesSlides/notesSlide22.xml><?xml version="1.0" encoding="utf-8"?>
 <p:notes xmlns:a="http://schemas.openxmlformats.org/drawingml/2006/main" xmlns:r="http://schemas.openxmlformats.org/officeDocument/2006/relationships" xmlns:p="http://schemas.openxmlformats.org/presentationml/2006/main">
   <p:cSld>
     <p:spTree>
@@ -9809,7 +11265,7 @@
 </p:notes>
 </file>
 
-<file path=ppt/notesSlides/notesSlide22.xml><?xml version="1.0" encoding="utf-8"?>
+<file path=ppt/notesSlides/notesSlide23.xml><?xml version="1.0" encoding="utf-8"?>
 <p:notes xmlns:a="http://schemas.openxmlformats.org/drawingml/2006/main" xmlns:r="http://schemas.openxmlformats.org/officeDocument/2006/relationships" xmlns:p="http://schemas.openxmlformats.org/presentationml/2006/main">
   <p:cSld>
     <p:spTree>
@@ -10316,7 +11772,7 @@
 </p:notes>
 </file>
 
-<file path=ppt/notesSlides/notesSlide23.xml><?xml version="1.0" encoding="utf-8"?>
+<file path=ppt/notesSlides/notesSlide24.xml><?xml version="1.0" encoding="utf-8"?>
 <p:notes xmlns:a="http://schemas.openxmlformats.org/drawingml/2006/main" xmlns:r="http://schemas.openxmlformats.org/officeDocument/2006/relationships" xmlns:p="http://schemas.openxmlformats.org/presentationml/2006/main">
   <p:cSld>
     <p:spTree>
@@ -10839,7 +12295,7 @@
 </p:notes>
 </file>
 
-<file path=ppt/notesSlides/notesSlide24.xml><?xml version="1.0" encoding="utf-8"?>
+<file path=ppt/notesSlides/notesSlide25.xml><?xml version="1.0" encoding="utf-8"?>
 <p:notes xmlns:a="http://schemas.openxmlformats.org/drawingml/2006/main" xmlns:r="http://schemas.openxmlformats.org/officeDocument/2006/relationships" xmlns:p="http://schemas.openxmlformats.org/presentationml/2006/main">
   <p:cSld>
     <p:spTree>
@@ -11322,7 +12778,7 @@
 </p:notes>
 </file>
 
-<file path=ppt/notesSlides/notesSlide25.xml><?xml version="1.0" encoding="utf-8"?>
+<file path=ppt/notesSlides/notesSlide26.xml><?xml version="1.0" encoding="utf-8"?>
 <p:notes xmlns:a="http://schemas.openxmlformats.org/drawingml/2006/main" xmlns:r="http://schemas.openxmlformats.org/officeDocument/2006/relationships" xmlns:p="http://schemas.openxmlformats.org/presentationml/2006/main">
   <p:cSld>
     <p:spTree>
@@ -11869,7 +13325,7 @@
 </p:notes>
 </file>
 
-<file path=ppt/notesSlides/notesSlide26.xml><?xml version="1.0" encoding="utf-8"?>
+<file path=ppt/notesSlides/notesSlide27.xml><?xml version="1.0" encoding="utf-8"?>
 <p:notes xmlns:a="http://schemas.openxmlformats.org/drawingml/2006/main" xmlns:r="http://schemas.openxmlformats.org/officeDocument/2006/relationships" xmlns:p="http://schemas.openxmlformats.org/presentationml/2006/main">
   <p:cSld>
     <p:spTree>
@@ -12336,7 +13792,7 @@
 </p:notes>
 </file>
 
-<file path=ppt/notesSlides/notesSlide27.xml><?xml version="1.0" encoding="utf-8"?>
+<file path=ppt/notesSlides/notesSlide28.xml><?xml version="1.0" encoding="utf-8"?>
 <p:notes xmlns:a="http://schemas.openxmlformats.org/drawingml/2006/main" xmlns:r="http://schemas.openxmlformats.org/officeDocument/2006/relationships" xmlns:p="http://schemas.openxmlformats.org/presentationml/2006/main">
   <p:cSld>
     <p:spTree>
@@ -12919,7 +14375,7 @@
 </p:notes>
 </file>
 
-<file path=ppt/notesSlides/notesSlide28.xml><?xml version="1.0" encoding="utf-8"?>
+<file path=ppt/notesSlides/notesSlide29.xml><?xml version="1.0" encoding="utf-8"?>
 <p:notes xmlns:a="http://schemas.openxmlformats.org/drawingml/2006/main" xmlns:r="http://schemas.openxmlformats.org/officeDocument/2006/relationships" xmlns:p="http://schemas.openxmlformats.org/presentationml/2006/main">
   <p:cSld>
     <p:spTree>
@@ -13502,7 +14958,95 @@
 </p:notes>
 </file>
 
-<file path=ppt/notesSlides/notesSlide29.xml><?xml version="1.0" encoding="utf-8"?>
+<file path=ppt/notesSlides/notesSlide3.xml><?xml version="1.0" encoding="utf-8"?>
+<p:notes xmlns:a="http://schemas.openxmlformats.org/drawingml/2006/main" xmlns:r="http://schemas.openxmlformats.org/officeDocument/2006/relationships" xmlns:p="http://schemas.openxmlformats.org/presentationml/2006/main">
+  <p:cSld>
+    <p:spTree>
+      <p:nvGrpSpPr>
+        <p:cNvPr id="1" name=""/>
+        <p:cNvGrpSpPr/>
+        <p:nvPr/>
+      </p:nvGrpSpPr>
+      <p:grpSpPr>
+        <a:xfrm>
+          <a:off x="0" y="0"/>
+          <a:ext cx="0" cy="0"/>
+          <a:chOff x="0" y="0"/>
+          <a:chExt cx="0" cy="0"/>
+        </a:xfrm>
+      </p:grpSpPr>
+      <p:sp>
+        <p:nvSpPr>
+          <p:cNvPr id="2" name="Slide Image Placeholder 1"/>
+          <p:cNvSpPr>
+            <a:spLocks noGrp="1" noRot="1" noChangeAspect="1"/>
+          </p:cNvSpPr>
+          <p:nvPr>
+            <p:ph type="sldImg"/>
+          </p:nvPr>
+        </p:nvSpPr>
+        <p:spPr/>
+      </p:sp>
+      <p:sp>
+        <p:nvSpPr>
+          <p:cNvPr id="3" name="Notes Placeholder 2"/>
+          <p:cNvSpPr>
+            <a:spLocks noGrp="1"/>
+          </p:cNvSpPr>
+          <p:nvPr>
+            <p:ph type="body" idx="1"/>
+          </p:nvPr>
+        </p:nvSpPr>
+        <p:spPr/>
+        <p:txBody>
+          <a:bodyPr/>
+          <a:lstStyle/>
+          <a:p>
+            <a:pPr marL="171450" indent="-171450">
+              <a:buFont typeface="Arial" panose="020B0604020202020204" pitchFamily="34" charset="0"/>
+              <a:buChar char="•"/>
+            </a:pPr>
+            <a:endParaRPr lang="pt-BR" dirty="0"/>
+          </a:p>
+        </p:txBody>
+      </p:sp>
+      <p:sp>
+        <p:nvSpPr>
+          <p:cNvPr id="4" name="Slide Number Placeholder 3"/>
+          <p:cNvSpPr>
+            <a:spLocks noGrp="1"/>
+          </p:cNvSpPr>
+          <p:nvPr>
+            <p:ph type="sldNum" sz="quarter" idx="5"/>
+          </p:nvPr>
+        </p:nvSpPr>
+        <p:spPr/>
+        <p:txBody>
+          <a:bodyPr/>
+          <a:lstStyle/>
+          <a:p>
+            <a:fld id="{6FC8D850-966F-45A6-8DE7-15B891E7D40D}" type="slidenum">
+              <a:rPr lang="pt-BR" smtClean="0"/>
+              <a:t>3</a:t>
+            </a:fld>
+            <a:endParaRPr lang="pt-BR"/>
+          </a:p>
+        </p:txBody>
+      </p:sp>
+    </p:spTree>
+    <p:extLst>
+      <p:ext uri="{BB962C8B-B14F-4D97-AF65-F5344CB8AC3E}">
+        <p14:creationId xmlns:p14="http://schemas.microsoft.com/office/powerpoint/2010/main" val="4009731068"/>
+      </p:ext>
+    </p:extLst>
+  </p:cSld>
+  <p:clrMapOvr>
+    <a:masterClrMapping/>
+  </p:clrMapOvr>
+</p:notes>
+</file>
+
+<file path=ppt/notesSlides/notesSlide30.xml><?xml version="1.0" encoding="utf-8"?>
 <p:notes xmlns:a="http://schemas.openxmlformats.org/drawingml/2006/main" xmlns:r="http://schemas.openxmlformats.org/officeDocument/2006/relationships" xmlns:p="http://schemas.openxmlformats.org/presentationml/2006/main">
   <p:cSld>
     <p:spTree>
@@ -13966,7 +15510,653 @@
 </p:notes>
 </file>
 
-<file path=ppt/notesSlides/notesSlide3.xml><?xml version="1.0" encoding="utf-8"?>
+<file path=ppt/notesSlides/notesSlide31.xml><?xml version="1.0" encoding="utf-8"?>
+<p:notes xmlns:a="http://schemas.openxmlformats.org/drawingml/2006/main" xmlns:r="http://schemas.openxmlformats.org/officeDocument/2006/relationships" xmlns:p="http://schemas.openxmlformats.org/presentationml/2006/main">
+  <p:cSld>
+    <p:spTree>
+      <p:nvGrpSpPr>
+        <p:cNvPr id="1" name="">
+          <a:extLst>
+            <a:ext uri="{FF2B5EF4-FFF2-40B4-BE49-F238E27FC236}">
+              <a16:creationId xmlns:a16="http://schemas.microsoft.com/office/drawing/2014/main" id="{7F6DF5CB-0A55-727B-1C1E-6849D6D4E3B7}"/>
+            </a:ext>
+          </a:extLst>
+        </p:cNvPr>
+        <p:cNvGrpSpPr/>
+        <p:nvPr/>
+      </p:nvGrpSpPr>
+      <p:grpSpPr>
+        <a:xfrm>
+          <a:off x="0" y="0"/>
+          <a:ext cx="0" cy="0"/>
+          <a:chOff x="0" y="0"/>
+          <a:chExt cx="0" cy="0"/>
+        </a:xfrm>
+      </p:grpSpPr>
+      <p:sp>
+        <p:nvSpPr>
+          <p:cNvPr id="2" name="Slide Image Placeholder 1">
+            <a:extLst>
+              <a:ext uri="{FF2B5EF4-FFF2-40B4-BE49-F238E27FC236}">
+                <a16:creationId xmlns:a16="http://schemas.microsoft.com/office/drawing/2014/main" id="{3F114F7C-A825-4F14-9292-716B03CAFCDB}"/>
+              </a:ext>
+            </a:extLst>
+          </p:cNvPr>
+          <p:cNvSpPr>
+            <a:spLocks noGrp="1" noRot="1" noChangeAspect="1"/>
+          </p:cNvSpPr>
+          <p:nvPr>
+            <p:ph type="sldImg"/>
+          </p:nvPr>
+        </p:nvSpPr>
+        <p:spPr/>
+        <p:txBody>
+          <a:bodyPr/>
+          <a:lstStyle/>
+          <a:p>
+            <a:endParaRPr lang="pt-BR"/>
+          </a:p>
+        </p:txBody>
+      </p:sp>
+      <mc:AlternateContent xmlns:mc="http://schemas.openxmlformats.org/markup-compatibility/2006" xmlns:a14="http://schemas.microsoft.com/office/drawing/2010/main">
+        <mc:Choice Requires="a14">
+          <p:sp>
+            <p:nvSpPr>
+              <p:cNvPr id="3" name="Notes Placeholder 2">
+                <a:extLst>
+                  <a:ext uri="{FF2B5EF4-FFF2-40B4-BE49-F238E27FC236}">
+                    <a16:creationId xmlns:a16="http://schemas.microsoft.com/office/drawing/2014/main" id="{43DE653D-CDFA-038A-DA00-01BACB01396F}"/>
+                  </a:ext>
+                </a:extLst>
+              </p:cNvPr>
+              <p:cNvSpPr>
+                <a:spLocks noGrp="1"/>
+              </p:cNvSpPr>
+              <p:nvPr>
+                <p:ph type="body" idx="1"/>
+              </p:nvPr>
+            </p:nvSpPr>
+            <p:spPr/>
+            <p:txBody>
+              <a:bodyPr/>
+              <a:lstStyle/>
+              <a:p>
+                <a:endParaRPr lang="pt-BR" dirty="0"/>
+              </a:p>
+            </p:txBody>
+          </p:sp>
+        </mc:Choice>
+        <mc:Fallback xmlns="">
+          <p:sp>
+            <p:nvSpPr>
+              <p:cNvPr id="3" name="Notes Placeholder 2">
+                <a:extLst>
+                  <a:ext uri="{FF2B5EF4-FFF2-40B4-BE49-F238E27FC236}">
+                    <a16:creationId xmlns:a16="http://schemas.microsoft.com/office/drawing/2014/main" id="{BC4A4DA6-AAD5-7B9F-C6CD-1BF515A984C5}"/>
+                  </a:ext>
+                </a:extLst>
+              </p:cNvPr>
+              <p:cNvSpPr>
+                <a:spLocks noGrp="1"/>
+              </p:cNvSpPr>
+              <p:nvPr>
+                <p:ph type="body" idx="1"/>
+              </p:nvPr>
+            </p:nvSpPr>
+            <p:spPr/>
+            <p:txBody>
+              <a:bodyPr/>
+              <a:lstStyle/>
+              <a:p>
+                <a:r>
+                  <a:rPr lang="pt-BR" dirty="0"/>
+                  <a:t>Este slide resume os quatro subproblemas usados na solução. A Seção III do </a:t>
+                </a:r>
+                <a:r>
+                  <a:rPr lang="pt-BR" dirty="0" err="1"/>
+                  <a:t>paper</a:t>
+                </a:r>
+                <a:r>
+                  <a:rPr lang="pt-BR" dirty="0"/>
+                  <a:t> é bem carregada de matemática, com vários lemas, reformulações e atualizações iterativas. Então, em vez de entrar em todas as equações, eu preferi traduzir a lógica prática do que cada bloco faz.</a:t>
+                </a:r>
+              </a:p>
+              <a:p>
+                <a:endParaRPr lang="pt-BR" dirty="0"/>
+              </a:p>
+              <a:p>
+                <a:r>
+                  <a:rPr lang="pt-BR" dirty="0"/>
+                  <a:t>No primeiro subproblema, da frequência do servidor, a solução é relativamente simples. Como o problema é convexo, os autores conseguem obter uma solução fechada usando as condições </a:t>
+                </a:r>
+                <a:r>
+                  <a:rPr lang="pt-BR" b="1" dirty="0"/>
+                  <a:t>KKT</a:t>
+                </a:r>
+                <a:r>
+                  <a:rPr lang="pt-BR" dirty="0"/>
+                  <a:t>, que No primeiro subproblema, da frequência do servidor, a solução é relativamente simples. Como o problema é convexo, os autores conseguem obter uma solução fechada usando as condições KKT. Em termos práticos, isso quer dizer que eles não precisam iterar muito nem testar várias divisões possíveis de recurso. Eles já têm uma expressão direta que calcula quanto de processamento cada usuário deve receber com base na carga computacional associada a ele. Um exemplo simples seria este: imagine que o servidor tem 100 unidades de processamento para distribuir entre 3 usuários. O método não divide isso igualmente. Ele calcula uma divisão mais inteligente, dando mais recurso para quem tem tarefa mais pesada. Por isso, esse bloco é barato e tem complexidade linear no número de usuários</a:t>
+                </a:r>
+              </a:p>
+              <a:p>
+                <a:endParaRPr lang="pt-BR" dirty="0"/>
+              </a:p>
+              <a:p>
+                <a:endParaRPr lang="pt-BR" dirty="0"/>
+              </a:p>
+              <a:p>
+                <a:r>
+                  <a:rPr lang="pt-BR" dirty="0"/>
+                  <a:t>No segundo subproblema, da quantização, a lógica é a seguinte. O problema original é discreto, porque os bits permitidos são só 4, 8, 16 ou 32. Resolver isso diretamente seria mais difícil. Então eles fazem primeiro uma </a:t>
+                </a:r>
+                <a:r>
+                  <a:rPr lang="pt-BR" b="1" dirty="0"/>
+                  <a:t>relaxação contínua</a:t>
+                </a:r>
+                <a:r>
+                  <a:rPr lang="pt-BR" dirty="0"/>
+                  <a:t>, isto é, fingem temporariamente que o número de bits pode assumir qualquer valor real positivo. Depois disso, analisam a função do subproblema e mostram que ela é estritamente convexa. Isso é importante porque significa que existe um único ponto ótimo contínuo. A partir daí, eles derivam a condição de ótimo desse problema relaxado e obtêm diretamente o valor contínuo ótimo de </a:t>
+                </a:r>
+                <a:r>
+                  <a:rPr lang="ar-AE" sz="1200" i="0" kern="1200">
+                    <a:solidFill>
+                      <a:schemeClr val="tx1"/>
+                    </a:solidFill>
+                    <a:latin typeface="+mn-lt"/>
+                    <a:ea typeface="+mn-ea"/>
+                    <a:cs typeface="+mn-cs"/>
+                  </a:rPr>
+                  <a:t>𝑞_𝑢</a:t>
+                </a:r>
+                <a:r>
+                  <a:rPr lang="pt-BR" dirty="0"/>
+                  <a:t>para cada usuário. Em seguida, como esse valor contínuo não é necessariamente permitido na prática, eles fazem uma </a:t>
+                </a:r>
+                <a:r>
+                  <a:rPr lang="pt-BR" b="1" dirty="0"/>
+                  <a:t>projeção para o conjunto discreto viável</a:t>
+                </a:r>
+                <a:r>
+                  <a:rPr lang="pt-BR" dirty="0"/>
+                  <a:t>, escolhendo o valor mais próximo entre 4, 8, 16 e 32. Um exemplo simples seria este: suponha que o valor ótimo contínuo calculado fosse 15.5 bits. Como esse valor não é permitido, eles projetam para o conjunto viável e escolhem o mais próximo: 16.</a:t>
+                </a:r>
+              </a:p>
+              <a:p>
+                <a:endParaRPr lang="pt-BR" dirty="0"/>
+              </a:p>
+              <a:p>
+                <a:r>
+                  <a:rPr lang="pt-BR" dirty="0"/>
+                  <a:t>No terceiro subproblema, do </a:t>
+                </a:r>
+                <a:r>
+                  <a:rPr lang="pt-BR" dirty="0" err="1"/>
+                  <a:t>beamforming</a:t>
+                </a:r>
+                <a:r>
+                  <a:rPr lang="pt-BR" dirty="0"/>
+                  <a:t>, a dificuldade aumenta bastante. Aqui eles usam RADMM, que é uma forma de resolver o problema separando a variável em partes auxiliares e atualizando essas partes de maneira alternada. Em termos simples, o algoritmo faz o seguinte: primeiro ele atualiza uma versão do </a:t>
+                </a:r>
+                <a:r>
+                  <a:rPr lang="pt-BR" dirty="0" err="1"/>
+                  <a:t>beamforming</a:t>
+                </a:r>
+                <a:r>
+                  <a:rPr lang="pt-BR" dirty="0"/>
+                  <a:t> tentando melhorar a taxa </a:t>
+                </a:r>
+                <a:r>
+                  <a:rPr lang="pt-BR" dirty="0" err="1"/>
+                  <a:t>uplink</a:t>
+                </a:r>
+                <a:r>
+                  <a:rPr lang="pt-BR" dirty="0"/>
+                  <a:t>. Depois ele corrige essa solução para que ela continue respeitando a restrição geométrica de norma unitária. Em seguida, ele atualiza um termo auxiliar que força consistência entre essas duas representações. Então, na prática, esse subproblema roda como um pequeno laço interno com três etapas repetidas: melhorar a solução, projetar ou ajustar para o conjunto válido, e corrigir o acoplamento entre as variáveis auxiliares. Um exemplo intuitivo seria: imagine que a BS tenta ajustar o filtro de recepção para separar melhor dois usuários, mas toda vez que faz isso precisa garantir que esse filtro continue dentro da estrutura geométrica exigida. Então o algoritmo alterna entre melhorar o desempenho e reimpor a validade da solução. É por isso que esse é um dos blocos mais caros do algoritmo.</a:t>
+                </a:r>
+              </a:p>
+              <a:p>
+                <a:endParaRPr lang="pt-BR" dirty="0"/>
+              </a:p>
+              <a:p>
+                <a:r>
+                  <a:rPr lang="pt-BR" dirty="0"/>
+                  <a:t>No quarto subproblema, das </a:t>
+                </a:r>
+                <a:r>
+                  <a:rPr lang="pt-BR" dirty="0" err="1"/>
+                  <a:t>fluid</a:t>
+                </a:r>
+                <a:r>
+                  <a:rPr lang="pt-BR" dirty="0"/>
+                  <a:t> </a:t>
+                </a:r>
+                <a:r>
+                  <a:rPr lang="pt-BR" dirty="0" err="1"/>
+                  <a:t>antennas</a:t>
+                </a:r>
+                <a:r>
+                  <a:rPr lang="pt-BR" dirty="0"/>
+                  <a:t>, eles também evitam uma solução conjunta completa. Em vez de tentar mover todas as antenas ao mesmo tempo, o algoritmo faz uma atualização </a:t>
+                </a:r>
+                <a:r>
+                  <a:rPr lang="pt-BR" b="1" dirty="0"/>
+                  <a:t>sequencial</a:t>
+                </a:r>
+                <a:r>
+                  <a:rPr lang="pt-BR" dirty="0"/>
+                  <a:t>. Ele escolhe uma antena, otimiza a posição dela mantendo as demais fixas, depois passa para a próxima, e assim por diante. Cada atualização leva em conta duas restrições físicas: a antena precisa permanecer dentro da área do painel e não pode ficar perto demais das outras. Então, em termos práticos, esse bloco funciona como uma varredura antena por antena. </a:t>
+                </a:r>
+              </a:p>
+              <a:p>
+                <a:endParaRPr lang="pt-BR" dirty="0"/>
+              </a:p>
+              <a:p>
+                <a:r>
+                  <a:rPr lang="pt-BR" dirty="0"/>
+                  <a:t>Então, resumindo a complexidade, P1 e P2 são leves, porque têm solução direta ou quase direta. Já P3 e P4 concentram o custo real do algoritmo, porque envolvem iterações internas e restrições geométricas mais difíceis. E, como tudo roda em sequência dentro do BCD, o resultado atualizado de um bloco influencia o comportamento do próximo.</a:t>
+                </a:r>
+              </a:p>
+              <a:p>
+                <a:endParaRPr lang="pt-BR" dirty="0"/>
+              </a:p>
+              <a:p>
+                <a:endParaRPr lang="pt-BR" dirty="0"/>
+              </a:p>
+              <a:p>
+                <a:r>
+                  <a:rPr lang="pt-BR" dirty="0"/>
+                  <a:t>Os autores só dão explicitamente a complexidade de </a:t>
+                </a:r>
+                <a:r>
+                  <a:rPr lang="pt-BR" b="1" dirty="0"/>
+                  <a:t>dois</a:t>
+                </a:r>
+                <a:r>
+                  <a:rPr lang="pt-BR" dirty="0"/>
+                  <a:t> subproblemas. Eles afirmam que a complexidade de </a:t>
+                </a:r>
+                <a:r>
+                  <a:rPr lang="pt-BR" sz="1200" i="0" kern="1200">
+                    <a:solidFill>
+                      <a:schemeClr val="tx1"/>
+                    </a:solidFill>
+                    <a:latin typeface="+mn-lt"/>
+                    <a:ea typeface="+mn-ea"/>
+                    <a:cs typeface="+mn-cs"/>
+                  </a:rPr>
+                  <a:t>𝑃1</a:t>
+                </a:r>
+                <a:r>
+                  <a:rPr lang="pt-BR" dirty="0"/>
+                  <a:t>e </a:t>
+                </a:r>
+                <a:r>
+                  <a:rPr lang="pt-BR" sz="1200" i="0" kern="1200">
+                    <a:solidFill>
+                      <a:schemeClr val="tx1"/>
+                    </a:solidFill>
+                    <a:latin typeface="+mn-lt"/>
+                    <a:ea typeface="+mn-ea"/>
+                    <a:cs typeface="+mn-cs"/>
+                  </a:rPr>
+                  <a:t>𝑃2</a:t>
+                </a:r>
+                <a:r>
+                  <a:rPr lang="pt-BR" dirty="0"/>
+                  <a:t>é </a:t>
+                </a:r>
+                <a:r>
+                  <a:rPr lang="pt-BR" sz="1200" i="0" kern="1200">
+                    <a:solidFill>
+                      <a:schemeClr val="tx1"/>
+                    </a:solidFill>
+                    <a:latin typeface="+mn-lt"/>
+                    <a:ea typeface="+mn-ea"/>
+                    <a:cs typeface="+mn-cs"/>
+                  </a:rPr>
+                  <a:t>𝑂</a:t>
+                </a:r>
+                <a:r>
+                  <a:rPr lang="ar-AE" sz="1200" i="0" kern="1200">
+                    <a:solidFill>
+                      <a:schemeClr val="tx1"/>
+                    </a:solidFill>
+                    <a:latin typeface="+mn-lt"/>
+                    <a:ea typeface="+mn-ea"/>
+                    <a:cs typeface="+mn-cs"/>
+                  </a:rPr>
+                  <a:t>(𝑈)</a:t>
+                </a:r>
+                <a:r>
+                  <a:rPr lang="ar-AE" dirty="0"/>
+                  <a:t>, </a:t>
+                </a:r>
+                <a:r>
+                  <a:rPr lang="pt-BR" dirty="0"/>
+                  <a:t>isto é, linear no número de usuários. Depois disso, eles </a:t>
+                </a:r>
+                <a:r>
+                  <a:rPr lang="pt-BR" b="1" dirty="0"/>
+                  <a:t>não expandem</a:t>
+                </a:r>
+                <a:r>
+                  <a:rPr lang="pt-BR" dirty="0"/>
+                  <a:t> a complexidade de </a:t>
+                </a:r>
+                <a:r>
+                  <a:rPr lang="pt-BR" sz="1200" i="0" kern="1200">
+                    <a:solidFill>
+                      <a:schemeClr val="tx1"/>
+                    </a:solidFill>
+                    <a:latin typeface="+mn-lt"/>
+                    <a:ea typeface="+mn-ea"/>
+                    <a:cs typeface="+mn-cs"/>
+                  </a:rPr>
+                  <a:t>𝑃3</a:t>
+                </a:r>
+                <a:r>
+                  <a:rPr lang="pt-BR" dirty="0"/>
+                  <a:t>e </a:t>
+                </a:r>
+                <a:r>
+                  <a:rPr lang="pt-BR" sz="1200" i="0" kern="1200">
+                    <a:solidFill>
+                      <a:schemeClr val="tx1"/>
+                    </a:solidFill>
+                    <a:latin typeface="+mn-lt"/>
+                    <a:ea typeface="+mn-ea"/>
+                    <a:cs typeface="+mn-cs"/>
+                  </a:rPr>
+                  <a:t>𝑃4</a:t>
+                </a:r>
+                <a:r>
+                  <a:rPr lang="pt-BR" dirty="0"/>
+                  <a:t>dentro deste </a:t>
+                </a:r>
+                <a:r>
+                  <a:rPr lang="pt-BR" dirty="0" err="1"/>
+                  <a:t>paper</a:t>
+                </a:r>
+                <a:r>
+                  <a:rPr lang="pt-BR" dirty="0"/>
+                  <a:t>. Em vez disso, dizem que as complexidades de </a:t>
+                </a:r>
+                <a:r>
+                  <a:rPr lang="pt-BR" sz="1200" i="0" kern="1200">
+                    <a:solidFill>
+                      <a:schemeClr val="tx1"/>
+                    </a:solidFill>
+                    <a:latin typeface="+mn-lt"/>
+                    <a:ea typeface="+mn-ea"/>
+                    <a:cs typeface="+mn-cs"/>
+                  </a:rPr>
+                  <a:t>𝑃3</a:t>
+                </a:r>
+                <a:r>
+                  <a:rPr lang="pt-BR" dirty="0"/>
+                  <a:t>e </a:t>
+                </a:r>
+                <a:r>
+                  <a:rPr lang="pt-BR" sz="1200" i="0" kern="1200">
+                    <a:solidFill>
+                      <a:schemeClr val="tx1"/>
+                    </a:solidFill>
+                    <a:latin typeface="+mn-lt"/>
+                    <a:ea typeface="+mn-ea"/>
+                    <a:cs typeface="+mn-cs"/>
+                  </a:rPr>
+                  <a:t>𝑃4</a:t>
+                </a:r>
+                <a:r>
+                  <a:rPr lang="pt-BR" dirty="0"/>
+                  <a:t>são dadas nas referências </a:t>
+                </a:r>
+                <a:r>
+                  <a:rPr lang="pt-BR" b="1" dirty="0"/>
+                  <a:t>[7]</a:t>
+                </a:r>
+                <a:r>
+                  <a:rPr lang="pt-BR" dirty="0"/>
+                  <a:t> e </a:t>
+                </a:r>
+                <a:r>
+                  <a:rPr lang="pt-BR" b="1" dirty="0"/>
+                  <a:t>[4]</a:t>
+                </a:r>
+                <a:r>
+                  <a:rPr lang="pt-BR" dirty="0"/>
+                  <a:t>, respectivamente.</a:t>
+                </a:r>
+              </a:p>
+            </p:txBody>
+          </p:sp>
+        </mc:Fallback>
+      </mc:AlternateContent>
+      <p:sp>
+        <p:nvSpPr>
+          <p:cNvPr id="4" name="Slide Number Placeholder 3">
+            <a:extLst>
+              <a:ext uri="{FF2B5EF4-FFF2-40B4-BE49-F238E27FC236}">
+                <a16:creationId xmlns:a16="http://schemas.microsoft.com/office/drawing/2014/main" id="{CA5E9F0B-247F-AA59-1ED7-ACBB09A946E2}"/>
+              </a:ext>
+            </a:extLst>
+          </p:cNvPr>
+          <p:cNvSpPr>
+            <a:spLocks noGrp="1"/>
+          </p:cNvSpPr>
+          <p:nvPr>
+            <p:ph type="sldNum" sz="quarter" idx="5"/>
+          </p:nvPr>
+        </p:nvSpPr>
+        <p:spPr/>
+        <p:txBody>
+          <a:bodyPr/>
+          <a:lstStyle/>
+          <a:p>
+            <a:fld id="{6FC8D850-966F-45A6-8DE7-15B891E7D40D}" type="slidenum">
+              <a:rPr lang="pt-BR" smtClean="0"/>
+              <a:t>31</a:t>
+            </a:fld>
+            <a:endParaRPr lang="pt-BR"/>
+          </a:p>
+        </p:txBody>
+      </p:sp>
+    </p:spTree>
+    <p:extLst>
+      <p:ext uri="{BB962C8B-B14F-4D97-AF65-F5344CB8AC3E}">
+        <p14:creationId xmlns:p14="http://schemas.microsoft.com/office/powerpoint/2010/main" val="731585953"/>
+      </p:ext>
+    </p:extLst>
+  </p:cSld>
+  <p:clrMapOvr>
+    <a:masterClrMapping/>
+  </p:clrMapOvr>
+</p:notes>
+</file>
+
+<file path=ppt/notesSlides/notesSlide32.xml><?xml version="1.0" encoding="utf-8"?>
+<p:notes xmlns:a="http://schemas.openxmlformats.org/drawingml/2006/main" xmlns:r="http://schemas.openxmlformats.org/officeDocument/2006/relationships" xmlns:p="http://schemas.openxmlformats.org/presentationml/2006/main">
+  <p:cSld>
+    <p:spTree>
+      <p:nvGrpSpPr>
+        <p:cNvPr id="1" name=""/>
+        <p:cNvGrpSpPr/>
+        <p:nvPr/>
+      </p:nvGrpSpPr>
+      <p:grpSpPr>
+        <a:xfrm>
+          <a:off x="0" y="0"/>
+          <a:ext cx="0" cy="0"/>
+          <a:chOff x="0" y="0"/>
+          <a:chExt cx="0" cy="0"/>
+        </a:xfrm>
+      </p:grpSpPr>
+      <p:sp>
+        <p:nvSpPr>
+          <p:cNvPr id="2" name="Slide Image Placeholder 1"/>
+          <p:cNvSpPr>
+            <a:spLocks noGrp="1" noRot="1" noChangeAspect="1"/>
+          </p:cNvSpPr>
+          <p:nvPr>
+            <p:ph type="sldImg"/>
+          </p:nvPr>
+        </p:nvSpPr>
+        <p:spPr/>
+        <p:txBody>
+          <a:bodyPr/>
+          <a:lstStyle/>
+          <a:p>
+            <a:endParaRPr lang="pt-BR"/>
+          </a:p>
+        </p:txBody>
+      </p:sp>
+      <p:sp>
+        <p:nvSpPr>
+          <p:cNvPr id="3" name="Notes Placeholder 2"/>
+          <p:cNvSpPr>
+            <a:spLocks noGrp="1"/>
+          </p:cNvSpPr>
+          <p:nvPr>
+            <p:ph type="body" idx="1"/>
+          </p:nvPr>
+        </p:nvSpPr>
+        <p:spPr/>
+        <p:txBody>
+          <a:bodyPr/>
+          <a:lstStyle/>
+          <a:p>
+            <a:endParaRPr lang="pt-BR"/>
+          </a:p>
+        </p:txBody>
+      </p:sp>
+      <p:sp>
+        <p:nvSpPr>
+          <p:cNvPr id="4" name="Slide Number Placeholder 3"/>
+          <p:cNvSpPr>
+            <a:spLocks noGrp="1"/>
+          </p:cNvSpPr>
+          <p:nvPr>
+            <p:ph type="sldNum" sz="quarter" idx="5"/>
+          </p:nvPr>
+        </p:nvSpPr>
+        <p:spPr/>
+        <p:txBody>
+          <a:bodyPr/>
+          <a:lstStyle/>
+          <a:p>
+            <a:fld id="{6FC8D850-966F-45A6-8DE7-15B891E7D40D}" type="slidenum">
+              <a:rPr lang="pt-BR" smtClean="0"/>
+              <a:t>33</a:t>
+            </a:fld>
+            <a:endParaRPr lang="pt-BR"/>
+          </a:p>
+        </p:txBody>
+      </p:sp>
+    </p:spTree>
+    <p:extLst>
+      <p:ext uri="{BB962C8B-B14F-4D97-AF65-F5344CB8AC3E}">
+        <p14:creationId xmlns:p14="http://schemas.microsoft.com/office/powerpoint/2010/main" val="1341938206"/>
+      </p:ext>
+    </p:extLst>
+  </p:cSld>
+  <p:clrMapOvr>
+    <a:masterClrMapping/>
+  </p:clrMapOvr>
+</p:notes>
+</file>
+
+<file path=ppt/notesSlides/notesSlide33.xml><?xml version="1.0" encoding="utf-8"?>
+<p:notes xmlns:a="http://schemas.openxmlformats.org/drawingml/2006/main" xmlns:r="http://schemas.openxmlformats.org/officeDocument/2006/relationships" xmlns:p="http://schemas.openxmlformats.org/presentationml/2006/main">
+  <p:cSld>
+    <p:spTree>
+      <p:nvGrpSpPr>
+        <p:cNvPr id="1" name=""/>
+        <p:cNvGrpSpPr/>
+        <p:nvPr/>
+      </p:nvGrpSpPr>
+      <p:grpSpPr>
+        <a:xfrm>
+          <a:off x="0" y="0"/>
+          <a:ext cx="0" cy="0"/>
+          <a:chOff x="0" y="0"/>
+          <a:chExt cx="0" cy="0"/>
+        </a:xfrm>
+      </p:grpSpPr>
+      <p:sp>
+        <p:nvSpPr>
+          <p:cNvPr id="2" name="Slide Image Placeholder 1"/>
+          <p:cNvSpPr>
+            <a:spLocks noGrp="1" noRot="1" noChangeAspect="1"/>
+          </p:cNvSpPr>
+          <p:nvPr>
+            <p:ph type="sldImg"/>
+          </p:nvPr>
+        </p:nvSpPr>
+        <p:spPr/>
+        <p:txBody>
+          <a:bodyPr/>
+          <a:lstStyle/>
+          <a:p>
+            <a:endParaRPr lang="pt-BR"/>
+          </a:p>
+        </p:txBody>
+      </p:sp>
+      <p:sp>
+        <p:nvSpPr>
+          <p:cNvPr id="3" name="Notes Placeholder 2"/>
+          <p:cNvSpPr>
+            <a:spLocks noGrp="1"/>
+          </p:cNvSpPr>
+          <p:nvPr>
+            <p:ph type="body" idx="1"/>
+          </p:nvPr>
+        </p:nvSpPr>
+        <p:spPr/>
+        <p:txBody>
+          <a:bodyPr/>
+          <a:lstStyle/>
+          <a:p>
+            <a:endParaRPr lang="pt-BR" dirty="0"/>
+          </a:p>
+        </p:txBody>
+      </p:sp>
+      <p:sp>
+        <p:nvSpPr>
+          <p:cNvPr id="4" name="Slide Number Placeholder 3"/>
+          <p:cNvSpPr>
+            <a:spLocks noGrp="1"/>
+          </p:cNvSpPr>
+          <p:nvPr>
+            <p:ph type="sldNum" sz="quarter" idx="5"/>
+          </p:nvPr>
+        </p:nvSpPr>
+        <p:spPr/>
+        <p:txBody>
+          <a:bodyPr/>
+          <a:lstStyle/>
+          <a:p>
+            <a:fld id="{6FC8D850-966F-45A6-8DE7-15B891E7D40D}" type="slidenum">
+              <a:rPr lang="pt-BR" smtClean="0"/>
+              <a:t>36</a:t>
+            </a:fld>
+            <a:endParaRPr lang="pt-BR"/>
+          </a:p>
+        </p:txBody>
+      </p:sp>
+    </p:spTree>
+    <p:extLst>
+      <p:ext uri="{BB962C8B-B14F-4D97-AF65-F5344CB8AC3E}">
+        <p14:creationId xmlns:p14="http://schemas.microsoft.com/office/powerpoint/2010/main" val="1115625713"/>
+      </p:ext>
+    </p:extLst>
+  </p:cSld>
+  <p:clrMapOvr>
+    <a:masterClrMapping/>
+  </p:clrMapOvr>
+</p:notes>
+</file>
+
+<file path=ppt/notesSlides/notesSlide4.xml><?xml version="1.0" encoding="utf-8"?>
 <p:notes xmlns:a="http://schemas.openxmlformats.org/drawingml/2006/main" xmlns:r="http://schemas.openxmlformats.org/officeDocument/2006/relationships" xmlns:p="http://schemas.openxmlformats.org/presentationml/2006/main">
   <p:cSld>
     <p:spTree>
@@ -14028,107 +16218,1041 @@
           <a:bodyPr/>
           <a:lstStyle/>
           <a:p>
-            <a:pPr marL="171450" indent="-171450">
-              <a:buFont typeface="Arial" panose="020B0604020202020204" pitchFamily="34" charset="0"/>
-              <a:buChar char="•"/>
-            </a:pPr>
             <a:r>
               <a:rPr lang="pt-BR" dirty="0"/>
-              <a:t>O </a:t>
-            </a:r>
+              <a:t>Claro. A ideia central do DARTS é esta:</a:t>
+            </a:r>
+          </a:p>
+          <a:p>
+            <a:r>
+              <a:rPr lang="pt-BR" b="1" dirty="0"/>
+              <a:t>em vez de escolher uma operação de forma discreta durante a busca</a:t>
+            </a:r>
+            <a:r>
+              <a:rPr lang="pt-BR" dirty="0"/>
+              <a:t>, ele </a:t>
+            </a:r>
+            <a:r>
+              <a:rPr lang="pt-BR" b="1" dirty="0"/>
+              <a:t>coloca todas as operações candidatas ao mesmo tempo</a:t>
+            </a:r>
+            <a:r>
+              <a:rPr lang="pt-BR" dirty="0"/>
+              <a:t> e aprende </a:t>
+            </a:r>
+            <a:r>
+              <a:rPr lang="pt-BR" b="1" dirty="0"/>
+              <a:t>pesos contínuos</a:t>
+            </a:r>
+            <a:r>
+              <a:rPr lang="pt-BR" dirty="0"/>
+              <a:t> para elas.</a:t>
+            </a:r>
+            <a:br>
+              <a:rPr lang="pt-BR" dirty="0"/>
+            </a:br>
+            <a:r>
+              <a:rPr lang="pt-BR" dirty="0"/>
+              <a:t>Isso é o que torna o problema </a:t>
+            </a:r>
+            <a:r>
+              <a:rPr lang="pt-BR" dirty="0" err="1"/>
+              <a:t>diferenciável</a:t>
+            </a:r>
+            <a:r>
+              <a:rPr lang="pt-BR" dirty="0"/>
+              <a:t>.</a:t>
+            </a:r>
+          </a:p>
+          <a:p>
+            <a:r>
+              <a:rPr lang="pt-BR" b="1" dirty="0"/>
+              <a:t>1. O problema original de NAS</a:t>
+            </a:r>
+          </a:p>
+          <a:p>
+            <a:r>
+              <a:rPr lang="pt-BR" dirty="0"/>
+              <a:t>Em NAS tradicional, para cada conexão da rede, você precisa escolher algo como:</a:t>
+            </a:r>
+          </a:p>
+          <a:p>
+            <a:r>
+              <a:rPr lang="pt-BR" dirty="0"/>
+              <a:t>convolução 3x3</a:t>
+            </a:r>
+          </a:p>
+          <a:p>
+            <a:r>
+              <a:rPr lang="pt-BR" dirty="0"/>
+              <a:t>convolução 5x5</a:t>
+            </a:r>
+          </a:p>
+          <a:p>
+            <a:r>
+              <a:rPr lang="pt-BR" dirty="0" err="1"/>
+              <a:t>max</a:t>
+            </a:r>
+            <a:r>
+              <a:rPr lang="pt-BR" dirty="0"/>
+              <a:t> </a:t>
+            </a:r>
+            <a:r>
+              <a:rPr lang="pt-BR" dirty="0" err="1"/>
+              <a:t>pooling</a:t>
+            </a:r>
+            <a:endParaRPr lang="pt-BR" dirty="0"/>
+          </a:p>
+          <a:p>
+            <a:r>
+              <a:rPr lang="pt-BR" dirty="0" err="1"/>
+              <a:t>skip</a:t>
+            </a:r>
+            <a:r>
+              <a:rPr lang="pt-BR" dirty="0"/>
+              <a:t> connection</a:t>
+            </a:r>
+          </a:p>
+          <a:p>
+            <a:r>
+              <a:rPr lang="pt-BR" dirty="0"/>
+              <a:t>zero</a:t>
+            </a:r>
+          </a:p>
+          <a:p>
+            <a:r>
+              <a:rPr lang="pt-BR" dirty="0"/>
+              <a:t>Isso é um problema </a:t>
+            </a:r>
+            <a:r>
+              <a:rPr lang="pt-BR" b="1" dirty="0"/>
+              <a:t>discreto</a:t>
+            </a:r>
+            <a:r>
+              <a:rPr lang="pt-BR" dirty="0"/>
+              <a:t>.</a:t>
+            </a:r>
+            <a:br>
+              <a:rPr lang="pt-BR" dirty="0"/>
+            </a:br>
+            <a:r>
+              <a:rPr lang="pt-BR" dirty="0"/>
+              <a:t>Ou você escolhe uma operação, ou outra. Não há gradiente direto sobre essa escolha.</a:t>
+            </a:r>
+          </a:p>
+          <a:p>
+            <a:r>
+              <a:rPr lang="pt-BR" dirty="0"/>
+              <a:t>Esse é o problema, porque métodos baseados em gradiente funcionam bem em espaços contínuos, não em escolhas discretas.</a:t>
+            </a:r>
+          </a:p>
+          <a:p>
+            <a:br>
+              <a:rPr lang="pt-BR" dirty="0"/>
+            </a:br>
+            <a:endParaRPr lang="pt-BR" dirty="0"/>
+          </a:p>
+          <a:p>
+            <a:r>
+              <a:rPr lang="pt-BR" b="1" dirty="0"/>
+              <a:t>2. O truque do DARTS</a:t>
+            </a:r>
+          </a:p>
+          <a:p>
+            <a:r>
+              <a:rPr lang="pt-BR" dirty="0"/>
+              <a:t>O DARTS substitui a escolha discreta por uma </a:t>
+            </a:r>
+            <a:r>
+              <a:rPr lang="pt-BR" b="1" dirty="0"/>
+              <a:t>mistura contínua</a:t>
+            </a:r>
+            <a:r>
+              <a:rPr lang="pt-BR" dirty="0"/>
+              <a:t>.</a:t>
+            </a:r>
+          </a:p>
+          <a:p>
+            <a:r>
+              <a:rPr lang="pt-BR" dirty="0"/>
+              <a:t>Para uma aresta entre dois nós, em vez de dizer:</a:t>
+            </a:r>
+          </a:p>
+          <a:p>
+            <a:r>
+              <a:rPr lang="pt-BR" dirty="0"/>
+              <a:t>"aqui vai </a:t>
+            </a:r>
+            <a:r>
+              <a:rPr lang="pt-BR" dirty="0" err="1"/>
+              <a:t>conv</a:t>
+            </a:r>
+            <a:r>
+              <a:rPr lang="pt-BR" dirty="0"/>
+              <a:t> 3x3"</a:t>
+            </a:r>
+          </a:p>
+          <a:p>
+            <a:r>
+              <a:rPr lang="pt-BR" dirty="0"/>
+              <a:t>ele diz:</a:t>
+            </a:r>
+          </a:p>
+          <a:p>
+            <a:r>
+              <a:rPr lang="pt-BR" dirty="0"/>
+              <a:t>"aqui existe uma combinação ponderada de todas as operações candidatas"</a:t>
+            </a:r>
+          </a:p>
+          <a:p>
+            <a:r>
+              <a:rPr lang="pt-BR" dirty="0"/>
+              <a:t>Formalmente, se o conjunto de operações candidatas é ( \</a:t>
+            </a:r>
+            <a:r>
+              <a:rPr lang="pt-BR" dirty="0" err="1"/>
+              <a:t>mathcal</a:t>
+            </a:r>
+            <a:r>
+              <a:rPr lang="pt-BR" dirty="0"/>
+              <a:t>{O} ), o DARTS define a saída da aresta como algo do tipo:</a:t>
+            </a:r>
+          </a:p>
+          <a:p>
+            <a:r>
+              <a:rPr lang="pt-BR" dirty="0"/>
+              <a:t>[</a:t>
+            </a:r>
+            <a:br>
+              <a:rPr lang="pt-BR" dirty="0"/>
+            </a:br>
+            <a:r>
+              <a:rPr lang="pt-BR" dirty="0"/>
+              <a:t>\bar{o}(x) = \sum_{o \in \</a:t>
+            </a:r>
+            <a:r>
+              <a:rPr lang="pt-BR" dirty="0" err="1"/>
+              <a:t>mathcal</a:t>
+            </a:r>
+            <a:r>
+              <a:rPr lang="pt-BR" dirty="0"/>
+              <a:t>{O}} \</a:t>
+            </a:r>
+            <a:r>
+              <a:rPr lang="pt-BR" dirty="0" err="1"/>
+              <a:t>frac</a:t>
+            </a:r>
+            <a:r>
+              <a:rPr lang="pt-BR" dirty="0"/>
+              <a:t>{\</a:t>
+            </a:r>
+            <a:r>
+              <a:rPr lang="pt-BR" dirty="0" err="1"/>
+              <a:t>exp</a:t>
+            </a:r>
+            <a:r>
+              <a:rPr lang="pt-BR" dirty="0"/>
+              <a:t>(\</a:t>
+            </a:r>
+            <a:r>
+              <a:rPr lang="pt-BR" dirty="0" err="1"/>
+              <a:t>alpha_o</a:t>
+            </a:r>
+            <a:r>
+              <a:rPr lang="pt-BR" dirty="0"/>
+              <a:t>)}{\sum_{o' \in \</a:t>
+            </a:r>
+            <a:r>
+              <a:rPr lang="pt-BR" dirty="0" err="1"/>
+              <a:t>mathcal</a:t>
+            </a:r>
+            <a:r>
+              <a:rPr lang="pt-BR" dirty="0"/>
+              <a:t>{O}} \</a:t>
+            </a:r>
+            <a:r>
+              <a:rPr lang="pt-BR" dirty="0" err="1"/>
+              <a:t>exp</a:t>
+            </a:r>
+            <a:r>
+              <a:rPr lang="pt-BR" dirty="0"/>
+              <a:t>(\alpha_{o'})} , o(x)</a:t>
+            </a:r>
+            <a:br>
+              <a:rPr lang="pt-BR" dirty="0"/>
+            </a:br>
+            <a:r>
+              <a:rPr lang="pt-BR" dirty="0"/>
+              <a:t>]</a:t>
+            </a:r>
+          </a:p>
+          <a:p>
+            <a:r>
+              <a:rPr lang="pt-BR" b="1" dirty="0"/>
+              <a:t>O que isso significa na prática</a:t>
+            </a:r>
+          </a:p>
+          <a:p>
+            <a:r>
+              <a:rPr lang="pt-BR" dirty="0"/>
+              <a:t>cada operação candidata é aplicada à entrada (x)</a:t>
+            </a:r>
+          </a:p>
+          <a:p>
+            <a:r>
+              <a:rPr lang="pt-BR" dirty="0"/>
+              <a:t>cada uma recebe um peso</a:t>
+            </a:r>
+          </a:p>
+          <a:p>
+            <a:r>
+              <a:rPr lang="pt-BR" dirty="0"/>
+              <a:t>os pesos vêm de parâmetros aprendíveis ( \alpha )</a:t>
+            </a:r>
+          </a:p>
+          <a:p>
+            <a:r>
+              <a:rPr lang="pt-BR" dirty="0"/>
+              <a:t>esses pesos passam por </a:t>
+            </a:r>
+            <a:r>
+              <a:rPr lang="pt-BR" b="1" dirty="0" err="1"/>
+              <a:t>softmax</a:t>
+            </a:r>
+            <a:r>
+              <a:rPr lang="pt-BR" dirty="0"/>
+              <a:t>, então viram probabilidades relativas</a:t>
+            </a:r>
+          </a:p>
+          <a:p>
+            <a:r>
+              <a:rPr lang="pt-BR" dirty="0"/>
+              <a:t>Então, a saída da aresta vira uma </a:t>
+            </a:r>
+            <a:r>
+              <a:rPr lang="pt-BR" b="1" dirty="0"/>
+              <a:t>média ponderada</a:t>
+            </a:r>
+            <a:r>
+              <a:rPr lang="pt-BR" dirty="0"/>
+              <a:t> das operações.</a:t>
+            </a:r>
+          </a:p>
+          <a:p>
+            <a:br>
+              <a:rPr lang="pt-BR" dirty="0"/>
+            </a:br>
+            <a:endParaRPr lang="pt-BR" dirty="0"/>
+          </a:p>
+          <a:p>
+            <a:r>
+              <a:rPr lang="pt-BR" b="1" dirty="0"/>
+              <a:t>3. Por que isso torna o problema </a:t>
+            </a:r>
+            <a:r>
+              <a:rPr lang="pt-BR" b="1" dirty="0" err="1"/>
+              <a:t>diferenciável</a:t>
+            </a:r>
+            <a:r>
+              <a:rPr lang="pt-BR" b="1" dirty="0"/>
+              <a:t>?</a:t>
+            </a:r>
+          </a:p>
+          <a:p>
+            <a:r>
+              <a:rPr lang="pt-BR" dirty="0"/>
+              <a:t>Porque agora a arquitetura não depende mais de uma decisão "sim ou não" entre operações.</a:t>
+            </a:r>
+          </a:p>
+          <a:p>
+            <a:r>
+              <a:rPr lang="pt-BR" dirty="0"/>
+              <a:t>Ela depende de parâmetros reais e contínuos, os ( \alpha ).</a:t>
+            </a:r>
+            <a:br>
+              <a:rPr lang="pt-BR" dirty="0"/>
+            </a:br>
+            <a:r>
+              <a:rPr lang="pt-BR" dirty="0"/>
+              <a:t>Como a saída da rede passa a depender continuamente desses ( \alpha ), é possível calcular:</a:t>
+            </a:r>
+          </a:p>
+          <a:p>
+            <a:r>
+              <a:rPr lang="pt-BR" dirty="0"/>
+              <a:t>gradiente da </a:t>
+            </a:r>
+            <a:r>
+              <a:rPr lang="pt-BR" dirty="0" err="1"/>
+              <a:t>loss</a:t>
+            </a:r>
+            <a:r>
+              <a:rPr lang="pt-BR" dirty="0"/>
+              <a:t> em relação aos pesos normais da rede</a:t>
+            </a:r>
+          </a:p>
+          <a:p>
+            <a:r>
+              <a:rPr lang="pt-BR" dirty="0"/>
+              <a:t>gradiente da </a:t>
+            </a:r>
+            <a:r>
+              <a:rPr lang="pt-BR" dirty="0" err="1"/>
+              <a:t>loss</a:t>
+            </a:r>
+            <a:r>
+              <a:rPr lang="pt-BR" dirty="0"/>
+              <a:t> em relação aos parâmetros da arquitetura ( \alpha )</a:t>
+            </a:r>
+          </a:p>
+          <a:p>
+            <a:r>
+              <a:rPr lang="pt-BR" dirty="0"/>
+              <a:t>Ou seja, a arquitetura passa a poder ser otimizada com </a:t>
+            </a:r>
+            <a:r>
+              <a:rPr lang="pt-BR" b="1" dirty="0" err="1"/>
+              <a:t>backpropagation</a:t>
+            </a:r>
+            <a:r>
+              <a:rPr lang="pt-BR" dirty="0"/>
+              <a:t>.</a:t>
+            </a:r>
+          </a:p>
+          <a:p>
+            <a:r>
+              <a:rPr lang="pt-BR" dirty="0"/>
+              <a:t>Esse é o ponto principal do DARTS.</a:t>
+            </a:r>
+          </a:p>
+          <a:p>
+            <a:br>
+              <a:rPr lang="pt-BR" dirty="0"/>
+            </a:br>
+            <a:endParaRPr lang="pt-BR" dirty="0"/>
+          </a:p>
+          <a:p>
+            <a:r>
+              <a:rPr lang="pt-BR" b="1" dirty="0"/>
+              <a:t>4. O que é o </a:t>
+            </a:r>
+            <a:r>
+              <a:rPr lang="pt-BR" b="1" dirty="0" err="1"/>
+              <a:t>supernet</a:t>
+            </a:r>
+            <a:endParaRPr lang="pt-BR" b="1" dirty="0"/>
+          </a:p>
+          <a:p>
+            <a:r>
+              <a:rPr lang="pt-BR" dirty="0"/>
+              <a:t>Como todas as operações candidatas coexistem temporariamente, o DARTS cria uma rede maior, chamada de </a:t>
+            </a:r>
+            <a:r>
+              <a:rPr lang="pt-BR" b="1" dirty="0" err="1"/>
+              <a:t>supernet</a:t>
+            </a:r>
+            <a:r>
+              <a:rPr lang="pt-BR" dirty="0"/>
+              <a:t>.</a:t>
+            </a:r>
+          </a:p>
+          <a:p>
+            <a:r>
+              <a:rPr lang="pt-BR" dirty="0"/>
+              <a:t>Nessa </a:t>
+            </a:r>
+            <a:r>
+              <a:rPr lang="pt-BR" dirty="0" err="1"/>
+              <a:t>supernet</a:t>
+            </a:r>
+            <a:r>
+              <a:rPr lang="pt-BR" dirty="0"/>
+              <a:t>:</a:t>
+            </a:r>
+          </a:p>
+          <a:p>
+            <a:r>
+              <a:rPr lang="pt-BR" dirty="0"/>
+              <a:t>cada aresta contém várias operações candidatas</a:t>
+            </a:r>
+          </a:p>
+          <a:p>
+            <a:r>
+              <a:rPr lang="pt-BR" dirty="0"/>
+              <a:t>os ( \alpha ) dizem quais parecem mais importantes</a:t>
+            </a:r>
+          </a:p>
+          <a:p>
+            <a:r>
+              <a:rPr lang="pt-BR" dirty="0"/>
+              <a:t>durante o treinamento, o modelo aprende ao mesmo tempo:</a:t>
+            </a:r>
+          </a:p>
+          <a:p>
+            <a:pPr lvl="1"/>
+            <a:r>
+              <a:rPr lang="pt-BR" dirty="0"/>
+              <a:t>os </a:t>
+            </a:r>
+            <a:r>
+              <a:rPr lang="pt-BR" b="1" dirty="0"/>
+              <a:t>pesos da rede</a:t>
+            </a:r>
+            <a:r>
+              <a:rPr lang="pt-BR" dirty="0"/>
+              <a:t>, geralmente chamados de (w)</a:t>
+            </a:r>
+          </a:p>
+          <a:p>
+            <a:pPr lvl="1"/>
+            <a:r>
+              <a:rPr lang="pt-BR" dirty="0"/>
+              <a:t>os </a:t>
+            </a:r>
+            <a:r>
+              <a:rPr lang="pt-BR" b="1" dirty="0"/>
+              <a:t>parâmetros da arquitetura</a:t>
+            </a:r>
+            <a:r>
+              <a:rPr lang="pt-BR" dirty="0"/>
+              <a:t>, geralmente chamados de ( \alpha )</a:t>
+            </a:r>
+          </a:p>
+          <a:p>
+            <a:br>
+              <a:rPr lang="pt-BR" dirty="0"/>
+            </a:br>
+            <a:endParaRPr lang="pt-BR" dirty="0"/>
+          </a:p>
+          <a:p>
+            <a:r>
+              <a:rPr lang="pt-BR" b="1" dirty="0"/>
+              <a:t>5. Como o treinamento acontece</a:t>
+            </a:r>
+          </a:p>
+          <a:p>
+            <a:r>
+              <a:rPr lang="pt-BR" dirty="0"/>
+              <a:t>O DARTS usa uma ideia de </a:t>
+            </a:r>
+            <a:r>
+              <a:rPr lang="pt-BR" b="1" dirty="0"/>
+              <a:t>otimização </a:t>
+            </a:r>
+            <a:r>
+              <a:rPr lang="pt-BR" b="1" dirty="0" err="1"/>
+              <a:t>bi-level</a:t>
+            </a:r>
+            <a:r>
+              <a:rPr lang="pt-BR" dirty="0"/>
+              <a:t>.</a:t>
+            </a:r>
+          </a:p>
+          <a:p>
+            <a:r>
+              <a:rPr lang="pt-BR" b="1" dirty="0"/>
+              <a:t>Nível 1, pesos da rede</a:t>
+            </a:r>
+          </a:p>
+          <a:p>
+            <a:r>
+              <a:rPr lang="pt-BR" dirty="0"/>
+              <a:t>Ajusta (w), os pesos normais da rede, para a rede funcionar bem.</a:t>
+            </a:r>
+          </a:p>
+          <a:p>
+            <a:r>
+              <a:rPr lang="pt-BR" b="1" dirty="0"/>
+              <a:t>Nível 2, arquitetura</a:t>
+            </a:r>
+          </a:p>
+          <a:p>
+            <a:r>
+              <a:rPr lang="pt-BR" dirty="0"/>
+              <a:t>Ajusta ( \alpha ), os pesos que controlam quais operações são preferidas.</a:t>
+            </a:r>
+          </a:p>
+          <a:p>
+            <a:r>
+              <a:rPr lang="pt-BR" dirty="0"/>
+              <a:t>Intuição:</a:t>
+            </a:r>
+          </a:p>
+          <a:p>
+            <a:r>
+              <a:rPr lang="pt-BR" dirty="0"/>
+              <a:t>os pesos (w) aprendem "como usar" a arquitetura atual</a:t>
+            </a:r>
+          </a:p>
+          <a:p>
+            <a:r>
+              <a:rPr lang="pt-BR" dirty="0"/>
+              <a:t>os ( \alpha ) aprendem "qual arquitetura parece melhor"</a:t>
+            </a:r>
+          </a:p>
+          <a:p>
+            <a:r>
+              <a:rPr lang="pt-BR" dirty="0"/>
+              <a:t>Na prática, o algoritmo alterna entre atualizar (w) e atualizar ( \alpha ).</a:t>
+            </a:r>
+          </a:p>
+          <a:p>
+            <a:br>
+              <a:rPr lang="pt-BR" dirty="0"/>
+            </a:br>
+            <a:endParaRPr lang="pt-BR" dirty="0"/>
+          </a:p>
+          <a:p>
+            <a:r>
+              <a:rPr lang="pt-BR" b="1" dirty="0"/>
+              <a:t>6. O que acontece no final</a:t>
+            </a:r>
+          </a:p>
+          <a:p>
+            <a:r>
+              <a:rPr lang="pt-BR" dirty="0"/>
+              <a:t>Depois da busca, o DARTS não mantém a mistura contínua.</a:t>
+            </a:r>
+          </a:p>
+          <a:p>
+            <a:r>
+              <a:rPr lang="pt-BR" dirty="0"/>
+              <a:t>Ele faz uma </a:t>
+            </a:r>
+            <a:r>
+              <a:rPr lang="pt-BR" b="1" dirty="0" err="1"/>
+              <a:t>discretização</a:t>
+            </a:r>
+            <a:r>
+              <a:rPr lang="pt-BR" dirty="0"/>
+              <a:t>:</a:t>
+            </a:r>
+          </a:p>
+          <a:p>
+            <a:r>
+              <a:rPr lang="pt-BR" dirty="0"/>
+              <a:t>em cada aresta, escolhe a operação com maior peso</a:t>
+            </a:r>
+          </a:p>
+          <a:p>
+            <a:r>
+              <a:rPr lang="pt-BR" dirty="0"/>
+              <a:t>assim obtém uma arquitetura final discreta e compacta</a:t>
+            </a:r>
+          </a:p>
+          <a:p>
+            <a:r>
+              <a:rPr lang="pt-BR" dirty="0"/>
+              <a:t>Ou seja:</a:t>
+            </a:r>
+          </a:p>
+          <a:p>
+            <a:r>
+              <a:rPr lang="pt-BR" dirty="0"/>
+              <a:t>durante a busca, tudo é contínuo</a:t>
+            </a:r>
+          </a:p>
+          <a:p>
+            <a:r>
+              <a:rPr lang="pt-BR" dirty="0"/>
+              <a:t>no final, converte para escolhas discretas</a:t>
+            </a:r>
+          </a:p>
+          <a:p>
+            <a:br>
+              <a:rPr lang="pt-BR" dirty="0"/>
+            </a:br>
+            <a:endParaRPr lang="pt-BR" dirty="0"/>
+          </a:p>
+          <a:p>
+            <a:r>
+              <a:rPr lang="pt-BR" b="1" dirty="0"/>
+              <a:t>7. Explicação bem intuitiva</a:t>
+            </a:r>
+          </a:p>
+          <a:p>
+            <a:r>
+              <a:rPr lang="pt-BR" dirty="0"/>
+              <a:t>Pense assim.</a:t>
+            </a:r>
+          </a:p>
+          <a:p>
+            <a:r>
+              <a:rPr lang="pt-BR" b="1" dirty="0"/>
+              <a:t>NAS tradicional</a:t>
+            </a:r>
+          </a:p>
+          <a:p>
+            <a:r>
+              <a:rPr lang="pt-BR" dirty="0"/>
+              <a:t>Você pergunta:</a:t>
+            </a:r>
+          </a:p>
+          <a:p>
+            <a:r>
+              <a:rPr lang="pt-BR" dirty="0"/>
+              <a:t>"qual operação eu coloco aqui?"</a:t>
+            </a:r>
+          </a:p>
+          <a:p>
+            <a:r>
+              <a:rPr lang="pt-BR" dirty="0"/>
+              <a:t>E precisa responder imediatamente com uma opção exata.</a:t>
+            </a:r>
+          </a:p>
+          <a:p>
             <a:r>
               <a:rPr lang="pt-BR" b="1" dirty="0"/>
               <a:t>DARTS</a:t>
             </a:r>
+          </a:p>
+          <a:p>
             <a:r>
               <a:rPr lang="pt-BR" dirty="0"/>
-              <a:t> é um método de NAS que transforma a busca de arquitetura em um problema </a:t>
+              <a:t>Você diz:</a:t>
+            </a:r>
+          </a:p>
+          <a:p>
+            <a:r>
+              <a:rPr lang="pt-BR" dirty="0"/>
+              <a:t>"vou colocar todas as opções, mas cada uma com um peso"</a:t>
+            </a:r>
+          </a:p>
+          <a:p>
+            <a:r>
+              <a:rPr lang="pt-BR" dirty="0"/>
+              <a:t>"se uma opção for melhor, o treinamento vai aumentar seu peso"</a:t>
+            </a:r>
+          </a:p>
+          <a:p>
+            <a:r>
+              <a:rPr lang="pt-BR" dirty="0"/>
+              <a:t>Então o problema deixa de ser:</a:t>
+            </a:r>
+          </a:p>
+          <a:p>
+            <a:r>
+              <a:rPr lang="pt-BR" dirty="0"/>
+              <a:t>escolher uma operação entre várias</a:t>
+            </a:r>
+          </a:p>
+          <a:p>
+            <a:r>
+              <a:rPr lang="pt-BR" dirty="0"/>
+              <a:t>e passa a ser:</a:t>
+            </a:r>
+          </a:p>
+          <a:p>
+            <a:r>
+              <a:rPr lang="pt-BR" dirty="0"/>
+              <a:t>ajustar pesos contínuos que indicam a preferência por cada operação</a:t>
+            </a:r>
+          </a:p>
+          <a:p>
+            <a:r>
+              <a:rPr lang="pt-BR" dirty="0"/>
+              <a:t>Isso é o que permite usar gradiente.</a:t>
+            </a:r>
+          </a:p>
+          <a:p>
+            <a:br>
+              <a:rPr lang="pt-BR" dirty="0"/>
+            </a:br>
+            <a:endParaRPr lang="pt-BR" dirty="0"/>
+          </a:p>
+          <a:p>
+            <a:r>
+              <a:rPr lang="pt-BR" b="1" dirty="0"/>
+              <a:t>8. Exemplo simples</a:t>
+            </a:r>
+          </a:p>
+          <a:p>
+            <a:r>
+              <a:rPr lang="pt-BR" dirty="0"/>
+              <a:t>Suponha que numa aresta existam 3 opções:</a:t>
+            </a:r>
+          </a:p>
+          <a:p>
+            <a:r>
+              <a:rPr lang="pt-BR" dirty="0" err="1"/>
+              <a:t>conv</a:t>
+            </a:r>
+            <a:r>
+              <a:rPr lang="pt-BR" dirty="0"/>
+              <a:t> 3x3</a:t>
+            </a:r>
+          </a:p>
+          <a:p>
+            <a:r>
+              <a:rPr lang="pt-BR" dirty="0" err="1"/>
+              <a:t>max</a:t>
+            </a:r>
+            <a:r>
+              <a:rPr lang="pt-BR" dirty="0"/>
+              <a:t> </a:t>
+            </a:r>
+            <a:r>
+              <a:rPr lang="pt-BR" dirty="0" err="1"/>
+              <a:t>pooling</a:t>
+            </a:r>
+            <a:endParaRPr lang="pt-BR" dirty="0"/>
+          </a:p>
+          <a:p>
+            <a:r>
+              <a:rPr lang="pt-BR" dirty="0" err="1"/>
+              <a:t>skip</a:t>
+            </a:r>
+            <a:r>
+              <a:rPr lang="pt-BR" dirty="0"/>
+              <a:t> connection</a:t>
+            </a:r>
+          </a:p>
+          <a:p>
+            <a:r>
+              <a:rPr lang="pt-BR" dirty="0"/>
+              <a:t>No começo, o DARTS pode dar pesos parecidos:</a:t>
+            </a:r>
+          </a:p>
+          <a:p>
+            <a:r>
+              <a:rPr lang="pt-BR" dirty="0" err="1"/>
+              <a:t>conv</a:t>
+            </a:r>
+            <a:r>
+              <a:rPr lang="pt-BR" dirty="0"/>
+              <a:t> 3x3: 0.33</a:t>
+            </a:r>
+          </a:p>
+          <a:p>
+            <a:r>
+              <a:rPr lang="pt-BR" dirty="0" err="1"/>
+              <a:t>max</a:t>
+            </a:r>
+            <a:r>
+              <a:rPr lang="pt-BR" dirty="0"/>
+              <a:t> </a:t>
+            </a:r>
+            <a:r>
+              <a:rPr lang="pt-BR" dirty="0" err="1"/>
+              <a:t>pooling</a:t>
+            </a:r>
+            <a:r>
+              <a:rPr lang="pt-BR" dirty="0"/>
+              <a:t>: 0.33</a:t>
+            </a:r>
+          </a:p>
+          <a:p>
+            <a:r>
+              <a:rPr lang="pt-BR" dirty="0" err="1"/>
+              <a:t>skip</a:t>
+            </a:r>
+            <a:r>
+              <a:rPr lang="pt-BR" dirty="0"/>
+              <a:t>: 0.34</a:t>
+            </a:r>
+          </a:p>
+          <a:p>
+            <a:r>
+              <a:rPr lang="pt-BR" dirty="0"/>
+              <a:t>Depois do treinamento, pode virar:</a:t>
+            </a:r>
+          </a:p>
+          <a:p>
+            <a:r>
+              <a:rPr lang="pt-BR" dirty="0" err="1"/>
+              <a:t>conv</a:t>
+            </a:r>
+            <a:r>
+              <a:rPr lang="pt-BR" dirty="0"/>
+              <a:t> 3x3: 0.80</a:t>
+            </a:r>
+          </a:p>
+          <a:p>
+            <a:r>
+              <a:rPr lang="pt-BR" dirty="0" err="1"/>
+              <a:t>max</a:t>
+            </a:r>
+            <a:r>
+              <a:rPr lang="pt-BR" dirty="0"/>
+              <a:t> </a:t>
+            </a:r>
+            <a:r>
+              <a:rPr lang="pt-BR" dirty="0" err="1"/>
+              <a:t>pooling</a:t>
+            </a:r>
+            <a:r>
+              <a:rPr lang="pt-BR" dirty="0"/>
+              <a:t>: 0.10</a:t>
+            </a:r>
+          </a:p>
+          <a:p>
+            <a:r>
+              <a:rPr lang="pt-BR" dirty="0" err="1"/>
+              <a:t>skip</a:t>
+            </a:r>
+            <a:r>
+              <a:rPr lang="pt-BR" dirty="0"/>
+              <a:t>: 0.10</a:t>
+            </a:r>
+          </a:p>
+          <a:p>
+            <a:r>
+              <a:rPr lang="pt-BR" dirty="0"/>
+              <a:t>Então ele entende que, para aquela aresta, </a:t>
+            </a:r>
+            <a:r>
+              <a:rPr lang="pt-BR" b="1" dirty="0" err="1"/>
+              <a:t>conv</a:t>
+            </a:r>
+            <a:r>
+              <a:rPr lang="pt-BR" b="1" dirty="0"/>
+              <a:t> 3x3</a:t>
+            </a:r>
+            <a:r>
+              <a:rPr lang="pt-BR" dirty="0"/>
+              <a:t> é a melhor escolha.</a:t>
+            </a:r>
+            <a:br>
+              <a:rPr lang="pt-BR" dirty="0"/>
+            </a:br>
+            <a:r>
+              <a:rPr lang="pt-BR" dirty="0"/>
+              <a:t>No final, mantém só ela.</a:t>
+            </a:r>
+          </a:p>
+          <a:p>
+            <a:br>
+              <a:rPr lang="pt-BR" dirty="0"/>
+            </a:br>
+            <a:endParaRPr lang="pt-BR" dirty="0"/>
+          </a:p>
+          <a:p>
+            <a:r>
+              <a:rPr lang="pt-BR" b="1" dirty="0"/>
+              <a:t>9. Resposta direta à sua pergunta</a:t>
+            </a:r>
+          </a:p>
+          <a:p>
+            <a:r>
+              <a:rPr lang="pt-BR" b="1" dirty="0"/>
+              <a:t>Como o DARTS transforma o problema em </a:t>
             </a:r>
             <a:r>
               <a:rPr lang="pt-BR" b="1" dirty="0" err="1"/>
               <a:t>diferenciável</a:t>
             </a:r>
             <a:r>
+              <a:rPr lang="pt-BR" b="1" dirty="0"/>
+              <a:t>?</a:t>
+            </a:r>
+          </a:p>
+          <a:p>
+            <a:r>
               <a:rPr lang="pt-BR" dirty="0"/>
-              <a:t>, permitindo otimização por gradiente em vez de busca puramente discreta.</a:t>
-            </a:r>
-          </a:p>
-          <a:p>
-            <a:pPr marL="171450" indent="-171450">
-              <a:buFont typeface="Arial" panose="020B0604020202020204" pitchFamily="34" charset="0"/>
-              <a:buChar char="•"/>
-            </a:pPr>
+              <a:t>Ele pega uma escolha discreta de arquitetura e a substitui por uma </a:t>
+            </a:r>
+            <a:r>
+              <a:rPr lang="pt-BR" b="1" dirty="0"/>
+              <a:t>relaxação contínua</a:t>
+            </a:r>
             <a:r>
               <a:rPr lang="pt-BR" dirty="0"/>
-              <a:t>A ideia central é construir um </a:t>
-            </a:r>
-            <a:r>
-              <a:rPr lang="pt-BR" b="1" dirty="0" err="1"/>
-              <a:t>supernet</a:t>
-            </a:r>
+              <a:t>:</a:t>
+            </a:r>
+          </a:p>
+          <a:p>
             <a:r>
               <a:rPr lang="pt-BR" dirty="0"/>
-              <a:t>, isto é, uma rede que contém, em cada aresta, </a:t>
+              <a:t>cada aresta não escolhe uma única operação</a:t>
+            </a:r>
+          </a:p>
+          <a:p>
+            <a:r>
+              <a:rPr lang="pt-BR" dirty="0"/>
+              <a:t>ela usa uma </a:t>
             </a:r>
             <a:r>
               <a:rPr lang="pt-BR" b="1" dirty="0"/>
-              <a:t>várias operações candidatas ao mesmo tempo</a:t>
-            </a:r>
+              <a:t>combinação ponderada de todas as operações candidatas</a:t>
+            </a:r>
+            <a:endParaRPr lang="pt-BR" dirty="0"/>
+          </a:p>
+          <a:p>
             <a:r>
               <a:rPr lang="pt-BR" dirty="0"/>
-              <a:t>, como diferentes convoluções, </a:t>
+              <a:t>os pesos dessa combinação são parâmetros contínuos ( \alpha )</a:t>
+            </a:r>
+          </a:p>
+          <a:p>
+            <a:r>
+              <a:rPr lang="pt-BR" dirty="0"/>
+              <a:t>como esses parâmetros são contínuos, a </a:t>
             </a:r>
             <a:r>
               <a:rPr lang="pt-BR" dirty="0" err="1"/>
-              <a:t>pooling</a:t>
+              <a:t>loss</a:t>
             </a:r>
             <a:r>
               <a:rPr lang="pt-BR" dirty="0"/>
-              <a:t>, </a:t>
+              <a:t> fica </a:t>
             </a:r>
             <a:r>
               <a:rPr lang="pt-BR" dirty="0" err="1"/>
-              <a:t>skip</a:t>
+              <a:t>diferenciável</a:t>
             </a:r>
             <a:r>
               <a:rPr lang="pt-BR" dirty="0"/>
-              <a:t> connection e zero.</a:t>
-            </a:r>
-          </a:p>
-          <a:p>
-            <a:pPr marL="171450" indent="-171450">
-              <a:buFont typeface="Arial" panose="020B0604020202020204" pitchFamily="34" charset="0"/>
-              <a:buChar char="•"/>
-            </a:pPr>
+              <a:t> em relação a eles</a:t>
+            </a:r>
+          </a:p>
+          <a:p>
             <a:r>
               <a:rPr lang="pt-BR" dirty="0"/>
-              <a:t>Em vez de escolher uma única operação de forma direta, o DARTS associa </a:t>
-            </a:r>
+              <a:t>então a arquitetura pode ser otimizada por gradiente</a:t>
+            </a:r>
+          </a:p>
+          <a:p>
+            <a:br>
+              <a:rPr lang="pt-BR" dirty="0"/>
+            </a:br>
+            <a:endParaRPr lang="pt-BR" dirty="0"/>
+          </a:p>
+          <a:p>
             <a:r>
               <a:rPr lang="pt-BR" b="1" dirty="0"/>
-              <a:t>parâmetros arquiteturais contínuos</a:t>
-            </a:r>
+              <a:t>10. Principal vantagem e principal problema</a:t>
+            </a:r>
+          </a:p>
+          <a:p>
+            <a:r>
+              <a:rPr lang="pt-BR" b="1" dirty="0"/>
+              <a:t>Vantagem</a:t>
+            </a:r>
+          </a:p>
+          <a:p>
             <a:r>
               <a:rPr lang="pt-BR" dirty="0"/>
-              <a:t> a essas operações e conexões.</a:t>
-            </a:r>
-          </a:p>
-          <a:p>
-            <a:pPr marL="171450" indent="-171450">
-              <a:buFont typeface="Arial" panose="020B0604020202020204" pitchFamily="34" charset="0"/>
-              <a:buChar char="•"/>
-            </a:pPr>
+              <a:t>Reduz muito o custo de busca em relação a NAS com </a:t>
+            </a:r>
+            <a:r>
+              <a:rPr lang="pt-BR" dirty="0" err="1"/>
+              <a:t>reinforcement</a:t>
+            </a:r>
             <a:r>
               <a:rPr lang="pt-BR" dirty="0"/>
-              <a:t>Após aplicar uma normalização, esses parâmetros passam a indicar a </a:t>
-            </a:r>
+              <a:t> learning ou algoritmos evolutivos.</a:t>
+            </a:r>
+          </a:p>
+          <a:p>
             <a:r>
               <a:rPr lang="pt-BR" b="1" dirty="0"/>
-              <a:t>importância relativa</a:t>
-            </a:r>
+              <a:t>Problema</a:t>
+            </a:r>
+          </a:p>
+          <a:p>
             <a:r>
               <a:rPr lang="pt-BR" dirty="0"/>
-              <a:t> de cada opção no </a:t>
+              <a:t>A </a:t>
             </a:r>
             <a:r>
               <a:rPr lang="pt-BR" dirty="0" err="1"/>
@@ -14136,167 +17260,62 @@
             </a:r>
             <a:r>
               <a:rPr lang="pt-BR" dirty="0"/>
-              <a:t>.</a:t>
-            </a:r>
-          </a:p>
-          <a:p>
-            <a:pPr marL="171450" indent="-171450">
-              <a:buFont typeface="Arial" panose="020B0604020202020204" pitchFamily="34" charset="0"/>
-              <a:buChar char="•"/>
-            </a:pPr>
-            <a:r>
+              <a:t> fica pesada, porque várias operações coexistem ao mesmo tempo.</a:t>
+            </a:r>
+            <a:br>
               <a:rPr lang="pt-BR" dirty="0"/>
-              <a:t>Com isso, a arquitetura pode ser aprendida junto com os pesos da rede por meio de um esquema de </a:t>
+            </a:br>
+            <a:r>
+              <a:rPr lang="pt-BR" dirty="0"/>
+              <a:t>Além disso, o DARTS pode favorecer demais operações fáceis, como </a:t>
+            </a:r>
+            <a:r>
+              <a:rPr lang="pt-BR" b="1" dirty="0" err="1"/>
+              <a:t>skip</a:t>
             </a:r>
             <a:r>
               <a:rPr lang="pt-BR" b="1" dirty="0"/>
-              <a:t>otimização </a:t>
+              <a:t> connections</a:t>
+            </a:r>
+            <a:r>
+              <a:rPr lang="pt-BR" dirty="0"/>
+              <a:t>, levando ao chamado </a:t>
             </a:r>
             <a:r>
               <a:rPr lang="pt-BR" b="1" dirty="0" err="1"/>
-              <a:t>bi-level</a:t>
+              <a:t>collapse</a:t>
             </a:r>
             <a:r>
               <a:rPr lang="pt-BR" dirty="0"/>
-              <a:t>:</a:t>
-            </a:r>
-          </a:p>
-          <a:p>
-            <a:pPr marL="628650" lvl="1" indent="-171450">
-              <a:buFont typeface="Arial" panose="020B0604020202020204" pitchFamily="34" charset="0"/>
-              <a:buChar char="•"/>
-            </a:pPr>
-            <a:r>
+              <a:t> da busca.</a:t>
+            </a:r>
+          </a:p>
+          <a:p>
+            <a:br>
               <a:rPr lang="pt-BR" dirty="0"/>
-              <a:t>um nível atualiza os </a:t>
+            </a:br>
+            <a:endParaRPr lang="pt-BR" dirty="0"/>
+          </a:p>
+          <a:p>
+            <a:r>
+              <a:rPr lang="pt-BR" dirty="0"/>
+              <a:t>Se quiser, no próximo passo eu posso te explicar </a:t>
             </a:r>
             <a:r>
               <a:rPr lang="pt-BR" b="1" dirty="0"/>
-              <a:t>pesos da rede</a:t>
+              <a:t>a figura do slide bloco por bloco</a:t>
             </a:r>
             <a:r>
               <a:rPr lang="pt-BR" dirty="0"/>
-              <a:t>,</a:t>
-            </a:r>
-          </a:p>
-          <a:p>
-            <a:pPr marL="628650" lvl="1" indent="-171450">
-              <a:buFont typeface="Arial" panose="020B0604020202020204" pitchFamily="34" charset="0"/>
-              <a:buChar char="•"/>
-            </a:pPr>
-            <a:r>
-              <a:rPr lang="pt-BR" dirty="0"/>
-              <a:t>o outro atualiza os </a:t>
+              <a:t>, mostrando exatamente o que significam os casos </a:t>
             </a:r>
             <a:r>
               <a:rPr lang="pt-BR" b="1" dirty="0"/>
-              <a:t>parâmetros da arquitetura</a:t>
+              <a:t>(a), (b), (c) e (d)</a:t>
             </a:r>
             <a:r>
               <a:rPr lang="pt-BR" dirty="0"/>
               <a:t>.</a:t>
-            </a:r>
-          </a:p>
-          <a:p>
-            <a:pPr marL="171450" indent="-171450">
-              <a:buFont typeface="Arial" panose="020B0604020202020204" pitchFamily="34" charset="0"/>
-              <a:buChar char="•"/>
-            </a:pPr>
-            <a:r>
-              <a:rPr lang="pt-BR" dirty="0"/>
-              <a:t>A principal vantagem do DARTS é reduzir drasticamente o custo de busca quando comparado a abordagens baseadas em </a:t>
-            </a:r>
-            <a:r>
-              <a:rPr lang="pt-BR" b="1" dirty="0" err="1"/>
-              <a:t>reinforcement</a:t>
-            </a:r>
-            <a:r>
-              <a:rPr lang="pt-BR" b="1" dirty="0"/>
-              <a:t> learning</a:t>
-            </a:r>
-            <a:r>
-              <a:rPr lang="pt-BR" dirty="0"/>
-              <a:t> ou </a:t>
-            </a:r>
-            <a:r>
-              <a:rPr lang="pt-BR" b="1" dirty="0"/>
-              <a:t>algoritmos evolutivos</a:t>
-            </a:r>
-            <a:r>
-              <a:rPr lang="pt-BR" dirty="0"/>
-              <a:t>.</a:t>
-            </a:r>
-          </a:p>
-          <a:p>
-            <a:pPr marL="171450" indent="-171450">
-              <a:buFont typeface="Arial" panose="020B0604020202020204" pitchFamily="34" charset="0"/>
-              <a:buChar char="•"/>
-            </a:pPr>
-            <a:r>
-              <a:rPr lang="pt-BR" dirty="0"/>
-              <a:t>O principal problema é que o </a:t>
-            </a:r>
-            <a:r>
-              <a:rPr lang="pt-BR" dirty="0" err="1"/>
-              <a:t>supernet</a:t>
-            </a:r>
-            <a:r>
-              <a:rPr lang="pt-BR" dirty="0"/>
-              <a:t> fica </a:t>
-            </a:r>
-            <a:r>
-              <a:rPr lang="pt-BR" b="1" dirty="0" err="1"/>
-              <a:t>superparametrizado</a:t>
-            </a:r>
-            <a:r>
-              <a:rPr lang="pt-BR" dirty="0"/>
-              <a:t>, exigindo muita </a:t>
-            </a:r>
-            <a:r>
-              <a:rPr lang="pt-BR" b="1" dirty="0"/>
-              <a:t>memória</a:t>
-            </a:r>
-            <a:r>
-              <a:rPr lang="pt-BR" dirty="0"/>
-              <a:t> e muita </a:t>
-            </a:r>
-            <a:r>
-              <a:rPr lang="pt-BR" b="1" dirty="0"/>
-              <a:t>computação</a:t>
-            </a:r>
-            <a:r>
-              <a:rPr lang="pt-BR" dirty="0"/>
-              <a:t>, já que múltiplas operações precisam coexistir durante o treinamento.</a:t>
-            </a:r>
-          </a:p>
-          <a:p>
-            <a:pPr marL="171450" indent="-171450">
-              <a:buFont typeface="Arial" panose="020B0604020202020204" pitchFamily="34" charset="0"/>
-              <a:buChar char="•"/>
-            </a:pPr>
-            <a:r>
-              <a:rPr lang="pt-BR" dirty="0"/>
-              <a:t>Além disso, trabalhos posteriores mostraram que o DARTS pode sofrer com </a:t>
-            </a:r>
-            <a:r>
-              <a:rPr lang="pt-BR" b="1" dirty="0"/>
-              <a:t>performance </a:t>
-            </a:r>
-            <a:r>
-              <a:rPr lang="pt-BR" b="1" dirty="0" err="1"/>
-              <a:t>collapse</a:t>
-            </a:r>
-            <a:r>
-              <a:rPr lang="pt-BR" dirty="0"/>
-              <a:t>, onde conexões do tipo </a:t>
-            </a:r>
-            <a:r>
-              <a:rPr lang="pt-BR" b="1" dirty="0" err="1"/>
-              <a:t>skip</a:t>
-            </a:r>
-            <a:r>
-              <a:rPr lang="pt-BR" dirty="0"/>
-              <a:t> passam a dominar a busca, degradando a arquitetura final ao longo do processo.</a:t>
             </a:r>
           </a:p>
         </p:txBody>
@@ -14343,471 +17362,7 @@
 </p:notes>
 </file>
 
-<file path=ppt/notesSlides/notesSlide30.xml><?xml version="1.0" encoding="utf-8"?>
-<p:notes xmlns:a="http://schemas.openxmlformats.org/drawingml/2006/main" xmlns:r="http://schemas.openxmlformats.org/officeDocument/2006/relationships" xmlns:p="http://schemas.openxmlformats.org/presentationml/2006/main">
-  <p:cSld>
-    <p:spTree>
-      <p:nvGrpSpPr>
-        <p:cNvPr id="1" name="">
-          <a:extLst>
-            <a:ext uri="{FF2B5EF4-FFF2-40B4-BE49-F238E27FC236}">
-              <a16:creationId xmlns:a16="http://schemas.microsoft.com/office/drawing/2014/main" id="{7F6DF5CB-0A55-727B-1C1E-6849D6D4E3B7}"/>
-            </a:ext>
-          </a:extLst>
-        </p:cNvPr>
-        <p:cNvGrpSpPr/>
-        <p:nvPr/>
-      </p:nvGrpSpPr>
-      <p:grpSpPr>
-        <a:xfrm>
-          <a:off x="0" y="0"/>
-          <a:ext cx="0" cy="0"/>
-          <a:chOff x="0" y="0"/>
-          <a:chExt cx="0" cy="0"/>
-        </a:xfrm>
-      </p:grpSpPr>
-      <p:sp>
-        <p:nvSpPr>
-          <p:cNvPr id="2" name="Slide Image Placeholder 1">
-            <a:extLst>
-              <a:ext uri="{FF2B5EF4-FFF2-40B4-BE49-F238E27FC236}">
-                <a16:creationId xmlns:a16="http://schemas.microsoft.com/office/drawing/2014/main" id="{3F114F7C-A825-4F14-9292-716B03CAFCDB}"/>
-              </a:ext>
-            </a:extLst>
-          </p:cNvPr>
-          <p:cNvSpPr>
-            <a:spLocks noGrp="1" noRot="1" noChangeAspect="1"/>
-          </p:cNvSpPr>
-          <p:nvPr>
-            <p:ph type="sldImg"/>
-          </p:nvPr>
-        </p:nvSpPr>
-        <p:spPr/>
-        <p:txBody>
-          <a:bodyPr/>
-          <a:lstStyle/>
-          <a:p>
-            <a:endParaRPr lang="pt-BR"/>
-          </a:p>
-        </p:txBody>
-      </p:sp>
-      <mc:AlternateContent xmlns:mc="http://schemas.openxmlformats.org/markup-compatibility/2006" xmlns:a14="http://schemas.microsoft.com/office/drawing/2010/main">
-        <mc:Choice Requires="a14">
-          <p:sp>
-            <p:nvSpPr>
-              <p:cNvPr id="3" name="Notes Placeholder 2">
-                <a:extLst>
-                  <a:ext uri="{FF2B5EF4-FFF2-40B4-BE49-F238E27FC236}">
-                    <a16:creationId xmlns:a16="http://schemas.microsoft.com/office/drawing/2014/main" id="{43DE653D-CDFA-038A-DA00-01BACB01396F}"/>
-                  </a:ext>
-                </a:extLst>
-              </p:cNvPr>
-              <p:cNvSpPr>
-                <a:spLocks noGrp="1"/>
-              </p:cNvSpPr>
-              <p:nvPr>
-                <p:ph type="body" idx="1"/>
-              </p:nvPr>
-            </p:nvSpPr>
-            <p:spPr/>
-            <p:txBody>
-              <a:bodyPr/>
-              <a:lstStyle/>
-              <a:p>
-                <a:endParaRPr lang="pt-BR" dirty="0"/>
-              </a:p>
-            </p:txBody>
-          </p:sp>
-        </mc:Choice>
-        <mc:Fallback xmlns="">
-          <p:sp>
-            <p:nvSpPr>
-              <p:cNvPr id="3" name="Notes Placeholder 2">
-                <a:extLst>
-                  <a:ext uri="{FF2B5EF4-FFF2-40B4-BE49-F238E27FC236}">
-                    <a16:creationId xmlns:a16="http://schemas.microsoft.com/office/drawing/2014/main" id="{BC4A4DA6-AAD5-7B9F-C6CD-1BF515A984C5}"/>
-                  </a:ext>
-                </a:extLst>
-              </p:cNvPr>
-              <p:cNvSpPr>
-                <a:spLocks noGrp="1"/>
-              </p:cNvSpPr>
-              <p:nvPr>
-                <p:ph type="body" idx="1"/>
-              </p:nvPr>
-            </p:nvSpPr>
-            <p:spPr/>
-            <p:txBody>
-              <a:bodyPr/>
-              <a:lstStyle/>
-              <a:p>
-                <a:r>
-                  <a:rPr lang="pt-BR" dirty="0"/>
-                  <a:t>Este slide resume os quatro subproblemas usados na solução. A Seção III do </a:t>
-                </a:r>
-                <a:r>
-                  <a:rPr lang="pt-BR" dirty="0" err="1"/>
-                  <a:t>paper</a:t>
-                </a:r>
-                <a:r>
-                  <a:rPr lang="pt-BR" dirty="0"/>
-                  <a:t> é bem carregada de matemática, com vários lemas, reformulações e atualizações iterativas. Então, em vez de entrar em todas as equações, eu preferi traduzir a lógica prática do que cada bloco faz.</a:t>
-                </a:r>
-              </a:p>
-              <a:p>
-                <a:endParaRPr lang="pt-BR" dirty="0"/>
-              </a:p>
-              <a:p>
-                <a:r>
-                  <a:rPr lang="pt-BR" dirty="0"/>
-                  <a:t>No primeiro subproblema, da frequência do servidor, a solução é relativamente simples. Como o problema é convexo, os autores conseguem obter uma solução fechada usando as condições </a:t>
-                </a:r>
-                <a:r>
-                  <a:rPr lang="pt-BR" b="1" dirty="0"/>
-                  <a:t>KKT</a:t>
-                </a:r>
-                <a:r>
-                  <a:rPr lang="pt-BR" dirty="0"/>
-                  <a:t>, que No primeiro subproblema, da frequência do servidor, a solução é relativamente simples. Como o problema é convexo, os autores conseguem obter uma solução fechada usando as condições KKT. Em termos práticos, isso quer dizer que eles não precisam iterar muito nem testar várias divisões possíveis de recurso. Eles já têm uma expressão direta que calcula quanto de processamento cada usuário deve receber com base na carga computacional associada a ele. Um exemplo simples seria este: imagine que o servidor tem 100 unidades de processamento para distribuir entre 3 usuários. O método não divide isso igualmente. Ele calcula uma divisão mais inteligente, dando mais recurso para quem tem tarefa mais pesada. Por isso, esse bloco é barato e tem complexidade linear no número de usuários</a:t>
-                </a:r>
-              </a:p>
-              <a:p>
-                <a:endParaRPr lang="pt-BR" dirty="0"/>
-              </a:p>
-              <a:p>
-                <a:endParaRPr lang="pt-BR" dirty="0"/>
-              </a:p>
-              <a:p>
-                <a:r>
-                  <a:rPr lang="pt-BR" dirty="0"/>
-                  <a:t>No segundo subproblema, da quantização, a lógica é a seguinte. O problema original é discreto, porque os bits permitidos são só 4, 8, 16 ou 32. Resolver isso diretamente seria mais difícil. Então eles fazem primeiro uma </a:t>
-                </a:r>
-                <a:r>
-                  <a:rPr lang="pt-BR" b="1" dirty="0"/>
-                  <a:t>relaxação contínua</a:t>
-                </a:r>
-                <a:r>
-                  <a:rPr lang="pt-BR" dirty="0"/>
-                  <a:t>, isto é, fingem temporariamente que o número de bits pode assumir qualquer valor real positivo. Depois disso, analisam a função do subproblema e mostram que ela é estritamente convexa. Isso é importante porque significa que existe um único ponto ótimo contínuo. A partir daí, eles derivam a condição de ótimo desse problema relaxado e obtêm diretamente o valor contínuo ótimo de </a:t>
-                </a:r>
-                <a:r>
-                  <a:rPr lang="ar-AE" sz="1200" i="0" kern="1200">
-                    <a:solidFill>
-                      <a:schemeClr val="tx1"/>
-                    </a:solidFill>
-                    <a:latin typeface="+mn-lt"/>
-                    <a:ea typeface="+mn-ea"/>
-                    <a:cs typeface="+mn-cs"/>
-                  </a:rPr>
-                  <a:t>𝑞_𝑢</a:t>
-                </a:r>
-                <a:r>
-                  <a:rPr lang="pt-BR" dirty="0"/>
-                  <a:t>para cada usuário. Em seguida, como esse valor contínuo não é necessariamente permitido na prática, eles fazem uma </a:t>
-                </a:r>
-                <a:r>
-                  <a:rPr lang="pt-BR" b="1" dirty="0"/>
-                  <a:t>projeção para o conjunto discreto viável</a:t>
-                </a:r>
-                <a:r>
-                  <a:rPr lang="pt-BR" dirty="0"/>
-                  <a:t>, escolhendo o valor mais próximo entre 4, 8, 16 e 32. Um exemplo simples seria este: suponha que o valor ótimo contínuo calculado fosse 15.5 bits. Como esse valor não é permitido, eles projetam para o conjunto viável e escolhem o mais próximo: 16.</a:t>
-                </a:r>
-              </a:p>
-              <a:p>
-                <a:endParaRPr lang="pt-BR" dirty="0"/>
-              </a:p>
-              <a:p>
-                <a:r>
-                  <a:rPr lang="pt-BR" dirty="0"/>
-                  <a:t>No terceiro subproblema, do </a:t>
-                </a:r>
-                <a:r>
-                  <a:rPr lang="pt-BR" dirty="0" err="1"/>
-                  <a:t>beamforming</a:t>
-                </a:r>
-                <a:r>
-                  <a:rPr lang="pt-BR" dirty="0"/>
-                  <a:t>, a dificuldade aumenta bastante. Aqui eles usam RADMM, que é uma forma de resolver o problema separando a variável em partes auxiliares e atualizando essas partes de maneira alternada. Em termos simples, o algoritmo faz o seguinte: primeiro ele atualiza uma versão do </a:t>
-                </a:r>
-                <a:r>
-                  <a:rPr lang="pt-BR" dirty="0" err="1"/>
-                  <a:t>beamforming</a:t>
-                </a:r>
-                <a:r>
-                  <a:rPr lang="pt-BR" dirty="0"/>
-                  <a:t> tentando melhorar a taxa </a:t>
-                </a:r>
-                <a:r>
-                  <a:rPr lang="pt-BR" dirty="0" err="1"/>
-                  <a:t>uplink</a:t>
-                </a:r>
-                <a:r>
-                  <a:rPr lang="pt-BR" dirty="0"/>
-                  <a:t>. Depois ele corrige essa solução para que ela continue respeitando a restrição geométrica de norma unitária. Em seguida, ele atualiza um termo auxiliar que força consistência entre essas duas representações. Então, na prática, esse subproblema roda como um pequeno laço interno com três etapas repetidas: melhorar a solução, projetar ou ajustar para o conjunto válido, e corrigir o acoplamento entre as variáveis auxiliares. Um exemplo intuitivo seria: imagine que a BS tenta ajustar o filtro de recepção para separar melhor dois usuários, mas toda vez que faz isso precisa garantir que esse filtro continue dentro da estrutura geométrica exigida. Então o algoritmo alterna entre melhorar o desempenho e reimpor a validade da solução. É por isso que esse é um dos blocos mais caros do algoritmo.</a:t>
-                </a:r>
-              </a:p>
-              <a:p>
-                <a:endParaRPr lang="pt-BR" dirty="0"/>
-              </a:p>
-              <a:p>
-                <a:r>
-                  <a:rPr lang="pt-BR" dirty="0"/>
-                  <a:t>No quarto subproblema, das </a:t>
-                </a:r>
-                <a:r>
-                  <a:rPr lang="pt-BR" dirty="0" err="1"/>
-                  <a:t>fluid</a:t>
-                </a:r>
-                <a:r>
-                  <a:rPr lang="pt-BR" dirty="0"/>
-                  <a:t> </a:t>
-                </a:r>
-                <a:r>
-                  <a:rPr lang="pt-BR" dirty="0" err="1"/>
-                  <a:t>antennas</a:t>
-                </a:r>
-                <a:r>
-                  <a:rPr lang="pt-BR" dirty="0"/>
-                  <a:t>, eles também evitam uma solução conjunta completa. Em vez de tentar mover todas as antenas ao mesmo tempo, o algoritmo faz uma atualização </a:t>
-                </a:r>
-                <a:r>
-                  <a:rPr lang="pt-BR" b="1" dirty="0"/>
-                  <a:t>sequencial</a:t>
-                </a:r>
-                <a:r>
-                  <a:rPr lang="pt-BR" dirty="0"/>
-                  <a:t>. Ele escolhe uma antena, otimiza a posição dela mantendo as demais fixas, depois passa para a próxima, e assim por diante. Cada atualização leva em conta duas restrições físicas: a antena precisa permanecer dentro da área do painel e não pode ficar perto demais das outras. Então, em termos práticos, esse bloco funciona como uma varredura antena por antena. </a:t>
-                </a:r>
-              </a:p>
-              <a:p>
-                <a:endParaRPr lang="pt-BR" dirty="0"/>
-              </a:p>
-              <a:p>
-                <a:r>
-                  <a:rPr lang="pt-BR" dirty="0"/>
-                  <a:t>Então, resumindo a complexidade, P1 e P2 são leves, porque têm solução direta ou quase direta. Já P3 e P4 concentram o custo real do algoritmo, porque envolvem iterações internas e restrições geométricas mais difíceis. E, como tudo roda em sequência dentro do BCD, o resultado atualizado de um bloco influencia o comportamento do próximo.</a:t>
-                </a:r>
-              </a:p>
-              <a:p>
-                <a:endParaRPr lang="pt-BR" dirty="0"/>
-              </a:p>
-              <a:p>
-                <a:endParaRPr lang="pt-BR" dirty="0"/>
-              </a:p>
-              <a:p>
-                <a:r>
-                  <a:rPr lang="pt-BR" dirty="0"/>
-                  <a:t>Os autores só dão explicitamente a complexidade de </a:t>
-                </a:r>
-                <a:r>
-                  <a:rPr lang="pt-BR" b="1" dirty="0"/>
-                  <a:t>dois</a:t>
-                </a:r>
-                <a:r>
-                  <a:rPr lang="pt-BR" dirty="0"/>
-                  <a:t> subproblemas. Eles afirmam que a complexidade de </a:t>
-                </a:r>
-                <a:r>
-                  <a:rPr lang="pt-BR" sz="1200" i="0" kern="1200">
-                    <a:solidFill>
-                      <a:schemeClr val="tx1"/>
-                    </a:solidFill>
-                    <a:latin typeface="+mn-lt"/>
-                    <a:ea typeface="+mn-ea"/>
-                    <a:cs typeface="+mn-cs"/>
-                  </a:rPr>
-                  <a:t>𝑃1</a:t>
-                </a:r>
-                <a:r>
-                  <a:rPr lang="pt-BR" dirty="0"/>
-                  <a:t>e </a:t>
-                </a:r>
-                <a:r>
-                  <a:rPr lang="pt-BR" sz="1200" i="0" kern="1200">
-                    <a:solidFill>
-                      <a:schemeClr val="tx1"/>
-                    </a:solidFill>
-                    <a:latin typeface="+mn-lt"/>
-                    <a:ea typeface="+mn-ea"/>
-                    <a:cs typeface="+mn-cs"/>
-                  </a:rPr>
-                  <a:t>𝑃2</a:t>
-                </a:r>
-                <a:r>
-                  <a:rPr lang="pt-BR" dirty="0"/>
-                  <a:t>é </a:t>
-                </a:r>
-                <a:r>
-                  <a:rPr lang="pt-BR" sz="1200" i="0" kern="1200">
-                    <a:solidFill>
-                      <a:schemeClr val="tx1"/>
-                    </a:solidFill>
-                    <a:latin typeface="+mn-lt"/>
-                    <a:ea typeface="+mn-ea"/>
-                    <a:cs typeface="+mn-cs"/>
-                  </a:rPr>
-                  <a:t>𝑂</a:t>
-                </a:r>
-                <a:r>
-                  <a:rPr lang="ar-AE" sz="1200" i="0" kern="1200">
-                    <a:solidFill>
-                      <a:schemeClr val="tx1"/>
-                    </a:solidFill>
-                    <a:latin typeface="+mn-lt"/>
-                    <a:ea typeface="+mn-ea"/>
-                    <a:cs typeface="+mn-cs"/>
-                  </a:rPr>
-                  <a:t>(𝑈)</a:t>
-                </a:r>
-                <a:r>
-                  <a:rPr lang="ar-AE" dirty="0"/>
-                  <a:t>, </a:t>
-                </a:r>
-                <a:r>
-                  <a:rPr lang="pt-BR" dirty="0"/>
-                  <a:t>isto é, linear no número de usuários. Depois disso, eles </a:t>
-                </a:r>
-                <a:r>
-                  <a:rPr lang="pt-BR" b="1" dirty="0"/>
-                  <a:t>não expandem</a:t>
-                </a:r>
-                <a:r>
-                  <a:rPr lang="pt-BR" dirty="0"/>
-                  <a:t> a complexidade de </a:t>
-                </a:r>
-                <a:r>
-                  <a:rPr lang="pt-BR" sz="1200" i="0" kern="1200">
-                    <a:solidFill>
-                      <a:schemeClr val="tx1"/>
-                    </a:solidFill>
-                    <a:latin typeface="+mn-lt"/>
-                    <a:ea typeface="+mn-ea"/>
-                    <a:cs typeface="+mn-cs"/>
-                  </a:rPr>
-                  <a:t>𝑃3</a:t>
-                </a:r>
-                <a:r>
-                  <a:rPr lang="pt-BR" dirty="0"/>
-                  <a:t>e </a:t>
-                </a:r>
-                <a:r>
-                  <a:rPr lang="pt-BR" sz="1200" i="0" kern="1200">
-                    <a:solidFill>
-                      <a:schemeClr val="tx1"/>
-                    </a:solidFill>
-                    <a:latin typeface="+mn-lt"/>
-                    <a:ea typeface="+mn-ea"/>
-                    <a:cs typeface="+mn-cs"/>
-                  </a:rPr>
-                  <a:t>𝑃4</a:t>
-                </a:r>
-                <a:r>
-                  <a:rPr lang="pt-BR" dirty="0"/>
-                  <a:t>dentro deste </a:t>
-                </a:r>
-                <a:r>
-                  <a:rPr lang="pt-BR" dirty="0" err="1"/>
-                  <a:t>paper</a:t>
-                </a:r>
-                <a:r>
-                  <a:rPr lang="pt-BR" dirty="0"/>
-                  <a:t>. Em vez disso, dizem que as complexidades de </a:t>
-                </a:r>
-                <a:r>
-                  <a:rPr lang="pt-BR" sz="1200" i="0" kern="1200">
-                    <a:solidFill>
-                      <a:schemeClr val="tx1"/>
-                    </a:solidFill>
-                    <a:latin typeface="+mn-lt"/>
-                    <a:ea typeface="+mn-ea"/>
-                    <a:cs typeface="+mn-cs"/>
-                  </a:rPr>
-                  <a:t>𝑃3</a:t>
-                </a:r>
-                <a:r>
-                  <a:rPr lang="pt-BR" dirty="0"/>
-                  <a:t>e </a:t>
-                </a:r>
-                <a:r>
-                  <a:rPr lang="pt-BR" sz="1200" i="0" kern="1200">
-                    <a:solidFill>
-                      <a:schemeClr val="tx1"/>
-                    </a:solidFill>
-                    <a:latin typeface="+mn-lt"/>
-                    <a:ea typeface="+mn-ea"/>
-                    <a:cs typeface="+mn-cs"/>
-                  </a:rPr>
-                  <a:t>𝑃4</a:t>
-                </a:r>
-                <a:r>
-                  <a:rPr lang="pt-BR" dirty="0"/>
-                  <a:t>são dadas nas referências </a:t>
-                </a:r>
-                <a:r>
-                  <a:rPr lang="pt-BR" b="1" dirty="0"/>
-                  <a:t>[7]</a:t>
-                </a:r>
-                <a:r>
-                  <a:rPr lang="pt-BR" dirty="0"/>
-                  <a:t> e </a:t>
-                </a:r>
-                <a:r>
-                  <a:rPr lang="pt-BR" b="1" dirty="0"/>
-                  <a:t>[4]</a:t>
-                </a:r>
-                <a:r>
-                  <a:rPr lang="pt-BR" dirty="0"/>
-                  <a:t>, respectivamente.</a:t>
-                </a:r>
-              </a:p>
-            </p:txBody>
-          </p:sp>
-        </mc:Fallback>
-      </mc:AlternateContent>
-      <p:sp>
-        <p:nvSpPr>
-          <p:cNvPr id="4" name="Slide Number Placeholder 3">
-            <a:extLst>
-              <a:ext uri="{FF2B5EF4-FFF2-40B4-BE49-F238E27FC236}">
-                <a16:creationId xmlns:a16="http://schemas.microsoft.com/office/drawing/2014/main" id="{CA5E9F0B-247F-AA59-1ED7-ACBB09A946E2}"/>
-              </a:ext>
-            </a:extLst>
-          </p:cNvPr>
-          <p:cNvSpPr>
-            <a:spLocks noGrp="1"/>
-          </p:cNvSpPr>
-          <p:nvPr>
-            <p:ph type="sldNum" sz="quarter" idx="5"/>
-          </p:nvPr>
-        </p:nvSpPr>
-        <p:spPr/>
-        <p:txBody>
-          <a:bodyPr/>
-          <a:lstStyle/>
-          <a:p>
-            <a:fld id="{6FC8D850-966F-45A6-8DE7-15B891E7D40D}" type="slidenum">
-              <a:rPr lang="pt-BR" smtClean="0"/>
-              <a:t>31</a:t>
-            </a:fld>
-            <a:endParaRPr lang="pt-BR"/>
-          </a:p>
-        </p:txBody>
-      </p:sp>
-    </p:spTree>
-    <p:extLst>
-      <p:ext uri="{BB962C8B-B14F-4D97-AF65-F5344CB8AC3E}">
-        <p14:creationId xmlns:p14="http://schemas.microsoft.com/office/powerpoint/2010/main" val="731585953"/>
-      </p:ext>
-    </p:extLst>
-  </p:cSld>
-  <p:clrMapOvr>
-    <a:masterClrMapping/>
-  </p:clrMapOvr>
-</p:notes>
-</file>
-
-<file path=ppt/notesSlides/notesSlide31.xml><?xml version="1.0" encoding="utf-8"?>
+<file path=ppt/notesSlides/notesSlide5.xml><?xml version="1.0" encoding="utf-8"?>
 <p:notes xmlns:a="http://schemas.openxmlformats.org/drawingml/2006/main" xmlns:r="http://schemas.openxmlformats.org/officeDocument/2006/relationships" xmlns:p="http://schemas.openxmlformats.org/presentationml/2006/main">
   <p:cSld>
     <p:spTree>
@@ -14858,188 +17413,6 @@
           <a:bodyPr/>
           <a:lstStyle/>
           <a:p>
-            <a:endParaRPr lang="pt-BR"/>
-          </a:p>
-        </p:txBody>
-      </p:sp>
-      <p:sp>
-        <p:nvSpPr>
-          <p:cNvPr id="4" name="Slide Number Placeholder 3"/>
-          <p:cNvSpPr>
-            <a:spLocks noGrp="1"/>
-          </p:cNvSpPr>
-          <p:nvPr>
-            <p:ph type="sldNum" sz="quarter" idx="5"/>
-          </p:nvPr>
-        </p:nvSpPr>
-        <p:spPr/>
-        <p:txBody>
-          <a:bodyPr/>
-          <a:lstStyle/>
-          <a:p>
-            <a:fld id="{6FC8D850-966F-45A6-8DE7-15B891E7D40D}" type="slidenum">
-              <a:rPr lang="pt-BR" smtClean="0"/>
-              <a:t>33</a:t>
-            </a:fld>
-            <a:endParaRPr lang="pt-BR"/>
-          </a:p>
-        </p:txBody>
-      </p:sp>
-    </p:spTree>
-    <p:extLst>
-      <p:ext uri="{BB962C8B-B14F-4D97-AF65-F5344CB8AC3E}">
-        <p14:creationId xmlns:p14="http://schemas.microsoft.com/office/powerpoint/2010/main" val="1341938206"/>
-      </p:ext>
-    </p:extLst>
-  </p:cSld>
-  <p:clrMapOvr>
-    <a:masterClrMapping/>
-  </p:clrMapOvr>
-</p:notes>
-</file>
-
-<file path=ppt/notesSlides/notesSlide32.xml><?xml version="1.0" encoding="utf-8"?>
-<p:notes xmlns:a="http://schemas.openxmlformats.org/drawingml/2006/main" xmlns:r="http://schemas.openxmlformats.org/officeDocument/2006/relationships" xmlns:p="http://schemas.openxmlformats.org/presentationml/2006/main">
-  <p:cSld>
-    <p:spTree>
-      <p:nvGrpSpPr>
-        <p:cNvPr id="1" name=""/>
-        <p:cNvGrpSpPr/>
-        <p:nvPr/>
-      </p:nvGrpSpPr>
-      <p:grpSpPr>
-        <a:xfrm>
-          <a:off x="0" y="0"/>
-          <a:ext cx="0" cy="0"/>
-          <a:chOff x="0" y="0"/>
-          <a:chExt cx="0" cy="0"/>
-        </a:xfrm>
-      </p:grpSpPr>
-      <p:sp>
-        <p:nvSpPr>
-          <p:cNvPr id="2" name="Slide Image Placeholder 1"/>
-          <p:cNvSpPr>
-            <a:spLocks noGrp="1" noRot="1" noChangeAspect="1"/>
-          </p:cNvSpPr>
-          <p:nvPr>
-            <p:ph type="sldImg"/>
-          </p:nvPr>
-        </p:nvSpPr>
-        <p:spPr/>
-        <p:txBody>
-          <a:bodyPr/>
-          <a:lstStyle/>
-          <a:p>
-            <a:endParaRPr lang="pt-BR"/>
-          </a:p>
-        </p:txBody>
-      </p:sp>
-      <p:sp>
-        <p:nvSpPr>
-          <p:cNvPr id="3" name="Notes Placeholder 2"/>
-          <p:cNvSpPr>
-            <a:spLocks noGrp="1"/>
-          </p:cNvSpPr>
-          <p:nvPr>
-            <p:ph type="body" idx="1"/>
-          </p:nvPr>
-        </p:nvSpPr>
-        <p:spPr/>
-        <p:txBody>
-          <a:bodyPr/>
-          <a:lstStyle/>
-          <a:p>
-            <a:endParaRPr lang="pt-BR" dirty="0"/>
-          </a:p>
-        </p:txBody>
-      </p:sp>
-      <p:sp>
-        <p:nvSpPr>
-          <p:cNvPr id="4" name="Slide Number Placeholder 3"/>
-          <p:cNvSpPr>
-            <a:spLocks noGrp="1"/>
-          </p:cNvSpPr>
-          <p:nvPr>
-            <p:ph type="sldNum" sz="quarter" idx="5"/>
-          </p:nvPr>
-        </p:nvSpPr>
-        <p:spPr/>
-        <p:txBody>
-          <a:bodyPr/>
-          <a:lstStyle/>
-          <a:p>
-            <a:fld id="{6FC8D850-966F-45A6-8DE7-15B891E7D40D}" type="slidenum">
-              <a:rPr lang="pt-BR" smtClean="0"/>
-              <a:t>36</a:t>
-            </a:fld>
-            <a:endParaRPr lang="pt-BR"/>
-          </a:p>
-        </p:txBody>
-      </p:sp>
-    </p:spTree>
-    <p:extLst>
-      <p:ext uri="{BB962C8B-B14F-4D97-AF65-F5344CB8AC3E}">
-        <p14:creationId xmlns:p14="http://schemas.microsoft.com/office/powerpoint/2010/main" val="1115625713"/>
-      </p:ext>
-    </p:extLst>
-  </p:cSld>
-  <p:clrMapOvr>
-    <a:masterClrMapping/>
-  </p:clrMapOvr>
-</p:notes>
-</file>
-
-<file path=ppt/notesSlides/notesSlide4.xml><?xml version="1.0" encoding="utf-8"?>
-<p:notes xmlns:a="http://schemas.openxmlformats.org/drawingml/2006/main" xmlns:r="http://schemas.openxmlformats.org/officeDocument/2006/relationships" xmlns:p="http://schemas.openxmlformats.org/presentationml/2006/main">
-  <p:cSld>
-    <p:spTree>
-      <p:nvGrpSpPr>
-        <p:cNvPr id="1" name=""/>
-        <p:cNvGrpSpPr/>
-        <p:nvPr/>
-      </p:nvGrpSpPr>
-      <p:grpSpPr>
-        <a:xfrm>
-          <a:off x="0" y="0"/>
-          <a:ext cx="0" cy="0"/>
-          <a:chOff x="0" y="0"/>
-          <a:chExt cx="0" cy="0"/>
-        </a:xfrm>
-      </p:grpSpPr>
-      <p:sp>
-        <p:nvSpPr>
-          <p:cNvPr id="2" name="Slide Image Placeholder 1"/>
-          <p:cNvSpPr>
-            <a:spLocks noGrp="1" noRot="1" noChangeAspect="1"/>
-          </p:cNvSpPr>
-          <p:nvPr>
-            <p:ph type="sldImg"/>
-          </p:nvPr>
-        </p:nvSpPr>
-        <p:spPr/>
-        <p:txBody>
-          <a:bodyPr/>
-          <a:lstStyle/>
-          <a:p>
-            <a:endParaRPr lang="pt-BR"/>
-          </a:p>
-        </p:txBody>
-      </p:sp>
-      <p:sp>
-        <p:nvSpPr>
-          <p:cNvPr id="3" name="Notes Placeholder 2"/>
-          <p:cNvSpPr>
-            <a:spLocks noGrp="1"/>
-          </p:cNvSpPr>
-          <p:nvPr>
-            <p:ph type="body" idx="1"/>
-          </p:nvPr>
-        </p:nvSpPr>
-        <p:spPr/>
-        <p:txBody>
-          <a:bodyPr/>
-          <a:lstStyle/>
-          <a:p>
             <a:pPr marL="171450" marR="0" lvl="0" indent="-171450" algn="l" defTabSz="914400" rtl="0" eaLnBrk="1" fontAlgn="auto" latinLnBrk="0" hangingPunct="1">
               <a:lnSpc>
                 <a:spcPct val="100000"/>
@@ -15111,7 +17484,7 @@
 </p:notes>
 </file>
 
-<file path=ppt/notesSlides/notesSlide5.xml><?xml version="1.0" encoding="utf-8"?>
+<file path=ppt/notesSlides/notesSlide6.xml><?xml version="1.0" encoding="utf-8"?>
 <p:notes xmlns:a="http://schemas.openxmlformats.org/drawingml/2006/main" xmlns:r="http://schemas.openxmlformats.org/officeDocument/2006/relationships" xmlns:p="http://schemas.openxmlformats.org/presentationml/2006/main">
   <p:cSld>
     <p:spTree>
@@ -15257,7 +17630,7 @@
 </p:notes>
 </file>
 
-<file path=ppt/notesSlides/notesSlide6.xml><?xml version="1.0" encoding="utf-8"?>
+<file path=ppt/notesSlides/notesSlide7.xml><?xml version="1.0" encoding="utf-8"?>
 <p:notes xmlns:a="http://schemas.openxmlformats.org/drawingml/2006/main" xmlns:r="http://schemas.openxmlformats.org/officeDocument/2006/relationships" xmlns:p="http://schemas.openxmlformats.org/presentationml/2006/main">
   <p:cSld>
     <p:spTree>
@@ -15326,11 +17699,69 @@
           <a:bodyPr/>
           <a:lstStyle/>
           <a:p>
+            <a:r>
+              <a:rPr lang="pt-BR" dirty="0"/>
+              <a:t>O </a:t>
+            </a:r>
+            <a:r>
+              <a:rPr lang="pt-BR" b="1" dirty="0" err="1"/>
+              <a:t>backbone</a:t>
+            </a:r>
+            <a:r>
+              <a:rPr lang="pt-BR" dirty="0"/>
+              <a:t> extrai mapas de características da imagem. Camadas rasas têm mais resolução espacial, úteis para objetos pequenos. Camadas profundas têm menos resolução, mas mais informação semântica, úteis para reconhecer objetos maiores e mais abstratos.</a:t>
+            </a:r>
+          </a:p>
+          <a:p>
+            <a:r>
+              <a:rPr lang="pt-BR" dirty="0"/>
+              <a:t>A </a:t>
+            </a:r>
+            <a:r>
+              <a:rPr lang="pt-BR" b="1" dirty="0"/>
+              <a:t>FPN</a:t>
+            </a:r>
+            <a:r>
+              <a:rPr lang="pt-BR" dirty="0"/>
+              <a:t> pega esses mapas em diferentes escalas e faz uma fusão. A ideia é não depender de uma única resolução.</a:t>
+            </a:r>
+          </a:p>
+          <a:p>
             <a:pPr marL="171450" indent="-171450">
               <a:buFont typeface="Arial" panose="020B0604020202020204" pitchFamily="34" charset="0"/>
               <a:buChar char="•"/>
             </a:pPr>
             <a:endParaRPr lang="pt-BR" dirty="0"/>
+          </a:p>
+          <a:p>
+            <a:pPr marL="171450" indent="-171450">
+              <a:buFont typeface="Arial" panose="020B0604020202020204" pitchFamily="34" charset="0"/>
+              <a:buChar char="•"/>
+            </a:pPr>
+            <a:r>
+              <a:rPr lang="pt-BR" b="1" dirty="0"/>
+              <a:t>FPN</a:t>
+            </a:r>
+            <a:r>
+              <a:rPr lang="pt-BR" dirty="0"/>
+              <a:t> significa </a:t>
+            </a:r>
+            <a:r>
+              <a:rPr lang="pt-BR" b="1" dirty="0"/>
+              <a:t>Feature Pyramid Network</a:t>
+            </a:r>
+            <a:r>
+              <a:rPr lang="pt-BR" dirty="0"/>
+              <a:t>, ou </a:t>
+            </a:r>
+            <a:r>
+              <a:rPr lang="pt-BR" b="1" dirty="0"/>
+              <a:t>Rede de Pirâmide de Características</a:t>
+            </a:r>
+            <a:r>
+              <a:rPr lang="pt-BR" dirty="0"/>
+              <a:t>.</a:t>
+            </a:r>
           </a:p>
         </p:txBody>
       </p:sp>
@@ -15376,7 +17807,7 @@
 </p:notes>
 </file>
 
-<file path=ppt/notesSlides/notesSlide7.xml><?xml version="1.0" encoding="utf-8"?>
+<file path=ppt/notesSlides/notesSlide8.xml><?xml version="1.0" encoding="utf-8"?>
 <p:notes xmlns:a="http://schemas.openxmlformats.org/drawingml/2006/main" xmlns:r="http://schemas.openxmlformats.org/officeDocument/2006/relationships" xmlns:p="http://schemas.openxmlformats.org/presentationml/2006/main">
   <p:cSld>
     <p:spTree>
@@ -15495,7 +17926,7 @@
 </p:notes>
 </file>
 
-<file path=ppt/notesSlides/notesSlide8.xml><?xml version="1.0" encoding="utf-8"?>
+<file path=ppt/notesSlides/notesSlide9.xml><?xml version="1.0" encoding="utf-8"?>
 <p:notes xmlns:a="http://schemas.openxmlformats.org/drawingml/2006/main" xmlns:r="http://schemas.openxmlformats.org/officeDocument/2006/relationships" xmlns:p="http://schemas.openxmlformats.org/presentationml/2006/main">
   <p:cSld>
     <p:spTree>
@@ -15710,756 +18141,6 @@
     <p:extLst>
       <p:ext uri="{BB962C8B-B14F-4D97-AF65-F5344CB8AC3E}">
         <p14:creationId xmlns:p14="http://schemas.microsoft.com/office/powerpoint/2010/main" val="1821829846"/>
-      </p:ext>
-    </p:extLst>
-  </p:cSld>
-  <p:clrMapOvr>
-    <a:masterClrMapping/>
-  </p:clrMapOvr>
-</p:notes>
-</file>
-
-<file path=ppt/notesSlides/notesSlide9.xml><?xml version="1.0" encoding="utf-8"?>
-<p:notes xmlns:a="http://schemas.openxmlformats.org/drawingml/2006/main" xmlns:r="http://schemas.openxmlformats.org/officeDocument/2006/relationships" xmlns:p="http://schemas.openxmlformats.org/presentationml/2006/main">
-  <p:cSld>
-    <p:spTree>
-      <p:nvGrpSpPr>
-        <p:cNvPr id="1" name=""/>
-        <p:cNvGrpSpPr/>
-        <p:nvPr/>
-      </p:nvGrpSpPr>
-      <p:grpSpPr>
-        <a:xfrm>
-          <a:off x="0" y="0"/>
-          <a:ext cx="0" cy="0"/>
-          <a:chOff x="0" y="0"/>
-          <a:chExt cx="0" cy="0"/>
-        </a:xfrm>
-      </p:grpSpPr>
-      <p:sp>
-        <p:nvSpPr>
-          <p:cNvPr id="2" name="Slide Image Placeholder 1"/>
-          <p:cNvSpPr>
-            <a:spLocks noGrp="1" noRot="1" noChangeAspect="1"/>
-          </p:cNvSpPr>
-          <p:nvPr>
-            <p:ph type="sldImg"/>
-          </p:nvPr>
-        </p:nvSpPr>
-        <p:spPr/>
-        <p:txBody>
-          <a:bodyPr/>
-          <a:lstStyle/>
-          <a:p>
-            <a:endParaRPr lang="pt-BR"/>
-          </a:p>
-        </p:txBody>
-      </p:sp>
-      <mc:AlternateContent xmlns:mc="http://schemas.openxmlformats.org/markup-compatibility/2006" xmlns:a14="http://schemas.microsoft.com/office/drawing/2010/main">
-        <mc:Choice Requires="a14">
-          <p:sp>
-            <p:nvSpPr>
-              <p:cNvPr id="3" name="Notes Placeholder 2"/>
-              <p:cNvSpPr>
-                <a:spLocks noGrp="1"/>
-              </p:cNvSpPr>
-              <p:nvPr>
-                <p:ph type="body" idx="1"/>
-              </p:nvPr>
-            </p:nvSpPr>
-            <p:spPr/>
-            <p:txBody>
-              <a:bodyPr/>
-              <a:lstStyle/>
-              <a:p>
-                <a:r>
-                  <a:rPr lang="pt-BR" dirty="0"/>
-                  <a:t>O sistema proposto parte de um </a:t>
-                </a:r>
-                <a:r>
-                  <a:rPr lang="pt-BR" b="1" dirty="0" err="1"/>
-                  <a:t>search</a:t>
-                </a:r>
-                <a:r>
-                  <a:rPr lang="pt-BR" b="1" dirty="0"/>
-                  <a:t> </a:t>
-                </a:r>
-                <a:r>
-                  <a:rPr lang="pt-BR" b="1" dirty="0" err="1"/>
-                  <a:t>space</a:t>
-                </a:r>
-                <a:r>
-                  <a:rPr lang="pt-BR" b="1" dirty="0"/>
-                  <a:t> definido pelo usuário</a:t>
-                </a:r>
-                <a:r>
-                  <a:rPr lang="pt-BR" dirty="0"/>
-                  <a:t>. Esse </a:t>
-                </a:r>
-                <a:r>
-                  <a:rPr lang="pt-BR" dirty="0" err="1"/>
-                  <a:t>search</a:t>
-                </a:r>
-                <a:r>
-                  <a:rPr lang="pt-BR" dirty="0"/>
-                  <a:t> </a:t>
-                </a:r>
-                <a:r>
-                  <a:rPr lang="pt-BR" dirty="0" err="1"/>
-                  <a:t>space</a:t>
-                </a:r>
-                <a:r>
-                  <a:rPr lang="pt-BR" dirty="0"/>
-                  <a:t> especifica: </a:t>
-                </a:r>
-                <a:r>
-                  <a:rPr lang="pt-BR" b="1" dirty="0"/>
-                  <a:t>quais entradas podem alimentar cada bloco</a:t>
-                </a:r>
-                <a:r>
-                  <a:rPr lang="pt-BR" dirty="0"/>
-                  <a:t>, </a:t>
-                </a:r>
-              </a:p>
-              <a:p>
-                <a:r>
-                  <a:rPr lang="pt-BR" b="1" dirty="0"/>
-                  <a:t>quais operações são candidatas</a:t>
-                </a:r>
-                <a:r>
-                  <a:rPr lang="pt-BR" dirty="0"/>
-                  <a:t>, </a:t>
-                </a:r>
-              </a:p>
-              <a:p>
-                <a:r>
-                  <a:rPr lang="pt-BR" b="1" dirty="0"/>
-                  <a:t>quais taxas de redução de canais podem ser escolhidas</a:t>
-                </a:r>
-                <a:r>
-                  <a:rPr lang="pt-BR" dirty="0"/>
-                  <a:t>. </a:t>
-                </a:r>
-              </a:p>
-              <a:p>
-                <a:r>
-                  <a:rPr lang="pt-BR" dirty="0"/>
-                  <a:t>A partir dessa definição, o </a:t>
-                </a:r>
-                <a:r>
-                  <a:rPr lang="pt-BR" dirty="0" err="1"/>
-                  <a:t>EasyNAS</a:t>
-                </a:r>
-                <a:r>
-                  <a:rPr lang="pt-BR" dirty="0"/>
-                  <a:t> constrói automaticamente um </a:t>
-                </a:r>
-                <a:r>
-                  <a:rPr lang="pt-BR" b="1" dirty="0" err="1"/>
-                  <a:t>supernet</a:t>
-                </a:r>
-                <a:r>
-                  <a:rPr lang="pt-BR" dirty="0"/>
-                  <a:t>. Esse </a:t>
-                </a:r>
-                <a:r>
-                  <a:rPr lang="pt-BR" dirty="0" err="1"/>
-                  <a:t>supernet</a:t>
-                </a:r>
-                <a:r>
-                  <a:rPr lang="pt-BR" dirty="0"/>
-                  <a:t> é formado pelo empilhamento de </a:t>
-                </a:r>
-                <a:r>
-                  <a:rPr lang="pt-BR" b="1" dirty="0" err="1"/>
-                  <a:t>atomic</a:t>
-                </a:r>
-                <a:r>
-                  <a:rPr lang="pt-BR" b="1" dirty="0"/>
-                  <a:t> </a:t>
-                </a:r>
-                <a:r>
-                  <a:rPr lang="pt-BR" b="1" dirty="0" err="1"/>
-                  <a:t>search</a:t>
-                </a:r>
-                <a:r>
-                  <a:rPr lang="pt-BR" b="1" dirty="0"/>
-                  <a:t> </a:t>
-                </a:r>
-                <a:r>
-                  <a:rPr lang="pt-BR" b="1" dirty="0" err="1"/>
-                  <a:t>components</a:t>
-                </a:r>
-                <a:r>
-                  <a:rPr lang="pt-BR" dirty="0"/>
-                  <a:t>. </a:t>
-                </a:r>
-              </a:p>
-              <a:p>
-                <a:r>
-                  <a:rPr lang="pt-BR" dirty="0"/>
-                  <a:t>A ideia é usar a mesma lógica de construção para diferentes tarefas de visão, alterando apenas o </a:t>
-                </a:r>
-                <a:r>
-                  <a:rPr lang="pt-BR" dirty="0" err="1"/>
-                  <a:t>search</a:t>
-                </a:r>
-                <a:r>
-                  <a:rPr lang="pt-BR" dirty="0"/>
-                  <a:t> </a:t>
-                </a:r>
-                <a:r>
-                  <a:rPr lang="pt-BR" dirty="0" err="1"/>
-                  <a:t>space</a:t>
-                </a:r>
-                <a:r>
-                  <a:rPr lang="pt-BR" dirty="0"/>
-                  <a:t> e a forma como os blocos são organizados. Em resumo: </a:t>
-                </a:r>
-                <a:r>
-                  <a:rPr lang="pt-BR" b="1" dirty="0"/>
-                  <a:t>entrada do sistema:</a:t>
-                </a:r>
-                <a:r>
-                  <a:rPr lang="pt-BR" dirty="0"/>
-                  <a:t> </a:t>
-                </a:r>
-                <a:r>
-                  <a:rPr lang="pt-BR" dirty="0" err="1"/>
-                  <a:t>search</a:t>
-                </a:r>
-                <a:r>
-                  <a:rPr lang="pt-BR" dirty="0"/>
-                  <a:t> </a:t>
-                </a:r>
-                <a:r>
-                  <a:rPr lang="pt-BR" dirty="0" err="1"/>
-                  <a:t>space</a:t>
-                </a:r>
-                <a:r>
-                  <a:rPr lang="pt-BR" dirty="0"/>
-                  <a:t> + pesos compartilhados iniciais + máscaras das operações, </a:t>
-                </a:r>
-              </a:p>
-              <a:p>
-                <a:r>
-                  <a:rPr lang="pt-BR" b="1" dirty="0"/>
-                  <a:t>processamento:</a:t>
-                </a:r>
-                <a:r>
-                  <a:rPr lang="pt-BR" dirty="0"/>
-                  <a:t> treinamento do </a:t>
-                </a:r>
-                <a:r>
-                  <a:rPr lang="pt-BR" dirty="0" err="1"/>
-                  <a:t>supernet</a:t>
-                </a:r>
-                <a:r>
-                  <a:rPr lang="pt-BR" dirty="0"/>
-                  <a:t> com busca por operações, conexões e redução de canais, </a:t>
-                </a:r>
-              </a:p>
-              <a:p>
-                <a:r>
-                  <a:rPr lang="pt-BR" b="1" dirty="0"/>
-                  <a:t>saída do sistema:</a:t>
-                </a:r>
-                <a:r>
-                  <a:rPr lang="pt-BR" dirty="0"/>
-                  <a:t> arquitetura final discreta, derivada dos parâmetros aprendidos.</a:t>
-                </a:r>
-              </a:p>
-            </p:txBody>
-          </p:sp>
-        </mc:Choice>
-        <mc:Fallback xmlns="">
-          <p:sp>
-            <p:nvSpPr>
-              <p:cNvPr id="3" name="Notes Placeholder 2"/>
-              <p:cNvSpPr>
-                <a:spLocks noGrp="1"/>
-              </p:cNvSpPr>
-              <p:nvPr>
-                <p:ph type="body" idx="1"/>
-              </p:nvPr>
-            </p:nvSpPr>
-            <p:spPr/>
-            <p:txBody>
-              <a:bodyPr/>
-              <a:lstStyle/>
-              <a:p>
-                <a:pPr marL="171450" indent="-171450">
-                  <a:buFont typeface="Arial" panose="020B0604020202020204" pitchFamily="34" charset="0"/>
-                  <a:buChar char="•"/>
-                </a:pPr>
-                <a:r>
-                  <a:rPr lang="pt-BR" dirty="0"/>
-                  <a:t>A posição das antenas é variável importante porque, neste </a:t>
-                </a:r>
-                <a:r>
-                  <a:rPr lang="pt-BR" dirty="0" err="1"/>
-                  <a:t>paper</a:t>
-                </a:r>
-                <a:r>
-                  <a:rPr lang="pt-BR" dirty="0"/>
-                  <a:t>, a BS não é um arranjo fixo tradicional. As </a:t>
-                </a:r>
-                <a:r>
-                  <a:rPr lang="pt-BR" dirty="0" err="1"/>
-                  <a:t>fluid</a:t>
-                </a:r>
-                <a:r>
-                  <a:rPr lang="pt-BR" dirty="0"/>
-                  <a:t> </a:t>
-                </a:r>
-                <a:r>
-                  <a:rPr lang="pt-BR" dirty="0" err="1"/>
-                  <a:t>antennas</a:t>
-                </a:r>
-                <a:r>
-                  <a:rPr lang="pt-BR" dirty="0"/>
-                  <a:t> podem se mover dentro de um painel. Isso altera o canal sem fio. Então, diferente de um sistema MIMO convencional em que a geometria é fixa, aqui a geometria da BS é parte do problema de otimização.</a:t>
-                </a:r>
-              </a:p>
-              <a:p>
-                <a:pPr marL="171450" indent="-171450">
-                  <a:buFont typeface="Arial" panose="020B0604020202020204" pitchFamily="34" charset="0"/>
-                  <a:buChar char="•"/>
-                </a:pPr>
-                <a:r>
-                  <a:rPr lang="pt-BR" dirty="0"/>
-                  <a:t>Aqui no lado esquerdo do slide estão as definições matemáticas das posições dessas antenas. O vetor </a:t>
-                </a:r>
-                <a:r>
-                  <a:rPr lang="ar-AE" sz="1200" b="1" i="0" kern="1200">
-                    <a:solidFill>
-                      <a:schemeClr val="tx1"/>
-                    </a:solidFill>
-                    <a:latin typeface="+mn-lt"/>
-                    <a:ea typeface="+mn-ea"/>
-                    <a:cs typeface="+mn-cs"/>
-                  </a:rPr>
-                  <a:t>𝐭_(</a:t>
-                </a:r>
-                <a:r>
-                  <a:rPr lang="ar-AE" sz="1200" b="0" i="0" kern="1200">
-                    <a:solidFill>
-                      <a:schemeClr val="tx1"/>
-                    </a:solidFill>
-                    <a:latin typeface="+mn-lt"/>
-                    <a:ea typeface="+mn-ea"/>
-                    <a:cs typeface="+mn-cs"/>
-                  </a:rPr>
-                  <a:t>𝑢,𝑎</a:t>
-                </a:r>
-                <a:r>
-                  <a:rPr lang="ar-AE" sz="1200" b="1" i="0" kern="1200">
-                    <a:solidFill>
-                      <a:schemeClr val="tx1"/>
-                    </a:solidFill>
-                    <a:latin typeface="+mn-lt"/>
-                    <a:ea typeface="+mn-ea"/>
-                    <a:cs typeface="+mn-cs"/>
-                  </a:rPr>
-                  <a:t>)</a:t>
-                </a:r>
-                <a:r>
-                  <a:rPr lang="pt-BR" dirty="0"/>
-                  <a:t>representa a posição da antena </a:t>
-                </a:r>
-                <a:r>
-                  <a:rPr lang="pt-BR" sz="1200" i="0" kern="1200">
-                    <a:solidFill>
-                      <a:schemeClr val="tx1"/>
-                    </a:solidFill>
-                    <a:latin typeface="+mn-lt"/>
-                    <a:ea typeface="+mn-ea"/>
-                    <a:cs typeface="+mn-cs"/>
-                  </a:rPr>
-                  <a:t>𝑎</a:t>
-                </a:r>
-                <a:r>
-                  <a:rPr lang="pt-BR" dirty="0"/>
-                  <a:t>do usuário </a:t>
-                </a:r>
-                <a:r>
-                  <a:rPr lang="pt-BR" sz="1200" i="0" kern="1200">
-                    <a:solidFill>
-                      <a:schemeClr val="tx1"/>
-                    </a:solidFill>
-                    <a:latin typeface="+mn-lt"/>
-                    <a:ea typeface="+mn-ea"/>
-                    <a:cs typeface="+mn-cs"/>
-                  </a:rPr>
-                  <a:t>𝑢</a:t>
-                </a:r>
-                <a:r>
-                  <a:rPr lang="pt-BR" dirty="0"/>
-                  <a:t>, com coordenadas </a:t>
-                </a:r>
-                <a:r>
-                  <a:rPr lang="pt-BR" sz="1200" i="0" kern="1200">
-                    <a:solidFill>
-                      <a:schemeClr val="tx1"/>
-                    </a:solidFill>
-                    <a:latin typeface="+mn-lt"/>
-                    <a:ea typeface="+mn-ea"/>
-                    <a:cs typeface="+mn-cs"/>
-                  </a:rPr>
-                  <a:t>𝑥</a:t>
-                </a:r>
-                <a:r>
-                  <a:rPr lang="pt-BR" dirty="0"/>
-                  <a:t>e </a:t>
-                </a:r>
-                <a:r>
-                  <a:rPr lang="pt-BR" sz="1200" i="0" kern="1200">
-                    <a:solidFill>
-                      <a:schemeClr val="tx1"/>
-                    </a:solidFill>
-                    <a:latin typeface="+mn-lt"/>
-                    <a:ea typeface="+mn-ea"/>
-                    <a:cs typeface="+mn-cs"/>
-                  </a:rPr>
-                  <a:t>𝑦</a:t>
-                </a:r>
-                <a:r>
-                  <a:rPr lang="pt-BR" dirty="0"/>
-                  <a:t>. O </a:t>
-                </a:r>
-                <a:r>
-                  <a:rPr lang="pt-BR" dirty="0" err="1"/>
-                  <a:t>paper</a:t>
-                </a:r>
-                <a:r>
-                  <a:rPr lang="pt-BR" dirty="0"/>
-                  <a:t> agrupa todas essas posições na matriz </a:t>
-                </a:r>
-                <a:r>
-                  <a:rPr lang="pt-BR" sz="1200" b="1" i="0" kern="1200">
-                    <a:solidFill>
-                      <a:schemeClr val="tx1"/>
-                    </a:solidFill>
-                    <a:latin typeface="+mn-lt"/>
-                    <a:ea typeface="+mn-ea"/>
-                    <a:cs typeface="+mn-cs"/>
-                  </a:rPr>
-                  <a:t>𝐓</a:t>
-                </a:r>
-                <a:r>
-                  <a:rPr lang="pt-BR" dirty="0"/>
-                  <a:t>. Já a posição da </a:t>
-                </a:r>
-                <a:r>
-                  <a:rPr lang="pt-BR" dirty="0" err="1"/>
-                  <a:t>fluid</a:t>
-                </a:r>
-                <a:r>
-                  <a:rPr lang="pt-BR" dirty="0"/>
-                  <a:t> </a:t>
-                </a:r>
-                <a:r>
-                  <a:rPr lang="pt-BR" dirty="0" err="1"/>
-                  <a:t>antenna</a:t>
-                </a:r>
-                <a:r>
-                  <a:rPr lang="pt-BR" dirty="0"/>
-                  <a:t> </a:t>
-                </a:r>
-                <a:r>
-                  <a:rPr lang="pt-BR" sz="1200" i="0" kern="1200">
-                    <a:solidFill>
-                      <a:schemeClr val="tx1"/>
-                    </a:solidFill>
-                    <a:latin typeface="+mn-lt"/>
-                    <a:ea typeface="+mn-ea"/>
-                    <a:cs typeface="+mn-cs"/>
-                  </a:rPr>
-                  <a:t>𝑚</a:t>
-                </a:r>
-                <a:r>
-                  <a:rPr lang="pt-BR" dirty="0"/>
-                  <a:t>da BS é representada por </a:t>
-                </a:r>
-                <a:r>
-                  <a:rPr lang="ar-AE" sz="1200" b="1" i="0" kern="1200">
-                    <a:solidFill>
-                      <a:schemeClr val="tx1"/>
-                    </a:solidFill>
-                    <a:latin typeface="+mn-lt"/>
-                    <a:ea typeface="+mn-ea"/>
-                    <a:cs typeface="+mn-cs"/>
-                  </a:rPr>
-                  <a:t>𝐫_</a:t>
-                </a:r>
-                <a:r>
-                  <a:rPr lang="ar-AE" sz="1200" b="0" i="0" kern="1200">
-                    <a:solidFill>
-                      <a:schemeClr val="tx1"/>
-                    </a:solidFill>
-                    <a:latin typeface="+mn-lt"/>
-                    <a:ea typeface="+mn-ea"/>
-                    <a:cs typeface="+mn-cs"/>
-                  </a:rPr>
-                  <a:t>𝑚</a:t>
-                </a:r>
-                <a:r>
-                  <a:rPr lang="ar-AE" dirty="0"/>
-                  <a:t>, </a:t>
-                </a:r>
-                <a:r>
-                  <a:rPr lang="pt-BR" dirty="0"/>
-                  <a:t>e todas as posições da BS são agrupadas na matriz </a:t>
-                </a:r>
-                <a:r>
-                  <a:rPr lang="pt-BR" sz="1200" b="1" i="0" kern="1200">
-                    <a:solidFill>
-                      <a:schemeClr val="tx1"/>
-                    </a:solidFill>
-                    <a:latin typeface="+mn-lt"/>
-                    <a:ea typeface="+mn-ea"/>
-                    <a:cs typeface="+mn-cs"/>
-                  </a:rPr>
-                  <a:t>𝐑</a:t>
-                </a:r>
-                <a:r>
-                  <a:rPr lang="pt-BR" dirty="0"/>
-                  <a:t>.</a:t>
-                </a:r>
-              </a:p>
-              <a:p>
-                <a:pPr marL="171450" indent="-171450">
-                  <a:buFont typeface="Arial" panose="020B0604020202020204" pitchFamily="34" charset="0"/>
-                  <a:buChar char="•"/>
-                </a:pPr>
-                <a:endParaRPr lang="pt-BR" dirty="0"/>
-              </a:p>
-              <a:p>
-                <a:pPr marL="171450" indent="-171450">
-                  <a:buFont typeface="Arial" panose="020B0604020202020204" pitchFamily="34" charset="0"/>
-                  <a:buChar char="•"/>
-                </a:pPr>
-                <a:r>
-                  <a:rPr lang="pt-BR" dirty="0"/>
-                  <a:t>Outro ponto importante é que o sistema usa </a:t>
-                </a:r>
-                <a:r>
-                  <a:rPr lang="pt-BR" dirty="0" err="1"/>
-                  <a:t>space-division</a:t>
-                </a:r>
-                <a:r>
-                  <a:rPr lang="pt-BR" dirty="0"/>
-                  <a:t> </a:t>
-                </a:r>
-                <a:r>
-                  <a:rPr lang="pt-BR" dirty="0" err="1"/>
-                  <a:t>multiple</a:t>
-                </a:r>
-                <a:r>
-                  <a:rPr lang="pt-BR" dirty="0"/>
-                  <a:t> </a:t>
-                </a:r>
-                <a:r>
-                  <a:rPr lang="pt-BR" dirty="0" err="1"/>
-                  <a:t>access</a:t>
-                </a:r>
-                <a:r>
-                  <a:rPr lang="pt-BR" dirty="0"/>
-                  <a:t>. Isso significa que vários usuários podem se comunicar com a base </a:t>
-                </a:r>
-                <a:r>
-                  <a:rPr lang="pt-BR" dirty="0" err="1"/>
-                  <a:t>station</a:t>
-                </a:r>
-                <a:r>
-                  <a:rPr lang="pt-BR" dirty="0"/>
-                  <a:t> ao mesmo tempo, explorando separação espacial.</a:t>
-                </a:r>
-              </a:p>
-              <a:p>
-                <a:pPr marL="171450" indent="-171450">
-                  <a:buFont typeface="Arial" panose="020B0604020202020204" pitchFamily="34" charset="0"/>
-                  <a:buChar char="•"/>
-                </a:pPr>
-                <a:r>
-                  <a:rPr lang="pt-BR" dirty="0"/>
-                  <a:t>Além disso, existe um servidor no sistema, e esse servidor é quem executa a parte pesada da inferência do </a:t>
-                </a:r>
-                <a:r>
-                  <a:rPr lang="pt-BR" dirty="0" err="1"/>
-                  <a:t>large</a:t>
-                </a:r>
-                <a:r>
-                  <a:rPr lang="pt-BR" dirty="0"/>
-                  <a:t> model. A outra parte é executada no cliente.</a:t>
-                </a:r>
-              </a:p>
-              <a:p>
-                <a:pPr marL="171450" indent="-171450">
-                  <a:buFont typeface="Arial" panose="020B0604020202020204" pitchFamily="34" charset="0"/>
-                  <a:buChar char="•"/>
-                </a:pPr>
-                <a:endParaRPr lang="pt-BR" dirty="0"/>
-              </a:p>
-              <a:p>
-                <a:pPr marL="171450" indent="-171450">
-                  <a:buFont typeface="Arial" panose="020B0604020202020204" pitchFamily="34" charset="0"/>
-                  <a:buChar char="•"/>
-                </a:pPr>
-                <a:r>
-                  <a:rPr lang="pt-BR" dirty="0"/>
-                  <a:t>Por fim, o </a:t>
-                </a:r>
-                <a:r>
-                  <a:rPr lang="pt-BR" dirty="0" err="1"/>
-                  <a:t>paper</a:t>
-                </a:r>
-                <a:r>
-                  <a:rPr lang="pt-BR" dirty="0"/>
-                  <a:t> assume que o tempo necessário para ajustar a posição das </a:t>
-                </a:r>
-                <a:r>
-                  <a:rPr lang="pt-BR" dirty="0" err="1"/>
-                  <a:t>fluid</a:t>
-                </a:r>
-                <a:r>
-                  <a:rPr lang="pt-BR" dirty="0"/>
-                  <a:t> </a:t>
-                </a:r>
-                <a:r>
-                  <a:rPr lang="pt-BR" dirty="0" err="1"/>
-                  <a:t>antennas</a:t>
-                </a:r>
-                <a:r>
-                  <a:rPr lang="pt-BR" dirty="0"/>
-                  <a:t> é desprezível. Em outras palavras, eles ignoram esse custo mecânico ou físico e consideram apenas o ganho que o reposicionamento traz para o canal e para a taxa de transmissão.</a:t>
-                </a:r>
-              </a:p>
-              <a:p>
-                <a:pPr marL="171450" indent="-171450">
-                  <a:buFont typeface="Arial" panose="020B0604020202020204" pitchFamily="34" charset="0"/>
-                  <a:buChar char="•"/>
-                </a:pPr>
-                <a:endParaRPr lang="pt-BR" dirty="0"/>
-              </a:p>
-              <a:p>
-                <a:pPr marL="171450" indent="-171450">
-                  <a:buFont typeface="Arial" panose="020B0604020202020204" pitchFamily="34" charset="0"/>
-                  <a:buChar char="•"/>
-                </a:pPr>
-                <a:r>
-                  <a:rPr lang="pt-BR" dirty="0"/>
-                  <a:t>Pense em um painel retangular na BS, e cada </a:t>
-                </a:r>
-                <a:r>
-                  <a:rPr lang="pt-BR" dirty="0" err="1"/>
-                  <a:t>fluid</a:t>
-                </a:r>
-                <a:r>
-                  <a:rPr lang="pt-BR" dirty="0"/>
-                  <a:t> </a:t>
-                </a:r>
-                <a:r>
-                  <a:rPr lang="pt-BR" dirty="0" err="1"/>
-                  <a:t>antenna</a:t>
-                </a:r>
-                <a:r>
-                  <a:rPr lang="pt-BR" dirty="0"/>
-                  <a:t> pode “andar” nesse painel em duas direções, </a:t>
-                </a:r>
-                <a:r>
-                  <a:rPr lang="pt-BR" sz="1200" i="0" kern="1200">
-                    <a:solidFill>
-                      <a:schemeClr val="tx1"/>
-                    </a:solidFill>
-                    <a:latin typeface="+mn-lt"/>
-                    <a:ea typeface="+mn-ea"/>
-                    <a:cs typeface="+mn-cs"/>
-                  </a:rPr>
-                  <a:t>𝑥</a:t>
-                </a:r>
-                <a:r>
-                  <a:rPr lang="pt-BR" dirty="0"/>
-                  <a:t>e </a:t>
-                </a:r>
-                <a:r>
-                  <a:rPr lang="pt-BR" sz="1200" i="0" kern="1200">
-                    <a:solidFill>
-                      <a:schemeClr val="tx1"/>
-                    </a:solidFill>
-                    <a:latin typeface="+mn-lt"/>
-                    <a:ea typeface="+mn-ea"/>
-                    <a:cs typeface="+mn-cs"/>
-                  </a:rPr>
-                  <a:t>𝑦</a:t>
-                </a:r>
-                <a:r>
-                  <a:rPr lang="pt-BR" dirty="0"/>
-                  <a:t>.</a:t>
-                </a:r>
-                <a:br>
-                  <a:rPr lang="pt-BR" dirty="0"/>
-                </a:br>
-                <a:r>
-                  <a:rPr lang="pt-BR" dirty="0"/>
-                  <a:t>a modelagem não está nesse nível discreto de “</a:t>
-                </a:r>
-                <a:r>
-                  <a:rPr lang="pt-BR" dirty="0" err="1"/>
-                  <a:t>port</a:t>
-                </a:r>
-                <a:r>
-                  <a:rPr lang="pt-BR" dirty="0"/>
-                  <a:t> 1, </a:t>
-                </a:r>
-                <a:r>
-                  <a:rPr lang="pt-BR" dirty="0" err="1"/>
-                  <a:t>port</a:t>
-                </a:r>
-                <a:r>
-                  <a:rPr lang="pt-BR" dirty="0"/>
-                  <a:t> 2, </a:t>
-                </a:r>
-                <a:r>
-                  <a:rPr lang="pt-BR" dirty="0" err="1"/>
-                  <a:t>port</a:t>
-                </a:r>
-                <a:r>
-                  <a:rPr lang="pt-BR" dirty="0"/>
-                  <a:t> 3...”, é como uma antena 2d, porém em termos de x e y</a:t>
-                </a:r>
-              </a:p>
-            </p:txBody>
-          </p:sp>
-        </mc:Fallback>
-      </mc:AlternateContent>
-      <p:sp>
-        <p:nvSpPr>
-          <p:cNvPr id="4" name="Slide Number Placeholder 3"/>
-          <p:cNvSpPr>
-            <a:spLocks noGrp="1"/>
-          </p:cNvSpPr>
-          <p:nvPr>
-            <p:ph type="sldNum" sz="quarter" idx="5"/>
-          </p:nvPr>
-        </p:nvSpPr>
-        <p:spPr/>
-        <p:txBody>
-          <a:bodyPr/>
-          <a:lstStyle/>
-          <a:p>
-            <a:fld id="{6FC8D850-966F-45A6-8DE7-15B891E7D40D}" type="slidenum">
-              <a:rPr lang="pt-BR" smtClean="0"/>
-              <a:t>10</a:t>
-            </a:fld>
-            <a:endParaRPr lang="pt-BR"/>
-          </a:p>
-        </p:txBody>
-      </p:sp>
-    </p:spTree>
-    <p:extLst>
-      <p:ext uri="{BB962C8B-B14F-4D97-AF65-F5344CB8AC3E}">
-        <p14:creationId xmlns:p14="http://schemas.microsoft.com/office/powerpoint/2010/main" val="816809714"/>
       </p:ext>
     </p:extLst>
   </p:cSld>
@@ -16616,7 +18297,7 @@
           <a:p>
             <a:fld id="{708DD511-5376-4C60-A4B1-F569E747FD97}" type="datetime1">
               <a:rPr lang="pt-BR" smtClean="0"/>
-              <a:t>25/04/2026</a:t>
+              <a:t>04/05/2026</a:t>
             </a:fld>
             <a:endParaRPr lang="pt-BR"/>
           </a:p>
@@ -16814,7 +18495,7 @@
           <a:p>
             <a:fld id="{EC578684-DE8A-46BB-A7AC-270F275806FB}" type="datetime1">
               <a:rPr lang="pt-BR" smtClean="0"/>
-              <a:t>25/04/2026</a:t>
+              <a:t>04/05/2026</a:t>
             </a:fld>
             <a:endParaRPr lang="pt-BR"/>
           </a:p>
@@ -17022,7 +18703,7 @@
           <a:p>
             <a:fld id="{CEBE5343-9554-44F5-B62D-898A9211AAD4}" type="datetime1">
               <a:rPr lang="pt-BR" smtClean="0"/>
-              <a:t>25/04/2026</a:t>
+              <a:t>04/05/2026</a:t>
             </a:fld>
             <a:endParaRPr lang="pt-BR"/>
           </a:p>
@@ -17220,7 +18901,7 @@
           <a:p>
             <a:fld id="{4EED664D-11F8-4898-96DA-EB20BD65F243}" type="datetime1">
               <a:rPr lang="pt-BR" smtClean="0"/>
-              <a:t>25/04/2026</a:t>
+              <a:t>04/05/2026</a:t>
             </a:fld>
             <a:endParaRPr lang="pt-BR"/>
           </a:p>
@@ -17495,7 +19176,7 @@
           <a:p>
             <a:fld id="{EEA9C168-D1FE-4349-9608-4E60F81C1DBC}" type="datetime1">
               <a:rPr lang="pt-BR" smtClean="0"/>
-              <a:t>25/04/2026</a:t>
+              <a:t>04/05/2026</a:t>
             </a:fld>
             <a:endParaRPr lang="pt-BR"/>
           </a:p>
@@ -17760,7 +19441,7 @@
           <a:p>
             <a:fld id="{29DD712D-DF33-4608-A1B2-F7B150BFFB9C}" type="datetime1">
               <a:rPr lang="pt-BR" smtClean="0"/>
-              <a:t>25/04/2026</a:t>
+              <a:t>04/05/2026</a:t>
             </a:fld>
             <a:endParaRPr lang="pt-BR"/>
           </a:p>
@@ -18172,7 +19853,7 @@
           <a:p>
             <a:fld id="{F5ED21D9-36F9-4F50-8DEF-B52348D6B44D}" type="datetime1">
               <a:rPr lang="pt-BR" smtClean="0"/>
-              <a:t>25/04/2026</a:t>
+              <a:t>04/05/2026</a:t>
             </a:fld>
             <a:endParaRPr lang="pt-BR"/>
           </a:p>
@@ -18313,7 +19994,7 @@
           <a:p>
             <a:fld id="{811B2EBB-C4EA-4652-BDE1-A6C50C0B8D25}" type="datetime1">
               <a:rPr lang="pt-BR" smtClean="0"/>
-              <a:t>25/04/2026</a:t>
+              <a:t>04/05/2026</a:t>
             </a:fld>
             <a:endParaRPr lang="pt-BR"/>
           </a:p>
@@ -18426,7 +20107,7 @@
           <a:p>
             <a:fld id="{664E892E-BA3D-456C-B0A6-9CC49D6F9DBA}" type="datetime1">
               <a:rPr lang="pt-BR" smtClean="0"/>
-              <a:t>25/04/2026</a:t>
+              <a:t>04/05/2026</a:t>
             </a:fld>
             <a:endParaRPr lang="pt-BR"/>
           </a:p>
@@ -18737,7 +20418,7 @@
           <a:p>
             <a:fld id="{05E0994A-F2E2-4207-9BF3-B388014DC8A9}" type="datetime1">
               <a:rPr lang="pt-BR" smtClean="0"/>
-              <a:t>25/04/2026</a:t>
+              <a:t>04/05/2026</a:t>
             </a:fld>
             <a:endParaRPr lang="pt-BR"/>
           </a:p>
@@ -19025,7 +20706,7 @@
           <a:p>
             <a:fld id="{0A95E1C0-EB12-4A55-94DB-C3DACCDE6605}" type="datetime1">
               <a:rPr lang="pt-BR" smtClean="0"/>
-              <a:t>25/04/2026</a:t>
+              <a:t>04/05/2026</a:t>
             </a:fld>
             <a:endParaRPr lang="pt-BR"/>
           </a:p>
@@ -19266,7 +20947,7 @@
           <a:p>
             <a:fld id="{37E0E027-05FF-4DD2-96BD-C645F6FDFE4A}" type="datetime1">
               <a:rPr lang="pt-BR" smtClean="0"/>
-              <a:t>25/04/2026</a:t>
+              <a:t>04/05/2026</a:t>
             </a:fld>
             <a:endParaRPr lang="pt-BR"/>
           </a:p>
@@ -23612,7 +25293,7 @@
           <p:nvPr/>
         </p:nvPicPr>
         <p:blipFill>
-          <a:blip r:embed="rId2">
+          <a:blip r:embed="rId3">
             <a:extLst>
               <a:ext uri="{28A0092B-C50C-407E-A947-70E740481C1C}">
                 <a14:useLocalDpi xmlns:a14="http://schemas.microsoft.com/office/drawing/2010/main" val="0"/>
@@ -23659,7 +25340,7 @@
           <p:nvPr/>
         </p:nvPicPr>
         <p:blipFill>
-          <a:blip r:embed="rId3"/>
+          <a:blip r:embed="rId4"/>
           <a:stretch>
             <a:fillRect/>
           </a:stretch>
@@ -23798,36 +25479,6 @@
           <a:xfrm>
             <a:off x="3876949" y="4833879"/>
             <a:ext cx="900324" cy="460511"/>
-          </a:xfrm>
-          <a:prstGeom prst="rect">
-            <a:avLst/>
-          </a:prstGeom>
-        </p:spPr>
-      </p:pic>
-      <p:pic>
-        <p:nvPicPr>
-          <p:cNvPr id="9" name="Picture 8">
-            <a:extLst>
-              <a:ext uri="{FF2B5EF4-FFF2-40B4-BE49-F238E27FC236}">
-                <a16:creationId xmlns:a16="http://schemas.microsoft.com/office/drawing/2014/main" id="{1424489A-F78B-AF27-296E-3548452CDBBE}"/>
-              </a:ext>
-            </a:extLst>
-          </p:cNvPr>
-          <p:cNvPicPr>
-            <a:picLocks noChangeAspect="1"/>
-          </p:cNvPicPr>
-          <p:nvPr/>
-        </p:nvPicPr>
-        <p:blipFill>
-          <a:blip r:embed="rId4"/>
-          <a:stretch>
-            <a:fillRect/>
-          </a:stretch>
-        </p:blipFill>
-        <p:spPr>
-          <a:xfrm>
-            <a:off x="5914128" y="5932428"/>
-            <a:ext cx="97892" cy="847843"/>
           </a:xfrm>
           <a:prstGeom prst="rect">
             <a:avLst/>
